--- a/slides.pptx
+++ b/slides.pptx
@@ -4,19 +4,22 @@
   <p:sldMasterIdLst>
     <p:sldMasterId id="2147483648" r:id="rId1"/>
   </p:sldMasterIdLst>
+  <p:notesMasterIdLst>
+    <p:notesMasterId r:id="rId12"/>
+  </p:notesMasterIdLst>
   <p:sldIdLst>
-    <p:sldId id="256" r:id="rId7"/>
-    <p:sldId id="257" r:id="rId9"/>
-    <p:sldId id="258" r:id="rId10"/>
-    <p:sldId id="259" r:id="rId11"/>
-    <p:sldId id="260" r:id="rId12"/>
-    <p:sldId id="261" r:id="rId13"/>
-    <p:sldId id="262" r:id="rId14"/>
-    <p:sldId id="263" r:id="rId15"/>
-    <p:sldId id="264" r:id="rId16"/>
-    <p:sldId id="265" r:id="rId17"/>
+    <p:sldId id="256" r:id="rId2"/>
+    <p:sldId id="257" r:id="rId3"/>
+    <p:sldId id="258" r:id="rId4"/>
+    <p:sldId id="259" r:id="rId5"/>
+    <p:sldId id="260" r:id="rId6"/>
+    <p:sldId id="261" r:id="rId7"/>
+    <p:sldId id="266" r:id="rId8"/>
+    <p:sldId id="262" r:id="rId9"/>
+    <p:sldId id="263" r:id="rId10"/>
+    <p:sldId id="267" r:id="rId11"/>
   </p:sldIdLst>
-  <p:sldSz cx="12191695" cy="6858000" type="screen4x3"/>
+  <p:sldSz cx="12192000" cy="6858000"/>
   <p:notesSz cx="6858000" cy="9144000"/>
   <p:defaultTextStyle>
     <a:defPPr>
@@ -113,11 +116,27 @@
       </a:defRPr>
     </a:lvl9pPr>
   </p:defaultTextStyle>
+  <p:extLst>
+    <p:ext uri="{EFAFB233-063F-42B5-8137-9DF3F51BA10A}">
+      <p15:sldGuideLst xmlns:p15="http://schemas.microsoft.com/office/powerpoint/2012/main">
+        <p15:guide id="1" orient="horz" pos="2160">
+          <p15:clr>
+            <a:srgbClr val="A4A3A4"/>
+          </p15:clr>
+        </p15:guide>
+        <p15:guide id="2" pos="2880">
+          <p15:clr>
+            <a:srgbClr val="A4A3A4"/>
+          </p15:clr>
+        </p15:guide>
+      </p15:sldGuideLst>
+    </p:ext>
+  </p:extLst>
 </p:presentation>
 </file>
 
 <file path=ppt/notesMasters/notesMaster1.xml><?xml version="1.0" encoding="utf-8"?>
-<p:notesMaster xmlns:a="http://schemas.openxmlformats.org/drawingml/2006/main" xmlns:p="http://schemas.openxmlformats.org/presentationml/2006/main" xmlns:r="http://schemas.openxmlformats.org/officeDocument/2006/relationships">
+<p:notesMaster xmlns:a="http://schemas.openxmlformats.org/drawingml/2006/main" xmlns:r="http://schemas.openxmlformats.org/officeDocument/2006/relationships" xmlns:p="http://schemas.openxmlformats.org/presentationml/2006/main">
   <p:cSld>
     <p:bg>
       <p:bgRef idx="1001">
@@ -138,241 +157,16 @@
           <a:chExt cx="0" cy="0"/>
         </a:xfrm>
       </p:grpSpPr>
-      <p:sp>
-        <p:nvSpPr>
-          <p:cNvPr id="2" name="Header Placeholder 1"/>
-          <p:cNvSpPr>
-            <a:spLocks noGrp="1"/>
-          </p:cNvSpPr>
-          <p:nvPr>
-            <p:ph type="hdr" sz="quarter"/>
-          </p:nvPr>
-        </p:nvSpPr>
-        <p:spPr>
-          <a:xfrm>
-            <a:off x="0" y="0"/>
-            <a:ext cx="2971800" cy="457200"/>
-          </a:xfrm>
-          <a:prstGeom prst="rect">
-            <a:avLst/>
-          </a:prstGeom>
-        </p:spPr>
-        <p:txBody>
-          <a:bodyPr vert="horz" lIns="91440" tIns="45720" rIns="91440" bIns="45720" rtlCol="0"/>
-          <a:lstStyle>
-            <a:lvl1pPr algn="l">
-              <a:defRPr sz="1200"/>
-            </a:lvl1pPr>
-          </a:lstStyle>
-          <a:p>
-            <a:endParaRPr lang="en-US"/>
-          </a:p>
-        </p:txBody>
-      </p:sp>
-      <p:sp>
-        <p:nvSpPr>
-          <p:cNvPr id="3" name="Date Placeholder 2"/>
-          <p:cNvSpPr>
-            <a:spLocks noGrp="1"/>
-          </p:cNvSpPr>
-          <p:nvPr>
-            <p:ph type="dt" idx="1"/>
-          </p:nvPr>
-        </p:nvSpPr>
-        <p:spPr>
-          <a:xfrm>
-            <a:off x="3884613" y="0"/>
-            <a:ext cx="2971800" cy="457200"/>
-          </a:xfrm>
-          <a:prstGeom prst="rect">
-            <a:avLst/>
-          </a:prstGeom>
-        </p:spPr>
-        <p:txBody>
-          <a:bodyPr vert="horz" lIns="91440" tIns="45720" rIns="91440" bIns="45720" rtlCol="0"/>
-          <a:lstStyle>
-            <a:lvl1pPr algn="r">
-              <a:defRPr sz="1200"/>
-            </a:lvl1pPr>
-          </a:lstStyle>
-          <a:p>
-            <a:fld id="{0F89C1C7-3DCD-1040-A9CF-14679D8B5DDD}" type="datetimeFigureOut">
-              <a:rPr lang="en-US" smtClean="0"/>
-              <a:t>10/17/16</a:t>
-            </a:fld>
-            <a:endParaRPr lang="en-US"/>
-          </a:p>
-        </p:txBody>
-      </p:sp>
-      <p:sp>
-        <p:nvSpPr>
-          <p:cNvPr id="4" name="Slide Image Placeholder 3"/>
-          <p:cNvSpPr>
-            <a:spLocks noGrp="1" noRot="1" noChangeAspect="1"/>
-          </p:cNvSpPr>
-          <p:nvPr>
-            <p:ph type="sldImg" idx="2"/>
-          </p:nvPr>
-        </p:nvSpPr>
-        <p:spPr>
-          <a:xfrm>
-            <a:off x="1143000" y="685800"/>
-            <a:ext cx="4572000" cy="3429000"/>
-          </a:xfrm>
-          <a:prstGeom prst="rect">
-            <a:avLst/>
-          </a:prstGeom>
-          <a:noFill/>
-          <a:ln w="12700">
-            <a:solidFill>
-              <a:prstClr val="black"/>
-            </a:solidFill>
-          </a:ln>
-        </p:spPr>
-        <p:txBody>
-          <a:bodyPr vert="horz" lIns="91440" tIns="45720" rIns="91440" bIns="45720" rtlCol="0" anchor="ctr"/>
-          <a:lstStyle/>
-          <a:p>
-            <a:endParaRPr lang="en-US"/>
-          </a:p>
-        </p:txBody>
-      </p:sp>
-      <p:sp>
-        <p:nvSpPr>
-          <p:cNvPr id="5" name="Notes Placeholder 4"/>
-          <p:cNvSpPr>
-            <a:spLocks noGrp="1"/>
-          </p:cNvSpPr>
-          <p:nvPr>
-            <p:ph type="body" sz="quarter" idx="3"/>
-          </p:nvPr>
-        </p:nvSpPr>
-        <p:spPr>
-          <a:xfrm>
-            <a:off x="685800" y="4343400"/>
-            <a:ext cx="5486400" cy="4114800"/>
-          </a:xfrm>
-          <a:prstGeom prst="rect">
-            <a:avLst/>
-          </a:prstGeom>
-        </p:spPr>
-        <p:txBody>
-          <a:bodyPr vert="horz" lIns="91440" tIns="45720" rIns="91440" bIns="45720" rtlCol="0"/>
-          <a:lstStyle/>
-          <a:p>
-            <a:pPr lvl="0"/>
-            <a:r>
-              <a:rPr lang="en-US" smtClean="0"/>
-              <a:t>Click to edit Master text styles</a:t>
-            </a:r>
-          </a:p>
-          <a:p>
-            <a:pPr lvl="1"/>
-            <a:r>
-              <a:rPr lang="en-US" smtClean="0"/>
-              <a:t>Second level</a:t>
-            </a:r>
-          </a:p>
-          <a:p>
-            <a:pPr lvl="2"/>
-            <a:r>
-              <a:rPr lang="en-US" smtClean="0"/>
-              <a:t>Third level</a:t>
-            </a:r>
-          </a:p>
-          <a:p>
-            <a:pPr lvl="3"/>
-            <a:r>
-              <a:rPr lang="en-US" smtClean="0"/>
-              <a:t>Fourth level</a:t>
-            </a:r>
-          </a:p>
-          <a:p>
-            <a:pPr lvl="4"/>
-            <a:r>
-              <a:rPr lang="en-US" smtClean="0"/>
-              <a:t>Fifth level</a:t>
-            </a:r>
-            <a:endParaRPr lang="en-US"/>
-          </a:p>
-        </p:txBody>
-      </p:sp>
-      <p:sp>
-        <p:nvSpPr>
-          <p:cNvPr id="6" name="Footer Placeholder 5"/>
-          <p:cNvSpPr>
-            <a:spLocks noGrp="1"/>
-          </p:cNvSpPr>
-          <p:nvPr>
-            <p:ph type="ftr" sz="quarter" idx="4"/>
-          </p:nvPr>
-        </p:nvSpPr>
-        <p:spPr>
-          <a:xfrm>
-            <a:off x="0" y="8685213"/>
-            <a:ext cx="2971800" cy="457200"/>
-          </a:xfrm>
-          <a:prstGeom prst="rect">
-            <a:avLst/>
-          </a:prstGeom>
-        </p:spPr>
-        <p:txBody>
-          <a:bodyPr vert="horz" lIns="91440" tIns="45720" rIns="91440" bIns="45720" rtlCol="0" anchor="b"/>
-          <a:lstStyle>
-            <a:lvl1pPr algn="l">
-              <a:defRPr sz="1200"/>
-            </a:lvl1pPr>
-          </a:lstStyle>
-          <a:p>
-            <a:endParaRPr lang="en-US"/>
-          </a:p>
-        </p:txBody>
-      </p:sp>
-      <p:sp>
-        <p:nvSpPr>
-          <p:cNvPr id="7" name="Slide Number Placeholder 6"/>
-          <p:cNvSpPr>
-            <a:spLocks noGrp="1"/>
-          </p:cNvSpPr>
-          <p:nvPr>
-            <p:ph type="sldNum" sz="quarter" idx="5"/>
-          </p:nvPr>
-        </p:nvSpPr>
-        <p:spPr>
-          <a:xfrm>
-            <a:off x="3884613" y="8685213"/>
-            <a:ext cx="2971800" cy="457200"/>
-          </a:xfrm>
-          <a:prstGeom prst="rect">
-            <a:avLst/>
-          </a:prstGeom>
-        </p:spPr>
-        <p:txBody>
-          <a:bodyPr vert="horz" lIns="91440" tIns="45720" rIns="91440" bIns="45720" rtlCol="0" anchor="b"/>
-          <a:lstStyle>
-            <a:lvl1pPr algn="r">
-              <a:defRPr sz="1200"/>
-            </a:lvl1pPr>
-          </a:lstStyle>
-          <a:p>
-            <a:fld id="{BB5E49A5-4136-284D-997B-48E1D791AD67}" type="slidenum">
-              <a:rPr lang="en-US" smtClean="0"/>
-              <a:t>‹#›</a:t>
-            </a:fld>
-            <a:endParaRPr lang="en-US"/>
-          </a:p>
-        </p:txBody>
-      </p:sp>
     </p:spTree>
     <p:extLst>
       <p:ext uri="{BB962C8B-B14F-4D97-AF65-F5344CB8AC3E}">
-        <p14:creationId xmlns:p14="http://schemas.microsoft.com/office/powerpoint/2010/main" val="2623252185"/>
+        <p14:creationId xmlns:p14="http://schemas.microsoft.com/office/powerpoint/2010/main" val="4270998389"/>
       </p:ext>
     </p:extLst>
   </p:cSld>
   <p:clrMap bg1="lt1" tx1="dk1" bg2="lt2" tx2="dk2" accent1="accent1" accent2="accent2" accent3="accent3" accent4="accent4" accent5="accent5" accent6="accent6" hlink="hlink" folHlink="folHlink"/>
   <p:notesStyle>
-    <a:lvl1pPr marL="0" algn="l" defTabSz="457200" rtl="0" eaLnBrk="1" latinLnBrk="0" hangingPunct="1">
+    <a:lvl1pPr marL="0" algn="l" defTabSz="914400" rtl="0" eaLnBrk="1" latinLnBrk="0" hangingPunct="1">
       <a:defRPr sz="1200" kern="1200">
         <a:solidFill>
           <a:schemeClr val="tx1"/>
@@ -382,7 +176,7 @@
         <a:cs typeface="+mn-cs"/>
       </a:defRPr>
     </a:lvl1pPr>
-    <a:lvl2pPr marL="457200" algn="l" defTabSz="457200" rtl="0" eaLnBrk="1" latinLnBrk="0" hangingPunct="1">
+    <a:lvl2pPr marL="457200" algn="l" defTabSz="914400" rtl="0" eaLnBrk="1" latinLnBrk="0" hangingPunct="1">
       <a:defRPr sz="1200" kern="1200">
         <a:solidFill>
           <a:schemeClr val="tx1"/>
@@ -392,7 +186,7 @@
         <a:cs typeface="+mn-cs"/>
       </a:defRPr>
     </a:lvl2pPr>
-    <a:lvl3pPr marL="914400" algn="l" defTabSz="457200" rtl="0" eaLnBrk="1" latinLnBrk="0" hangingPunct="1">
+    <a:lvl3pPr marL="914400" algn="l" defTabSz="914400" rtl="0" eaLnBrk="1" latinLnBrk="0" hangingPunct="1">
       <a:defRPr sz="1200" kern="1200">
         <a:solidFill>
           <a:schemeClr val="tx1"/>
@@ -402,7 +196,7 @@
         <a:cs typeface="+mn-cs"/>
       </a:defRPr>
     </a:lvl3pPr>
-    <a:lvl4pPr marL="1371600" algn="l" defTabSz="457200" rtl="0" eaLnBrk="1" latinLnBrk="0" hangingPunct="1">
+    <a:lvl4pPr marL="1371600" algn="l" defTabSz="914400" rtl="0" eaLnBrk="1" latinLnBrk="0" hangingPunct="1">
       <a:defRPr sz="1200" kern="1200">
         <a:solidFill>
           <a:schemeClr val="tx1"/>
@@ -412,7 +206,7 @@
         <a:cs typeface="+mn-cs"/>
       </a:defRPr>
     </a:lvl4pPr>
-    <a:lvl5pPr marL="1828800" algn="l" defTabSz="457200" rtl="0" eaLnBrk="1" latinLnBrk="0" hangingPunct="1">
+    <a:lvl5pPr marL="1828800" algn="l" defTabSz="914400" rtl="0" eaLnBrk="1" latinLnBrk="0" hangingPunct="1">
       <a:defRPr sz="1200" kern="1200">
         <a:solidFill>
           <a:schemeClr val="tx1"/>
@@ -422,7 +216,7 @@
         <a:cs typeface="+mn-cs"/>
       </a:defRPr>
     </a:lvl5pPr>
-    <a:lvl6pPr marL="2286000" algn="l" defTabSz="457200" rtl="0" eaLnBrk="1" latinLnBrk="0" hangingPunct="1">
+    <a:lvl6pPr marL="2286000" algn="l" defTabSz="914400" rtl="0" eaLnBrk="1" latinLnBrk="0" hangingPunct="1">
       <a:defRPr sz="1200" kern="1200">
         <a:solidFill>
           <a:schemeClr val="tx1"/>
@@ -432,7 +226,7 @@
         <a:cs typeface="+mn-cs"/>
       </a:defRPr>
     </a:lvl6pPr>
-    <a:lvl7pPr marL="2743200" algn="l" defTabSz="457200" rtl="0" eaLnBrk="1" latinLnBrk="0" hangingPunct="1">
+    <a:lvl7pPr marL="2743200" algn="l" defTabSz="914400" rtl="0" eaLnBrk="1" latinLnBrk="0" hangingPunct="1">
       <a:defRPr sz="1200" kern="1200">
         <a:solidFill>
           <a:schemeClr val="tx1"/>
@@ -442,7 +236,7 @@
         <a:cs typeface="+mn-cs"/>
       </a:defRPr>
     </a:lvl7pPr>
-    <a:lvl8pPr marL="3200400" algn="l" defTabSz="457200" rtl="0" eaLnBrk="1" latinLnBrk="0" hangingPunct="1">
+    <a:lvl8pPr marL="3200400" algn="l" defTabSz="914400" rtl="0" eaLnBrk="1" latinLnBrk="0" hangingPunct="1">
       <a:defRPr sz="1200" kern="1200">
         <a:solidFill>
           <a:schemeClr val="tx1"/>
@@ -452,7 +246,7 @@
         <a:cs typeface="+mn-cs"/>
       </a:defRPr>
     </a:lvl8pPr>
-    <a:lvl9pPr marL="3657600" algn="l" defTabSz="457200" rtl="0" eaLnBrk="1" latinLnBrk="0" hangingPunct="1">
+    <a:lvl9pPr marL="3657600" algn="l" defTabSz="914400" rtl="0" eaLnBrk="1" latinLnBrk="0" hangingPunct="1">
       <a:defRPr sz="1200" kern="1200">
         <a:solidFill>
           <a:schemeClr val="tx1"/>
@@ -467,7 +261,7 @@
 </file>
 
 <file path=ppt/notesSlides/notesSlide1.xml><?xml version="1.0" encoding="utf-8"?>
-<p:notes xmlns:a="http://schemas.openxmlformats.org/drawingml/2006/main" xmlns:p="http://schemas.openxmlformats.org/presentationml/2006/main" xmlns:r="http://schemas.openxmlformats.org/officeDocument/2006/relationships">
+<p:notes xmlns:a="http://schemas.openxmlformats.org/drawingml/2006/main" xmlns:r="http://schemas.openxmlformats.org/officeDocument/2006/relationships" xmlns:p="http://schemas.openxmlformats.org/presentationml/2006/main">
   <p:cSld>
     <p:spTree>
       <p:nvGrpSpPr>
@@ -487,7 +281,7 @@
         <p:nvSpPr>
           <p:cNvPr id="2" name="Slide Image Placeholder 1"/>
           <p:cNvSpPr>
-            <a:spLocks noGrp="1"/>
+            <a:spLocks noGrp="1" noRot="1" noChangeAspect="1"/>
           </p:cNvSpPr>
           <p:nvPr>
             <p:ph type="sldImg" idx="2"/>
@@ -502,7 +296,7 @@
             <a:spLocks noGrp="1"/>
           </p:cNvSpPr>
           <p:nvPr>
-            <p:ph type="body" idx="3" sz="quarter"/>
+            <p:ph type="body" sz="quarter" idx="3"/>
           </p:nvPr>
         </p:nvSpPr>
         <p:spPr/>
@@ -523,7 +317,7 @@
             <a:spLocks noGrp="1"/>
           </p:cNvSpPr>
           <p:nvPr>
-            <p:ph type="sldNum" idx="5" sz="quarter"/>
+            <p:ph type="sldNum" sz="quarter" idx="5"/>
           </p:nvPr>
         </p:nvSpPr>
         <p:spPr/>
@@ -536,8 +330,8 @@
 </p:notes>
 </file>
 
-<file path=ppt/notesSlides/notesSlide10.xml><?xml version="1.0" encoding="utf-8"?>
-<p:notes xmlns:a="http://schemas.openxmlformats.org/drawingml/2006/main" xmlns:p="http://schemas.openxmlformats.org/presentationml/2006/main" xmlns:r="http://schemas.openxmlformats.org/officeDocument/2006/relationships">
+<file path=ppt/notesSlides/notesSlide2.xml><?xml version="1.0" encoding="utf-8"?>
+<p:notes xmlns:a="http://schemas.openxmlformats.org/drawingml/2006/main" xmlns:r="http://schemas.openxmlformats.org/officeDocument/2006/relationships" xmlns:p="http://schemas.openxmlformats.org/presentationml/2006/main">
   <p:cSld>
     <p:spTree>
       <p:nvGrpSpPr>
@@ -557,7 +351,7 @@
         <p:nvSpPr>
           <p:cNvPr id="2" name="Slide Image Placeholder 1"/>
           <p:cNvSpPr>
-            <a:spLocks noGrp="1"/>
+            <a:spLocks noGrp="1" noRot="1" noChangeAspect="1"/>
           </p:cNvSpPr>
           <p:nvPr>
             <p:ph type="sldImg" idx="2"/>
@@ -572,7 +366,7 @@
             <a:spLocks noGrp="1"/>
           </p:cNvSpPr>
           <p:nvPr>
-            <p:ph type="body" idx="3" sz="quarter"/>
+            <p:ph type="body" sz="quarter" idx="3"/>
           </p:nvPr>
         </p:nvSpPr>
         <p:spPr/>
@@ -581,7 +375,7 @@
           <a:lstStyle/>
           <a:p>
             <a:r>
-              <a:t>Backup. Pull up if asked about checkpoint-selection.</a:t>
+              <a:t>[Sparsh, ~30s] Open with the warehouse / delivery framing. Make the HRI angle explicit — currently zero humans in the loop. End by motivating why human judgement could plausibly help.</a:t>
             </a:r>
           </a:p>
         </p:txBody>
@@ -593,7 +387,7 @@
             <a:spLocks noGrp="1"/>
           </p:cNvSpPr>
           <p:nvPr>
-            <p:ph type="sldNum" idx="5" sz="quarter"/>
+            <p:ph type="sldNum" sz="quarter" idx="5"/>
           </p:nvPr>
         </p:nvSpPr>
         <p:spPr/>
@@ -606,8 +400,8 @@
 </p:notes>
 </file>
 
-<file path=ppt/notesSlides/notesSlide2.xml><?xml version="1.0" encoding="utf-8"?>
-<p:notes xmlns:a="http://schemas.openxmlformats.org/drawingml/2006/main" xmlns:p="http://schemas.openxmlformats.org/presentationml/2006/main" xmlns:r="http://schemas.openxmlformats.org/officeDocument/2006/relationships">
+<file path=ppt/notesSlides/notesSlide3.xml><?xml version="1.0" encoding="utf-8"?>
+<p:notes xmlns:a="http://schemas.openxmlformats.org/drawingml/2006/main" xmlns:r="http://schemas.openxmlformats.org/officeDocument/2006/relationships" xmlns:p="http://schemas.openxmlformats.org/presentationml/2006/main">
   <p:cSld>
     <p:spTree>
       <p:nvGrpSpPr>
@@ -627,7 +421,7 @@
         <p:nvSpPr>
           <p:cNvPr id="2" name="Slide Image Placeholder 1"/>
           <p:cNvSpPr>
-            <a:spLocks noGrp="1"/>
+            <a:spLocks noGrp="1" noRot="1" noChangeAspect="1"/>
           </p:cNvSpPr>
           <p:nvPr>
             <p:ph type="sldImg" idx="2"/>
@@ -642,7 +436,7 @@
             <a:spLocks noGrp="1"/>
           </p:cNvSpPr>
           <p:nvPr>
-            <p:ph type="body" idx="3" sz="quarter"/>
+            <p:ph type="body" sz="quarter" idx="3"/>
           </p:nvPr>
         </p:nvSpPr>
         <p:spPr/>
@@ -651,7 +445,7 @@
           <a:lstStyle/>
           <a:p>
             <a:r>
-              <a:t>[Sparsh, ~30s] Open with the warehouse / delivery framing. Make the HRI angle explicit — currently zero humans in the loop. End by motivating why human judgement could plausibly help.</a:t>
+              <a:t>[Sparsh, ~35s] This is the load-bearing motivation slide. Walk down the four rows: each prior approach has a clear limit, and our work explicitly targets DDG's gap. Pause on row 3 (44% threshold-wrong number — already lands as a punchline). Then read the 'what we add' bullets — these set up the rest of the talk. End with the RQ verbatim. The audience should walk out of THIS slide knowing what we built and why it's a contribution.</a:t>
             </a:r>
           </a:p>
         </p:txBody>
@@ -663,7 +457,7 @@
             <a:spLocks noGrp="1"/>
           </p:cNvSpPr>
           <p:nvPr>
-            <p:ph type="sldNum" idx="5" sz="quarter"/>
+            <p:ph type="sldNum" sz="quarter" idx="5"/>
           </p:nvPr>
         </p:nvSpPr>
         <p:spPr/>
@@ -676,8 +470,8 @@
 </p:notes>
 </file>
 
-<file path=ppt/notesSlides/notesSlide3.xml><?xml version="1.0" encoding="utf-8"?>
-<p:notes xmlns:a="http://schemas.openxmlformats.org/drawingml/2006/main" xmlns:p="http://schemas.openxmlformats.org/presentationml/2006/main" xmlns:r="http://schemas.openxmlformats.org/officeDocument/2006/relationships">
+<file path=ppt/notesSlides/notesSlide4.xml><?xml version="1.0" encoding="utf-8"?>
+<p:notes xmlns:a="http://schemas.openxmlformats.org/drawingml/2006/main" xmlns:r="http://schemas.openxmlformats.org/officeDocument/2006/relationships" xmlns:p="http://schemas.openxmlformats.org/presentationml/2006/main">
   <p:cSld>
     <p:spTree>
       <p:nvGrpSpPr>
@@ -697,7 +491,7 @@
         <p:nvSpPr>
           <p:cNvPr id="2" name="Slide Image Placeholder 1"/>
           <p:cNvSpPr>
-            <a:spLocks noGrp="1"/>
+            <a:spLocks noGrp="1" noRot="1" noChangeAspect="1"/>
           </p:cNvSpPr>
           <p:nvPr>
             <p:ph type="sldImg" idx="2"/>
@@ -712,7 +506,7 @@
             <a:spLocks noGrp="1"/>
           </p:cNvSpPr>
           <p:nvPr>
-            <p:ph type="body" idx="3" sz="quarter"/>
+            <p:ph type="body" sz="quarter" idx="3"/>
           </p:nvPr>
         </p:nvSpPr>
         <p:spPr/>
@@ -721,7 +515,7 @@
           <a:lstStyle/>
           <a:p>
             <a:r>
-              <a:t>[Sparsh, ~35s] This is the load-bearing motivation slide. Walk down the four rows: each prior approach has a clear limit, and our work explicitly targets DDG's gap. Pause on row 3 (44% threshold-wrong number — already lands as a punchline). Then read the 'what we add' bullets — these set up the rest of the talk. End with the RQ verbatim. The audience should walk out of THIS slide knowing what we built and why it's a contribution.</a:t>
+              <a:t>[Shane, ~30s] Three open challenges. The 44% number is the empirical hook — say it slowly. Frame challenge 3 as motivating the AL extension we discuss later.</a:t>
             </a:r>
           </a:p>
         </p:txBody>
@@ -733,7 +527,7 @@
             <a:spLocks noGrp="1"/>
           </p:cNvSpPr>
           <p:nvPr>
-            <p:ph type="sldNum" idx="5" sz="quarter"/>
+            <p:ph type="sldNum" sz="quarter" idx="5"/>
           </p:nvPr>
         </p:nvSpPr>
         <p:spPr/>
@@ -746,8 +540,8 @@
 </p:notes>
 </file>
 
-<file path=ppt/notesSlides/notesSlide4.xml><?xml version="1.0" encoding="utf-8"?>
-<p:notes xmlns:a="http://schemas.openxmlformats.org/drawingml/2006/main" xmlns:p="http://schemas.openxmlformats.org/presentationml/2006/main" xmlns:r="http://schemas.openxmlformats.org/officeDocument/2006/relationships">
+<file path=ppt/notesSlides/notesSlide5.xml><?xml version="1.0" encoding="utf-8"?>
+<p:notes xmlns:a="http://schemas.openxmlformats.org/drawingml/2006/main" xmlns:r="http://schemas.openxmlformats.org/officeDocument/2006/relationships" xmlns:p="http://schemas.openxmlformats.org/presentationml/2006/main">
   <p:cSld>
     <p:spTree>
       <p:nvGrpSpPr>
@@ -767,7 +561,7 @@
         <p:nvSpPr>
           <p:cNvPr id="2" name="Slide Image Placeholder 1"/>
           <p:cNvSpPr>
-            <a:spLocks noGrp="1"/>
+            <a:spLocks noGrp="1" noRot="1" noChangeAspect="1"/>
           </p:cNvSpPr>
           <p:nvPr>
             <p:ph type="sldImg" idx="2"/>
@@ -782,7 +576,7 @@
             <a:spLocks noGrp="1"/>
           </p:cNvSpPr>
           <p:nvPr>
-            <p:ph type="body" idx="3" sz="quarter"/>
+            <p:ph type="body" sz="quarter" idx="3"/>
           </p:nvPr>
         </p:nvSpPr>
         <p:spPr/>
@@ -791,7 +585,7 @@
           <a:lstStyle/>
           <a:p>
             <a:r>
-              <a:t>[Shane, ~30s] Three open challenges. The 44% number is the empirical hook — say it slowly. Frame challenge 3 as motivating the AL extension we discuss later.</a:t>
+              <a:t>[Shane, ~35s] Two boxed insights side-by-side. Linger on 'override, don't augment' — this is the one technical idea the whole project hangs on. The acquisition formula doesn't need to be read aloud; the audience just needs to register that there IS one.</a:t>
             </a:r>
           </a:p>
         </p:txBody>
@@ -803,7 +597,7 @@
             <a:spLocks noGrp="1"/>
           </p:cNvSpPr>
           <p:nvPr>
-            <p:ph type="sldNum" idx="5" sz="quarter"/>
+            <p:ph type="sldNum" sz="quarter" idx="5"/>
           </p:nvPr>
         </p:nvSpPr>
         <p:spPr/>
@@ -816,8 +610,8 @@
 </p:notes>
 </file>
 
-<file path=ppt/notesSlides/notesSlide5.xml><?xml version="1.0" encoding="utf-8"?>
-<p:notes xmlns:a="http://schemas.openxmlformats.org/drawingml/2006/main" xmlns:p="http://schemas.openxmlformats.org/presentationml/2006/main" xmlns:r="http://schemas.openxmlformats.org/officeDocument/2006/relationships">
+<file path=ppt/notesSlides/notesSlide6.xml><?xml version="1.0" encoding="utf-8"?>
+<p:notes xmlns:a="http://schemas.openxmlformats.org/drawingml/2006/main" xmlns:r="http://schemas.openxmlformats.org/officeDocument/2006/relationships" xmlns:p="http://schemas.openxmlformats.org/presentationml/2006/main">
   <p:cSld>
     <p:spTree>
       <p:nvGrpSpPr>
@@ -837,7 +631,7 @@
         <p:nvSpPr>
           <p:cNvPr id="2" name="Slide Image Placeholder 1"/>
           <p:cNvSpPr>
-            <a:spLocks noGrp="1"/>
+            <a:spLocks noGrp="1" noRot="1" noChangeAspect="1"/>
           </p:cNvSpPr>
           <p:nvPr>
             <p:ph type="sldImg" idx="2"/>
@@ -852,7 +646,7 @@
             <a:spLocks noGrp="1"/>
           </p:cNvSpPr>
           <p:nvPr>
-            <p:ph type="body" idx="3" sz="quarter"/>
+            <p:ph type="body" sz="quarter" idx="3"/>
           </p:nvPr>
         </p:nvSpPr>
         <p:spPr/>
@@ -861,7 +655,7 @@
           <a:lstStyle/>
           <a:p>
             <a:r>
-              <a:t>[Shane, ~35s] Two boxed insights side-by-side. Linger on 'override, don't augment' — this is the one technical idea the whole project hangs on. The acquisition formula doesn't need to be read aloud; the audience just needs to register that there IS one.</a:t>
+              <a:t>[Isabel, ~45s] Lead with the top two table rows — those are the headline. Then point at the figure: same data, different views. End on the walk-away: NO auto cost. That sells the override-don't-augment design.</a:t>
             </a:r>
           </a:p>
         </p:txBody>
@@ -873,7 +667,7 @@
             <a:spLocks noGrp="1"/>
           </p:cNvSpPr>
           <p:nvPr>
-            <p:ph type="sldNum" idx="5" sz="quarter"/>
+            <p:ph type="sldNum" sz="quarter" idx="5"/>
           </p:nvPr>
         </p:nvSpPr>
         <p:spPr/>
@@ -886,8 +680,8 @@
 </p:notes>
 </file>
 
-<file path=ppt/notesSlides/notesSlide6.xml><?xml version="1.0" encoding="utf-8"?>
-<p:notes xmlns:a="http://schemas.openxmlformats.org/drawingml/2006/main" xmlns:p="http://schemas.openxmlformats.org/presentationml/2006/main" xmlns:r="http://schemas.openxmlformats.org/officeDocument/2006/relationships">
+<file path=ppt/notesSlides/notesSlide7.xml><?xml version="1.0" encoding="utf-8"?>
+<p:notes xmlns:a="http://schemas.openxmlformats.org/drawingml/2006/main" xmlns:r="http://schemas.openxmlformats.org/officeDocument/2006/relationships" xmlns:p="http://schemas.openxmlformats.org/presentationml/2006/main">
   <p:cSld>
     <p:spTree>
       <p:nvGrpSpPr>
@@ -907,7 +701,7 @@
         <p:nvSpPr>
           <p:cNvPr id="2" name="Slide Image Placeholder 1"/>
           <p:cNvSpPr>
-            <a:spLocks noGrp="1"/>
+            <a:spLocks noGrp="1" noRot="1" noChangeAspect="1"/>
           </p:cNvSpPr>
           <p:nvPr>
             <p:ph type="sldImg" idx="2"/>
@@ -922,7 +716,7 @@
             <a:spLocks noGrp="1"/>
           </p:cNvSpPr>
           <p:nvPr>
-            <p:ph type="body" idx="3" sz="quarter"/>
+            <p:ph type="body" sz="quarter" idx="3"/>
           </p:nvPr>
         </p:nvSpPr>
         <p:spPr/>
@@ -931,7 +725,7 @@
           <a:lstStyle/>
           <a:p>
             <a:r>
-              <a:t>[Isabel, ~45s] Lead with the top two table rows — those are the headline. Then point at the figure: same data, different views. End on the walk-away: NO auto cost. That sells the override-don't-augment design.</a:t>
+              <a:t>[Isabel, ~35s] This is the slide that frames our depth contribution. Walk down the columns — Stages 3 and 4 share the same 56-label budget as Stage 2 and only the acquisition rule differs. Stages 3 &amp; 4 are still being collected, but the framework itself is the contribution: any ordering of the [PENDING] cells answers a substantive AL-design question. Once we have the numbers, we can update this single slide in PowerPoint and the whole story crystallises.</a:t>
             </a:r>
           </a:p>
         </p:txBody>
@@ -943,7 +737,7 @@
             <a:spLocks noGrp="1"/>
           </p:cNvSpPr>
           <p:nvPr>
-            <p:ph type="sldNum" idx="5" sz="quarter"/>
+            <p:ph type="sldNum" sz="quarter" idx="5"/>
           </p:nvPr>
         </p:nvSpPr>
         <p:spPr/>
@@ -956,8 +750,8 @@
 </p:notes>
 </file>
 
-<file path=ppt/notesSlides/notesSlide7.xml><?xml version="1.0" encoding="utf-8"?>
-<p:notes xmlns:a="http://schemas.openxmlformats.org/drawingml/2006/main" xmlns:p="http://schemas.openxmlformats.org/presentationml/2006/main" xmlns:r="http://schemas.openxmlformats.org/officeDocument/2006/relationships">
+<file path=ppt/notesSlides/notesSlide8.xml><?xml version="1.0" encoding="utf-8"?>
+<p:notes xmlns:a="http://schemas.openxmlformats.org/drawingml/2006/main" xmlns:r="http://schemas.openxmlformats.org/officeDocument/2006/relationships" xmlns:p="http://schemas.openxmlformats.org/presentationml/2006/main">
   <p:cSld>
     <p:spTree>
       <p:nvGrpSpPr>
@@ -977,7 +771,7 @@
         <p:nvSpPr>
           <p:cNvPr id="2" name="Slide Image Placeholder 1"/>
           <p:cNvSpPr>
-            <a:spLocks noGrp="1"/>
+            <a:spLocks noGrp="1" noRot="1" noChangeAspect="1"/>
           </p:cNvSpPr>
           <p:nvPr>
             <p:ph type="sldImg" idx="2"/>
@@ -992,7 +786,7 @@
             <a:spLocks noGrp="1"/>
           </p:cNvSpPr>
           <p:nvPr>
-            <p:ph type="body" idx="3" sz="quarter"/>
+            <p:ph type="body" sz="quarter" idx="3"/>
           </p:nvPr>
         </p:nvSpPr>
         <p:spPr/>
@@ -1001,7 +795,7 @@
           <a:lstStyle/>
           <a:p>
             <a:r>
-              <a:t>[Isabel, ~35s] This is the slide that frames our depth contribution. Walk down the columns — Stages 3 and 4 share the same 56-label budget as Stage 2 and only the acquisition rule differs. Stages 3 &amp; 4 are still being collected, but the framework itself is the contribution: any ordering of the [PENDING] cells answers a substantive AL-design question. Once we have the numbers, we can update this single slide in PowerPoint and the whole story crystallises.</a:t>
+              <a:t>[Isabel, ~25s] Three walk-aways, three honest limitations. Don't oversell — the audience respects the variance disclosure. Land softly to invite Q&amp;A.</a:t>
             </a:r>
           </a:p>
         </p:txBody>
@@ -1013,147 +807,7 @@
             <a:spLocks noGrp="1"/>
           </p:cNvSpPr>
           <p:nvPr>
-            <p:ph type="sldNum" idx="5" sz="quarter"/>
-          </p:nvPr>
-        </p:nvSpPr>
-        <p:spPr/>
-      </p:sp>
-    </p:spTree>
-  </p:cSld>
-  <p:clrMapOvr>
-    <a:masterClrMapping/>
-  </p:clrMapOvr>
-</p:notes>
-</file>
-
-<file path=ppt/notesSlides/notesSlide8.xml><?xml version="1.0" encoding="utf-8"?>
-<p:notes xmlns:a="http://schemas.openxmlformats.org/drawingml/2006/main" xmlns:p="http://schemas.openxmlformats.org/presentationml/2006/main" xmlns:r="http://schemas.openxmlformats.org/officeDocument/2006/relationships">
-  <p:cSld>
-    <p:spTree>
-      <p:nvGrpSpPr>
-        <p:cNvPr id="1" name=""/>
-        <p:cNvGrpSpPr/>
-        <p:nvPr/>
-      </p:nvGrpSpPr>
-      <p:grpSpPr>
-        <a:xfrm>
-          <a:off x="0" y="0"/>
-          <a:ext cx="0" cy="0"/>
-          <a:chOff x="0" y="0"/>
-          <a:chExt cx="0" cy="0"/>
-        </a:xfrm>
-      </p:grpSpPr>
-      <p:sp>
-        <p:nvSpPr>
-          <p:cNvPr id="2" name="Slide Image Placeholder 1"/>
-          <p:cNvSpPr>
-            <a:spLocks noGrp="1"/>
-          </p:cNvSpPr>
-          <p:nvPr>
-            <p:ph type="sldImg" idx="2"/>
-          </p:nvPr>
-        </p:nvSpPr>
-        <p:spPr/>
-      </p:sp>
-      <p:sp>
-        <p:nvSpPr>
-          <p:cNvPr id="3" name="Notes Placeholder 2"/>
-          <p:cNvSpPr>
-            <a:spLocks noGrp="1"/>
-          </p:cNvSpPr>
-          <p:nvPr>
-            <p:ph type="body" idx="3" sz="quarter"/>
-          </p:nvPr>
-        </p:nvSpPr>
-        <p:spPr/>
-        <p:txBody>
-          <a:bodyPr/>
-          <a:lstStyle/>
-          <a:p>
-            <a:r>
-              <a:t>[Isabel, ~25s] Three walk-aways, three honest limitations. Don't oversell — the audience respects the variance disclosure. Land softly to invite Q&amp;A.</a:t>
-            </a:r>
-          </a:p>
-        </p:txBody>
-      </p:sp>
-      <p:sp>
-        <p:nvSpPr>
-          <p:cNvPr id="4" name="Slide Number Placeholder 3"/>
-          <p:cNvSpPr>
-            <a:spLocks noGrp="1"/>
-          </p:cNvSpPr>
-          <p:nvPr>
-            <p:ph type="sldNum" idx="5" sz="quarter"/>
-          </p:nvPr>
-        </p:nvSpPr>
-        <p:spPr/>
-      </p:sp>
-    </p:spTree>
-  </p:cSld>
-  <p:clrMapOvr>
-    <a:masterClrMapping/>
-  </p:clrMapOvr>
-</p:notes>
-</file>
-
-<file path=ppt/notesSlides/notesSlide9.xml><?xml version="1.0" encoding="utf-8"?>
-<p:notes xmlns:a="http://schemas.openxmlformats.org/drawingml/2006/main" xmlns:p="http://schemas.openxmlformats.org/presentationml/2006/main" xmlns:r="http://schemas.openxmlformats.org/officeDocument/2006/relationships">
-  <p:cSld>
-    <p:spTree>
-      <p:nvGrpSpPr>
-        <p:cNvPr id="1" name=""/>
-        <p:cNvGrpSpPr/>
-        <p:nvPr/>
-      </p:nvGrpSpPr>
-      <p:grpSpPr>
-        <a:xfrm>
-          <a:off x="0" y="0"/>
-          <a:ext cx="0" cy="0"/>
-          <a:chOff x="0" y="0"/>
-          <a:chExt cx="0" cy="0"/>
-        </a:xfrm>
-      </p:grpSpPr>
-      <p:sp>
-        <p:nvSpPr>
-          <p:cNvPr id="2" name="Slide Image Placeholder 1"/>
-          <p:cNvSpPr>
-            <a:spLocks noGrp="1"/>
-          </p:cNvSpPr>
-          <p:nvPr>
-            <p:ph type="sldImg" idx="2"/>
-          </p:nvPr>
-        </p:nvSpPr>
-        <p:spPr/>
-      </p:sp>
-      <p:sp>
-        <p:nvSpPr>
-          <p:cNvPr id="3" name="Notes Placeholder 2"/>
-          <p:cNvSpPr>
-            <a:spLocks noGrp="1"/>
-          </p:cNvSpPr>
-          <p:nvPr>
-            <p:ph type="body" idx="3" sz="quarter"/>
-          </p:nvPr>
-        </p:nvSpPr>
-        <p:spPr/>
-        <p:txBody>
-          <a:bodyPr/>
-          <a:lstStyle/>
-          <a:p>
-            <a:r>
-              <a:t>Backup. Pull up if asked about the human-vs-auto disagreement breakdown.</a:t>
-            </a:r>
-          </a:p>
-        </p:txBody>
-      </p:sp>
-      <p:sp>
-        <p:nvSpPr>
-          <p:cNvPr id="4" name="Slide Number Placeholder 3"/>
-          <p:cNvSpPr>
-            <a:spLocks noGrp="1"/>
-          </p:cNvSpPr>
-          <p:nvPr>
-            <p:ph type="sldNum" idx="5" sz="quarter"/>
+            <p:ph type="sldNum" sz="quarter" idx="5"/>
           </p:nvPr>
         </p:nvSpPr>
         <p:spPr/>
@@ -1204,10 +858,9 @@
           <a:lstStyle/>
           <a:p>
             <a:r>
-              <a:rPr lang="en-US" smtClean="0"/>
+              <a:rPr lang="en-US"/>
               <a:t>Click to edit Master title style</a:t>
             </a:r>
-            <a:endParaRPr lang="en-US"/>
           </a:p>
         </p:txBody>
       </p:sp>
@@ -1323,10 +976,9 @@
           </a:lstStyle>
           <a:p>
             <a:r>
-              <a:rPr lang="en-US" smtClean="0"/>
+              <a:rPr lang="en-US"/>
               <a:t>Click to edit Master subtitle style</a:t>
             </a:r>
-            <a:endParaRPr lang="en-US"/>
           </a:p>
         </p:txBody>
       </p:sp>
@@ -1347,7 +999,7 @@
           <a:p>
             <a:fld id="{5BCAD085-E8A6-8845-BD4E-CB4CCA059FC4}" type="datetimeFigureOut">
               <a:rPr lang="en-US" smtClean="0"/>
-              <a:t>1/27/13</a:t>
+              <a:t>5/2/26</a:t>
             </a:fld>
             <a:endParaRPr lang="en-US"/>
           </a:p>
@@ -1441,10 +1093,9 @@
           <a:lstStyle/>
           <a:p>
             <a:r>
-              <a:rPr lang="en-US" smtClean="0"/>
+              <a:rPr lang="en-US"/>
               <a:t>Click to edit Master title style</a:t>
             </a:r>
-            <a:endParaRPr lang="en-US"/>
           </a:p>
         </p:txBody>
       </p:sp>
@@ -1465,38 +1116,37 @@
           <a:p>
             <a:pPr lvl="0"/>
             <a:r>
-              <a:rPr lang="en-US" smtClean="0"/>
+              <a:rPr lang="en-US"/>
               <a:t>Click to edit Master text styles</a:t>
             </a:r>
           </a:p>
           <a:p>
             <a:pPr lvl="1"/>
             <a:r>
-              <a:rPr lang="en-US" smtClean="0"/>
+              <a:rPr lang="en-US"/>
               <a:t>Second level</a:t>
             </a:r>
           </a:p>
           <a:p>
             <a:pPr lvl="2"/>
             <a:r>
-              <a:rPr lang="en-US" smtClean="0"/>
+              <a:rPr lang="en-US"/>
               <a:t>Third level</a:t>
             </a:r>
           </a:p>
           <a:p>
             <a:pPr lvl="3"/>
             <a:r>
-              <a:rPr lang="en-US" smtClean="0"/>
+              <a:rPr lang="en-US"/>
               <a:t>Fourth level</a:t>
             </a:r>
           </a:p>
           <a:p>
             <a:pPr lvl="4"/>
             <a:r>
-              <a:rPr lang="en-US" smtClean="0"/>
+              <a:rPr lang="en-US"/>
               <a:t>Fifth level</a:t>
             </a:r>
-            <a:endParaRPr lang="en-US"/>
           </a:p>
         </p:txBody>
       </p:sp>
@@ -1517,7 +1167,7 @@
           <a:p>
             <a:fld id="{5BCAD085-E8A6-8845-BD4E-CB4CCA059FC4}" type="datetimeFigureOut">
               <a:rPr lang="en-US" smtClean="0"/>
-              <a:t>1/27/13</a:t>
+              <a:t>5/2/26</a:t>
             </a:fld>
             <a:endParaRPr lang="en-US"/>
           </a:p>
@@ -1616,10 +1266,9 @@
           <a:lstStyle/>
           <a:p>
             <a:r>
-              <a:rPr lang="en-US" smtClean="0"/>
+              <a:rPr lang="en-US"/>
               <a:t>Click to edit Master title style</a:t>
             </a:r>
-            <a:endParaRPr lang="en-US"/>
           </a:p>
         </p:txBody>
       </p:sp>
@@ -1645,38 +1294,37 @@
           <a:p>
             <a:pPr lvl="0"/>
             <a:r>
-              <a:rPr lang="en-US" smtClean="0"/>
+              <a:rPr lang="en-US"/>
               <a:t>Click to edit Master text styles</a:t>
             </a:r>
           </a:p>
           <a:p>
             <a:pPr lvl="1"/>
             <a:r>
-              <a:rPr lang="en-US" smtClean="0"/>
+              <a:rPr lang="en-US"/>
               <a:t>Second level</a:t>
             </a:r>
           </a:p>
           <a:p>
             <a:pPr lvl="2"/>
             <a:r>
-              <a:rPr lang="en-US" smtClean="0"/>
+              <a:rPr lang="en-US"/>
               <a:t>Third level</a:t>
             </a:r>
           </a:p>
           <a:p>
             <a:pPr lvl="3"/>
             <a:r>
-              <a:rPr lang="en-US" smtClean="0"/>
+              <a:rPr lang="en-US"/>
               <a:t>Fourth level</a:t>
             </a:r>
           </a:p>
           <a:p>
             <a:pPr lvl="4"/>
             <a:r>
-              <a:rPr lang="en-US" smtClean="0"/>
+              <a:rPr lang="en-US"/>
               <a:t>Fifth level</a:t>
             </a:r>
-            <a:endParaRPr lang="en-US"/>
           </a:p>
         </p:txBody>
       </p:sp>
@@ -1697,7 +1345,7 @@
           <a:p>
             <a:fld id="{5BCAD085-E8A6-8845-BD4E-CB4CCA059FC4}" type="datetimeFigureOut">
               <a:rPr lang="en-US" smtClean="0"/>
-              <a:t>1/27/13</a:t>
+              <a:t>5/2/26</a:t>
             </a:fld>
             <a:endParaRPr lang="en-US"/>
           </a:p>
@@ -1791,10 +1439,9 @@
           <a:lstStyle/>
           <a:p>
             <a:r>
-              <a:rPr lang="en-US" smtClean="0"/>
+              <a:rPr lang="en-US"/>
               <a:t>Click to edit Master title style</a:t>
             </a:r>
-            <a:endParaRPr lang="en-US"/>
           </a:p>
         </p:txBody>
       </p:sp>
@@ -1815,38 +1462,37 @@
           <a:p>
             <a:pPr lvl="0"/>
             <a:r>
-              <a:rPr lang="en-US" smtClean="0"/>
+              <a:rPr lang="en-US"/>
               <a:t>Click to edit Master text styles</a:t>
             </a:r>
           </a:p>
           <a:p>
             <a:pPr lvl="1"/>
             <a:r>
-              <a:rPr lang="en-US" smtClean="0"/>
+              <a:rPr lang="en-US"/>
               <a:t>Second level</a:t>
             </a:r>
           </a:p>
           <a:p>
             <a:pPr lvl="2"/>
             <a:r>
-              <a:rPr lang="en-US" smtClean="0"/>
+              <a:rPr lang="en-US"/>
               <a:t>Third level</a:t>
             </a:r>
           </a:p>
           <a:p>
             <a:pPr lvl="3"/>
             <a:r>
-              <a:rPr lang="en-US" smtClean="0"/>
+              <a:rPr lang="en-US"/>
               <a:t>Fourth level</a:t>
             </a:r>
           </a:p>
           <a:p>
             <a:pPr lvl="4"/>
             <a:r>
-              <a:rPr lang="en-US" smtClean="0"/>
+              <a:rPr lang="en-US"/>
               <a:t>Fifth level</a:t>
             </a:r>
-            <a:endParaRPr lang="en-US"/>
           </a:p>
         </p:txBody>
       </p:sp>
@@ -1867,7 +1513,7 @@
           <a:p>
             <a:fld id="{5BCAD085-E8A6-8845-BD4E-CB4CCA059FC4}" type="datetimeFigureOut">
               <a:rPr lang="en-US" smtClean="0"/>
-              <a:t>1/27/13</a:t>
+              <a:t>5/2/26</a:t>
             </a:fld>
             <a:endParaRPr lang="en-US"/>
           </a:p>
@@ -1970,10 +1616,9 @@
           </a:lstStyle>
           <a:p>
             <a:r>
-              <a:rPr lang="en-US" smtClean="0"/>
+              <a:rPr lang="en-US"/>
               <a:t>Click to edit Master title style</a:t>
             </a:r>
-            <a:endParaRPr lang="en-US"/>
           </a:p>
         </p:txBody>
       </p:sp>
@@ -2090,7 +1735,7 @@
           <a:p>
             <a:pPr lvl="0"/>
             <a:r>
-              <a:rPr lang="en-US" smtClean="0"/>
+              <a:rPr lang="en-US"/>
               <a:t>Click to edit Master text styles</a:t>
             </a:r>
           </a:p>
@@ -2113,7 +1758,7 @@
           <a:p>
             <a:fld id="{5BCAD085-E8A6-8845-BD4E-CB4CCA059FC4}" type="datetimeFigureOut">
               <a:rPr lang="en-US" smtClean="0"/>
-              <a:t>1/27/13</a:t>
+              <a:t>5/2/26</a:t>
             </a:fld>
             <a:endParaRPr lang="en-US"/>
           </a:p>
@@ -2207,10 +1852,9 @@
           <a:lstStyle/>
           <a:p>
             <a:r>
-              <a:rPr lang="en-US" smtClean="0"/>
+              <a:rPr lang="en-US"/>
               <a:t>Click to edit Master title style</a:t>
             </a:r>
-            <a:endParaRPr lang="en-US"/>
           </a:p>
         </p:txBody>
       </p:sp>
@@ -2264,38 +1908,37 @@
           <a:p>
             <a:pPr lvl="0"/>
             <a:r>
-              <a:rPr lang="en-US" smtClean="0"/>
+              <a:rPr lang="en-US"/>
               <a:t>Click to edit Master text styles</a:t>
             </a:r>
           </a:p>
           <a:p>
             <a:pPr lvl="1"/>
             <a:r>
-              <a:rPr lang="en-US" smtClean="0"/>
+              <a:rPr lang="en-US"/>
               <a:t>Second level</a:t>
             </a:r>
           </a:p>
           <a:p>
             <a:pPr lvl="2"/>
             <a:r>
-              <a:rPr lang="en-US" smtClean="0"/>
+              <a:rPr lang="en-US"/>
               <a:t>Third level</a:t>
             </a:r>
           </a:p>
           <a:p>
             <a:pPr lvl="3"/>
             <a:r>
-              <a:rPr lang="en-US" smtClean="0"/>
+              <a:rPr lang="en-US"/>
               <a:t>Fourth level</a:t>
             </a:r>
           </a:p>
           <a:p>
             <a:pPr lvl="4"/>
             <a:r>
-              <a:rPr lang="en-US" smtClean="0"/>
+              <a:rPr lang="en-US"/>
               <a:t>Fifth level</a:t>
             </a:r>
-            <a:endParaRPr lang="en-US"/>
           </a:p>
         </p:txBody>
       </p:sp>
@@ -2349,38 +1992,37 @@
           <a:p>
             <a:pPr lvl="0"/>
             <a:r>
-              <a:rPr lang="en-US" smtClean="0"/>
+              <a:rPr lang="en-US"/>
               <a:t>Click to edit Master text styles</a:t>
             </a:r>
           </a:p>
           <a:p>
             <a:pPr lvl="1"/>
             <a:r>
-              <a:rPr lang="en-US" smtClean="0"/>
+              <a:rPr lang="en-US"/>
               <a:t>Second level</a:t>
             </a:r>
           </a:p>
           <a:p>
             <a:pPr lvl="2"/>
             <a:r>
-              <a:rPr lang="en-US" smtClean="0"/>
+              <a:rPr lang="en-US"/>
               <a:t>Third level</a:t>
             </a:r>
           </a:p>
           <a:p>
             <a:pPr lvl="3"/>
             <a:r>
-              <a:rPr lang="en-US" smtClean="0"/>
+              <a:rPr lang="en-US"/>
               <a:t>Fourth level</a:t>
             </a:r>
           </a:p>
           <a:p>
             <a:pPr lvl="4"/>
             <a:r>
-              <a:rPr lang="en-US" smtClean="0"/>
+              <a:rPr lang="en-US"/>
               <a:t>Fifth level</a:t>
             </a:r>
-            <a:endParaRPr lang="en-US"/>
           </a:p>
         </p:txBody>
       </p:sp>
@@ -2401,7 +2043,7 @@
           <a:p>
             <a:fld id="{5BCAD085-E8A6-8845-BD4E-CB4CCA059FC4}" type="datetimeFigureOut">
               <a:rPr lang="en-US" smtClean="0"/>
-              <a:t>1/27/13</a:t>
+              <a:t>5/2/26</a:t>
             </a:fld>
             <a:endParaRPr lang="en-US"/>
           </a:p>
@@ -2499,10 +2141,9 @@
           </a:lstStyle>
           <a:p>
             <a:r>
-              <a:rPr lang="en-US" smtClean="0"/>
+              <a:rPr lang="en-US"/>
               <a:t>Click to edit Master title style</a:t>
             </a:r>
-            <a:endParaRPr lang="en-US"/>
           </a:p>
         </p:txBody>
       </p:sp>
@@ -2565,7 +2206,7 @@
           <a:p>
             <a:pPr lvl="0"/>
             <a:r>
-              <a:rPr lang="en-US" smtClean="0"/>
+              <a:rPr lang="en-US"/>
               <a:t>Click to edit Master text styles</a:t>
             </a:r>
           </a:p>
@@ -2621,38 +2262,37 @@
           <a:p>
             <a:pPr lvl="0"/>
             <a:r>
-              <a:rPr lang="en-US" smtClean="0"/>
+              <a:rPr lang="en-US"/>
               <a:t>Click to edit Master text styles</a:t>
             </a:r>
           </a:p>
           <a:p>
             <a:pPr lvl="1"/>
             <a:r>
-              <a:rPr lang="en-US" smtClean="0"/>
+              <a:rPr lang="en-US"/>
               <a:t>Second level</a:t>
             </a:r>
           </a:p>
           <a:p>
             <a:pPr lvl="2"/>
             <a:r>
-              <a:rPr lang="en-US" smtClean="0"/>
+              <a:rPr lang="en-US"/>
               <a:t>Third level</a:t>
             </a:r>
           </a:p>
           <a:p>
             <a:pPr lvl="3"/>
             <a:r>
-              <a:rPr lang="en-US" smtClean="0"/>
+              <a:rPr lang="en-US"/>
               <a:t>Fourth level</a:t>
             </a:r>
           </a:p>
           <a:p>
             <a:pPr lvl="4"/>
             <a:r>
-              <a:rPr lang="en-US" smtClean="0"/>
+              <a:rPr lang="en-US"/>
               <a:t>Fifth level</a:t>
             </a:r>
-            <a:endParaRPr lang="en-US"/>
           </a:p>
         </p:txBody>
       </p:sp>
@@ -2715,7 +2355,7 @@
           <a:p>
             <a:pPr lvl="0"/>
             <a:r>
-              <a:rPr lang="en-US" smtClean="0"/>
+              <a:rPr lang="en-US"/>
               <a:t>Click to edit Master text styles</a:t>
             </a:r>
           </a:p>
@@ -2771,38 +2411,37 @@
           <a:p>
             <a:pPr lvl="0"/>
             <a:r>
-              <a:rPr lang="en-US" smtClean="0"/>
+              <a:rPr lang="en-US"/>
               <a:t>Click to edit Master text styles</a:t>
             </a:r>
           </a:p>
           <a:p>
             <a:pPr lvl="1"/>
             <a:r>
-              <a:rPr lang="en-US" smtClean="0"/>
+              <a:rPr lang="en-US"/>
               <a:t>Second level</a:t>
             </a:r>
           </a:p>
           <a:p>
             <a:pPr lvl="2"/>
             <a:r>
-              <a:rPr lang="en-US" smtClean="0"/>
+              <a:rPr lang="en-US"/>
               <a:t>Third level</a:t>
             </a:r>
           </a:p>
           <a:p>
             <a:pPr lvl="3"/>
             <a:r>
-              <a:rPr lang="en-US" smtClean="0"/>
+              <a:rPr lang="en-US"/>
               <a:t>Fourth level</a:t>
             </a:r>
           </a:p>
           <a:p>
             <a:pPr lvl="4"/>
             <a:r>
-              <a:rPr lang="en-US" smtClean="0"/>
+              <a:rPr lang="en-US"/>
               <a:t>Fifth level</a:t>
             </a:r>
-            <a:endParaRPr lang="en-US"/>
           </a:p>
         </p:txBody>
       </p:sp>
@@ -2823,7 +2462,7 @@
           <a:p>
             <a:fld id="{5BCAD085-E8A6-8845-BD4E-CB4CCA059FC4}" type="datetimeFigureOut">
               <a:rPr lang="en-US" smtClean="0"/>
-              <a:t>1/27/13</a:t>
+              <a:t>5/2/26</a:t>
             </a:fld>
             <a:endParaRPr lang="en-US"/>
           </a:p>
@@ -2917,10 +2556,9 @@
           <a:lstStyle/>
           <a:p>
             <a:r>
-              <a:rPr lang="en-US" smtClean="0"/>
+              <a:rPr lang="en-US"/>
               <a:t>Click to edit Master title style</a:t>
             </a:r>
-            <a:endParaRPr lang="en-US"/>
           </a:p>
         </p:txBody>
       </p:sp>
@@ -2941,7 +2579,7 @@
           <a:p>
             <a:fld id="{5BCAD085-E8A6-8845-BD4E-CB4CCA059FC4}" type="datetimeFigureOut">
               <a:rPr lang="en-US" smtClean="0"/>
-              <a:t>1/27/13</a:t>
+              <a:t>5/2/26</a:t>
             </a:fld>
             <a:endParaRPr lang="en-US"/>
           </a:p>
@@ -3036,7 +2674,7 @@
           <a:p>
             <a:fld id="{5BCAD085-E8A6-8845-BD4E-CB4CCA059FC4}" type="datetimeFigureOut">
               <a:rPr lang="en-US" smtClean="0"/>
-              <a:t>1/27/13</a:t>
+              <a:t>5/2/26</a:t>
             </a:fld>
             <a:endParaRPr lang="en-US"/>
           </a:p>
@@ -3139,10 +2777,9 @@
           </a:lstStyle>
           <a:p>
             <a:r>
-              <a:rPr lang="en-US" smtClean="0"/>
+              <a:rPr lang="en-US"/>
               <a:t>Click to edit Master title style</a:t>
             </a:r>
-            <a:endParaRPr lang="en-US"/>
           </a:p>
         </p:txBody>
       </p:sp>
@@ -3196,38 +2833,37 @@
           <a:p>
             <a:pPr lvl="0"/>
             <a:r>
-              <a:rPr lang="en-US" smtClean="0"/>
+              <a:rPr lang="en-US"/>
               <a:t>Click to edit Master text styles</a:t>
             </a:r>
           </a:p>
           <a:p>
             <a:pPr lvl="1"/>
             <a:r>
-              <a:rPr lang="en-US" smtClean="0"/>
+              <a:rPr lang="en-US"/>
               <a:t>Second level</a:t>
             </a:r>
           </a:p>
           <a:p>
             <a:pPr lvl="2"/>
             <a:r>
-              <a:rPr lang="en-US" smtClean="0"/>
+              <a:rPr lang="en-US"/>
               <a:t>Third level</a:t>
             </a:r>
           </a:p>
           <a:p>
             <a:pPr lvl="3"/>
             <a:r>
-              <a:rPr lang="en-US" smtClean="0"/>
+              <a:rPr lang="en-US"/>
               <a:t>Fourth level</a:t>
             </a:r>
           </a:p>
           <a:p>
             <a:pPr lvl="4"/>
             <a:r>
-              <a:rPr lang="en-US" smtClean="0"/>
+              <a:rPr lang="en-US"/>
               <a:t>Fifth level</a:t>
             </a:r>
-            <a:endParaRPr lang="en-US"/>
           </a:p>
         </p:txBody>
       </p:sp>
@@ -3290,7 +2926,7 @@
           <a:p>
             <a:pPr lvl="0"/>
             <a:r>
-              <a:rPr lang="en-US" smtClean="0"/>
+              <a:rPr lang="en-US"/>
               <a:t>Click to edit Master text styles</a:t>
             </a:r>
           </a:p>
@@ -3313,7 +2949,7 @@
           <a:p>
             <a:fld id="{5BCAD085-E8A6-8845-BD4E-CB4CCA059FC4}" type="datetimeFigureOut">
               <a:rPr lang="en-US" smtClean="0"/>
-              <a:t>1/27/13</a:t>
+              <a:t>5/2/26</a:t>
             </a:fld>
             <a:endParaRPr lang="en-US"/>
           </a:p>
@@ -3416,10 +3052,9 @@
           </a:lstStyle>
           <a:p>
             <a:r>
-              <a:rPr lang="en-US" smtClean="0"/>
+              <a:rPr lang="en-US"/>
               <a:t>Click to edit Master title style</a:t>
             </a:r>
-            <a:endParaRPr lang="en-US"/>
           </a:p>
         </p:txBody>
       </p:sp>
@@ -3543,7 +3178,7 @@
           <a:p>
             <a:pPr lvl="0"/>
             <a:r>
-              <a:rPr lang="en-US" smtClean="0"/>
+              <a:rPr lang="en-US"/>
               <a:t>Click to edit Master text styles</a:t>
             </a:r>
           </a:p>
@@ -3566,7 +3201,7 @@
           <a:p>
             <a:fld id="{5BCAD085-E8A6-8845-BD4E-CB4CCA059FC4}" type="datetimeFigureOut">
               <a:rPr lang="en-US" smtClean="0"/>
-              <a:t>1/27/13</a:t>
+              <a:t>5/2/26</a:t>
             </a:fld>
             <a:endParaRPr lang="en-US"/>
           </a:p>
@@ -3649,6 +3284,72 @@
           <a:chExt cx="0" cy="0"/>
         </a:xfrm>
       </p:grpSpPr>
+      <p:graphicFrame>
+        <p:nvGraphicFramePr>
+          <p:cNvPr id="7" name="think-cell data - do not delete" hidden="1">
+            <a:extLst>
+              <a:ext uri="{FF2B5EF4-FFF2-40B4-BE49-F238E27FC236}">
+                <a16:creationId xmlns:a16="http://schemas.microsoft.com/office/drawing/2014/main" id="{363F8E93-E55D-150F-F1E2-064F15495EEA}"/>
+              </a:ext>
+            </a:extLst>
+          </p:cNvPr>
+          <p:cNvGraphicFramePr>
+            <a:graphicFrameLocks/>
+          </p:cNvGraphicFramePr>
+          <p:nvPr userDrawn="1">
+            <p:custDataLst>
+              <p:tags r:id="rId13"/>
+            </p:custDataLst>
+            <p:extLst>
+              <p:ext uri="{D42A27DB-BD31-4B8C-83A1-F6EECF244321}">
+                <p14:modId xmlns:p14="http://schemas.microsoft.com/office/powerpoint/2010/main" val="4099255531"/>
+              </p:ext>
+            </p:extLst>
+          </p:nvPr>
+        </p:nvGraphicFramePr>
+        <p:xfrm>
+          <a:off x="1588" y="1588"/>
+          <a:ext cx="1227" cy="1588"/>
+        </p:xfrm>
+        <a:graphic>
+          <a:graphicData uri="http://schemas.openxmlformats.org/presentationml/2006/ole">
+            <mc:AlternateContent xmlns:mc="http://schemas.openxmlformats.org/markup-compatibility/2006">
+              <mc:Choice xmlns:v="urn:schemas-microsoft-com:vml" Requires="v">
+                <p:oleObj name="think-cell Slide" r:id="rId14" imgW="7772400" imgH="10058400" progId="TCLayout.ActiveDocument.1">
+                  <p:embed/>
+                </p:oleObj>
+              </mc:Choice>
+              <mc:Fallback>
+                <p:oleObj name="think-cell Slide" r:id="rId14" imgW="7772400" imgH="10058400" progId="TCLayout.ActiveDocument.1">
+                  <p:embed/>
+                  <p:pic>
+                    <p:nvPicPr>
+                      <p:cNvPr id="0" name=""/>
+                      <p:cNvPicPr/>
+                      <p:nvPr/>
+                    </p:nvPicPr>
+                    <p:blipFill>
+                      <a:blip r:embed="rId15"/>
+                      <a:stretch>
+                        <a:fillRect/>
+                      </a:stretch>
+                    </p:blipFill>
+                    <p:spPr>
+                      <a:xfrm>
+                        <a:off x="1588" y="1588"/>
+                        <a:ext cx="1227" cy="1588"/>
+                      </a:xfrm>
+                      <a:prstGeom prst="rect">
+                        <a:avLst/>
+                      </a:prstGeom>
+                    </p:spPr>
+                  </p:pic>
+                </p:oleObj>
+              </mc:Fallback>
+            </mc:AlternateContent>
+          </a:graphicData>
+        </a:graphic>
+      </p:graphicFrame>
       <p:sp>
         <p:nvSpPr>
           <p:cNvPr id="2" name="Title Placeholder 1"/>
@@ -3675,10 +3376,9 @@
           <a:lstStyle/>
           <a:p>
             <a:r>
-              <a:rPr lang="en-US" smtClean="0"/>
+              <a:rPr lang="en-US"/>
               <a:t>Click to edit Master title style</a:t>
             </a:r>
-            <a:endParaRPr lang="en-US"/>
           </a:p>
         </p:txBody>
       </p:sp>
@@ -3709,38 +3409,37 @@
           <a:p>
             <a:pPr lvl="0"/>
             <a:r>
-              <a:rPr lang="en-US" smtClean="0"/>
+              <a:rPr lang="en-US"/>
               <a:t>Click to edit Master text styles</a:t>
             </a:r>
           </a:p>
           <a:p>
             <a:pPr lvl="1"/>
             <a:r>
-              <a:rPr lang="en-US" smtClean="0"/>
+              <a:rPr lang="en-US"/>
               <a:t>Second level</a:t>
             </a:r>
           </a:p>
           <a:p>
             <a:pPr lvl="2"/>
             <a:r>
-              <a:rPr lang="en-US" smtClean="0"/>
+              <a:rPr lang="en-US"/>
               <a:t>Third level</a:t>
             </a:r>
           </a:p>
           <a:p>
             <a:pPr lvl="3"/>
             <a:r>
-              <a:rPr lang="en-US" smtClean="0"/>
+              <a:rPr lang="en-US"/>
               <a:t>Fourth level</a:t>
             </a:r>
           </a:p>
           <a:p>
             <a:pPr lvl="4"/>
             <a:r>
-              <a:rPr lang="en-US" smtClean="0"/>
+              <a:rPr lang="en-US"/>
               <a:t>Fifth level</a:t>
             </a:r>
-            <a:endParaRPr lang="en-US"/>
           </a:p>
         </p:txBody>
       </p:sp>
@@ -3779,7 +3478,7 @@
           <a:p>
             <a:fld id="{5BCAD085-E8A6-8845-BD4E-CB4CCA059FC4}" type="datetimeFigureOut">
               <a:rPr lang="en-US" smtClean="0"/>
-              <a:t>1/27/13</a:t>
+              <a:t>5/2/26</a:t>
             </a:fld>
             <a:endParaRPr lang="en-US"/>
           </a:p>
@@ -4138,7 +3837,7 @@
 </file>
 
 <file path=ppt/slides/slide1.xml><?xml version="1.0" encoding="utf-8"?>
-<p:sld xmlns:a="http://schemas.openxmlformats.org/drawingml/2006/main" xmlns:p="http://schemas.openxmlformats.org/presentationml/2006/main" xmlns:r="http://schemas.openxmlformats.org/officeDocument/2006/relationships">
+<p:sld xmlns:a="http://schemas.openxmlformats.org/drawingml/2006/main" xmlns:r="http://schemas.openxmlformats.org/officeDocument/2006/relationships" xmlns:p="http://schemas.openxmlformats.org/presentationml/2006/main">
   <p:cSld>
     <p:spTree>
       <p:nvGrpSpPr>
@@ -4146,7 +3845,14 @@
         <p:cNvGrpSpPr/>
         <p:nvPr/>
       </p:nvGrpSpPr>
-      <p:grpSpPr/>
+      <p:grpSpPr>
+        <a:xfrm>
+          <a:off x="0" y="0"/>
+          <a:ext cx="0" cy="0"/>
+          <a:chOff x="0" y="0"/>
+          <a:chExt cx="0" cy="0"/>
+        </a:xfrm>
+      </p:grpSpPr>
       <p:sp>
         <p:nvSpPr>
           <p:cNvPr id="2" name="TextBox 1"/>
@@ -4292,7 +3998,7 @@
         <p:spPr>
           <a:xfrm>
             <a:off x="548640" y="5394960"/>
-            <a:ext cx="11064240" cy="365760"/>
+            <a:ext cx="11064240" cy="338554"/>
           </a:xfrm>
           <a:prstGeom prst="rect">
             <a:avLst/>
@@ -4307,12 +4013,20 @@
           <a:p>
             <a:pPr algn="l"/>
             <a:r>
-              <a:rPr sz="1600" b="0">
+              <a:rPr lang="en-US" sz="1600" b="0" dirty="0">
                 <a:solidFill>
                   <a:srgbClr val="555555"/>
                 </a:solidFill>
               </a:rPr>
-              <a:t>MIT  ·  Human-Robot Interaction  ·  Spring 2026</a:t>
+              <a:t>Algorithmic </a:t>
+            </a:r>
+            <a:r>
+              <a:rPr sz="1600" b="0" dirty="0">
+                <a:solidFill>
+                  <a:srgbClr val="555555"/>
+                </a:solidFill>
+              </a:rPr>
+              <a:t>Human-Robot Interaction  ·  Spring 2026</a:t>
             </a:r>
           </a:p>
         </p:txBody>
@@ -4394,7 +4108,7 @@
 </file>
 
 <file path=ppt/slides/slide10.xml><?xml version="1.0" encoding="utf-8"?>
-<p:sld xmlns:a="http://schemas.openxmlformats.org/drawingml/2006/main" xmlns:p="http://schemas.openxmlformats.org/presentationml/2006/main" xmlns:r="http://schemas.openxmlformats.org/officeDocument/2006/relationships">
+<p:sld xmlns:a="http://schemas.openxmlformats.org/drawingml/2006/main" xmlns:r="http://schemas.openxmlformats.org/officeDocument/2006/relationships" xmlns:p="http://schemas.openxmlformats.org/presentationml/2006/main">
   <p:cSld>
     <p:spTree>
       <p:nvGrpSpPr>
@@ -4402,7 +4116,89 @@
         <p:cNvGrpSpPr/>
         <p:nvPr/>
       </p:nvGrpSpPr>
-      <p:grpSpPr/>
+      <p:grpSpPr>
+        <a:xfrm>
+          <a:off x="0" y="0"/>
+          <a:ext cx="0" cy="0"/>
+          <a:chOff x="0" y="0"/>
+          <a:chExt cx="0" cy="0"/>
+        </a:xfrm>
+      </p:grpSpPr>
+      <p:sp>
+        <p:nvSpPr>
+          <p:cNvPr id="2" name="TextBox 1">
+            <a:extLst>
+              <a:ext uri="{FF2B5EF4-FFF2-40B4-BE49-F238E27FC236}">
+                <a16:creationId xmlns:a16="http://schemas.microsoft.com/office/drawing/2014/main" id="{6D18F0E8-A2B4-662E-C154-CFC770DF08C9}"/>
+              </a:ext>
+            </a:extLst>
+          </p:cNvPr>
+          <p:cNvSpPr txBox="1"/>
+          <p:nvPr/>
+        </p:nvSpPr>
+        <p:spPr>
+          <a:xfrm>
+            <a:off x="548640" y="2832518"/>
+            <a:ext cx="10972800" cy="769441"/>
+          </a:xfrm>
+          <a:prstGeom prst="rect">
+            <a:avLst/>
+          </a:prstGeom>
+          <a:noFill/>
+        </p:spPr>
+        <p:txBody>
+          <a:bodyPr wrap="square" anchor="t">
+            <a:spAutoFit/>
+          </a:bodyPr>
+          <a:lstStyle/>
+          <a:p>
+            <a:pPr algn="ctr"/>
+            <a:r>
+              <a:rPr lang="en-US" sz="4400" b="1" dirty="0">
+                <a:solidFill>
+                  <a:srgbClr val="1F2E55"/>
+                </a:solidFill>
+              </a:rPr>
+              <a:t>Thank you! </a:t>
+            </a:r>
+            <a:endParaRPr sz="4400" b="1" dirty="0">
+              <a:solidFill>
+                <a:srgbClr val="1F2E55"/>
+              </a:solidFill>
+            </a:endParaRPr>
+          </a:p>
+        </p:txBody>
+      </p:sp>
+    </p:spTree>
+    <p:extLst>
+      <p:ext uri="{BB962C8B-B14F-4D97-AF65-F5344CB8AC3E}">
+        <p14:creationId xmlns:p14="http://schemas.microsoft.com/office/powerpoint/2010/main" val="2737201758"/>
+      </p:ext>
+    </p:extLst>
+  </p:cSld>
+  <p:clrMapOvr>
+    <a:masterClrMapping/>
+  </p:clrMapOvr>
+</p:sld>
+</file>
+
+<file path=ppt/slides/slide2.xml><?xml version="1.0" encoding="utf-8"?>
+<p:sld xmlns:a="http://schemas.openxmlformats.org/drawingml/2006/main" xmlns:r="http://schemas.openxmlformats.org/officeDocument/2006/relationships" xmlns:p="http://schemas.openxmlformats.org/presentationml/2006/main">
+  <p:cSld>
+    <p:spTree>
+      <p:nvGrpSpPr>
+        <p:cNvPr id="1" name=""/>
+        <p:cNvGrpSpPr/>
+        <p:nvPr/>
+      </p:nvGrpSpPr>
+      <p:grpSpPr>
+        <a:xfrm>
+          <a:off x="0" y="0"/>
+          <a:ext cx="0" cy="0"/>
+          <a:chOff x="0" y="0"/>
+          <a:chExt cx="0" cy="0"/>
+        </a:xfrm>
+      </p:grpSpPr>
       <p:sp>
         <p:nvSpPr>
           <p:cNvPr id="2" name="TextBox 1"/>
@@ -4427,12 +4223,12 @@
           <a:p>
             <a:pPr algn="l"/>
             <a:r>
-              <a:rPr sz="2800" b="1">
+              <a:rPr sz="3200" b="1">
                 <a:solidFill>
                   <a:srgbClr val="1F2E55"/>
                 </a:solidFill>
               </a:rPr>
-              <a:t>Backup B — save-best criterion grid (Stage 2)</a:t>
+              <a:t>Motivation: where MAPF policies break</a:t>
             </a:r>
           </a:p>
         </p:txBody>
@@ -4445,8 +4241,8 @@
         </p:nvSpPr>
         <p:spPr>
           <a:xfrm>
-            <a:off x="548640" y="1097280"/>
-            <a:ext cx="11064240" cy="365760"/>
+            <a:off x="548640" y="1371600"/>
+            <a:ext cx="11064240" cy="2756909"/>
           </a:xfrm>
           <a:prstGeom prst="rect">
             <a:avLst/>
@@ -4454,715 +4250,6 @@
           <a:noFill/>
         </p:spPr>
         <p:txBody>
-          <a:bodyPr wrap="square" anchor="t">
-            <a:spAutoFit/>
-          </a:bodyPr>
-          <a:lstStyle/>
-          <a:p>
-            <a:pPr algn="l"/>
-            <a:r>
-              <a:rPr sz="1400" b="0">
-                <a:solidFill>
-                  <a:srgbClr val="555555"/>
-                </a:solidFill>
-              </a:rPr>
-              <a:t>Same training run, four saved checkpoints — performance on the 13 val pairs</a:t>
-            </a:r>
-          </a:p>
-        </p:txBody>
-      </p:sp>
-      <p:graphicFrame>
-        <p:nvGraphicFramePr>
-          <p:cNvPr id="4" name="Table 3"/>
-          <p:cNvGraphicFramePr>
-            <a:graphicFrameLocks noGrp="1"/>
-          </p:cNvGraphicFramePr>
-          <p:nvPr/>
-        </p:nvGraphicFramePr>
-        <p:xfrm>
-          <a:off x="548640" y="1737360"/>
-          <a:ext cx="11064240" cy="2286000"/>
-        </p:xfrm>
-        <a:graphic>
-          <a:graphicData uri="http://schemas.openxmlformats.org/drawingml/2006/table">
-            <a:tbl>
-              <a:tblPr firstRow="1" bandRow="1">
-                <a:tableStyleId>{5C22544A-7EE6-4342-B048-85BDC9FD1C3A}</a:tableStyleId>
-              </a:tblPr>
-              <a:tblGrid>
-                <a:gridCol w="2212848"/>
-                <a:gridCol w="2212848"/>
-                <a:gridCol w="2212848"/>
-                <a:gridCol w="2212848"/>
-                <a:gridCol w="2212848"/>
-              </a:tblGrid>
-              <a:tr h="457200">
-                <a:tc>
-                  <a:txBody>
-                    <a:bodyPr/>
-                    <a:lstStyle/>
-                    <a:p>
-                      <a:pPr algn="l"/>
-                      <a:r>
-                        <a:rPr sz="1400" b="1">
-                          <a:solidFill>
-                            <a:srgbClr val="1F2E55"/>
-                          </a:solidFill>
-                        </a:rPr>
-                        <a:t>Stage 2 ckpt (saved by)</a:t>
-                      </a:r>
-                    </a:p>
-                  </a:txBody>
-                  <a:tcPr>
-                    <a:solidFill>
-                      <a:srgbClr val="E8EEF5"/>
-                    </a:solidFill>
-                  </a:tcPr>
-                </a:tc>
-                <a:tc>
-                  <a:txBody>
-                    <a:bodyPr/>
-                    <a:lstStyle/>
-                    <a:p>
-                      <a:pPr algn="l"/>
-                      <a:r>
-                        <a:rPr sz="1400" b="1">
-                          <a:solidFill>
-                            <a:srgbClr val="1F2E55"/>
-                          </a:solidFill>
-                        </a:rPr>
-                        <a:t>hp_v</a:t>
-                      </a:r>
-                    </a:p>
-                  </a:txBody>
-                  <a:tcPr>
-                    <a:solidFill>
-                      <a:srgbClr val="E8EEF5"/>
-                    </a:solidFill>
-                  </a:tcPr>
-                </a:tc>
-                <a:tc>
-                  <a:txBody>
-                    <a:bodyPr/>
-                    <a:lstStyle/>
-                    <a:p>
-                      <a:pPr algn="l"/>
-                      <a:r>
-                        <a:rPr sz="1400" b="1">
-                          <a:solidFill>
-                            <a:srgbClr val="1F2E55"/>
-                          </a:solidFill>
-                        </a:rPr>
-                        <a:t>h-arg top-1</a:t>
-                      </a:r>
-                    </a:p>
-                  </a:txBody>
-                  <a:tcPr>
-                    <a:solidFill>
-                      <a:srgbClr val="E8EEF5"/>
-                    </a:solidFill>
-                  </a:tcPr>
-                </a:tc>
-                <a:tc>
-                  <a:txBody>
-                    <a:bodyPr/>
-                    <a:lstStyle/>
-                    <a:p>
-                      <a:pPr algn="l"/>
-                      <a:r>
-                        <a:rPr sz="1400" b="1">
-                          <a:solidFill>
-                            <a:srgbClr val="1F2E55"/>
-                          </a:solidFill>
-                        </a:rPr>
-                        <a:t>h-arg ±1</a:t>
-                      </a:r>
-                    </a:p>
-                  </a:txBody>
-                  <a:tcPr>
-                    <a:solidFill>
-                      <a:srgbClr val="E8EEF5"/>
-                    </a:solidFill>
-                  </a:tcPr>
-                </a:tc>
-                <a:tc>
-                  <a:txBody>
-                    <a:bodyPr/>
-                    <a:lstStyle/>
-                    <a:p>
-                      <a:pPr algn="l"/>
-                      <a:r>
-                        <a:rPr sz="1400" b="1">
-                          <a:solidFill>
-                            <a:srgbClr val="1F2E55"/>
-                          </a:solidFill>
-                        </a:rPr>
-                        <a:t>argmax_pm1</a:t>
-                      </a:r>
-                    </a:p>
-                  </a:txBody>
-                  <a:tcPr>
-                    <a:solidFill>
-                      <a:srgbClr val="E8EEF5"/>
-                    </a:solidFill>
-                  </a:tcPr>
-                </a:tc>
-              </a:tr>
-              <a:tr h="457200">
-                <a:tc>
-                  <a:txBody>
-                    <a:bodyPr/>
-                    <a:lstStyle/>
-                    <a:p>
-                      <a:pPr algn="l"/>
-                      <a:r>
-                        <a:rPr sz="1400">
-                          <a:solidFill>
-                            <a:srgbClr val="2A2A2A"/>
-                          </a:solidFill>
-                        </a:rPr>
-                        <a:t>best hp_v</a:t>
-                      </a:r>
-                    </a:p>
-                  </a:txBody>
-                  <a:tcPr>
-                    <a:solidFill>
-                      <a:srgbClr val="FFFFFF"/>
-                    </a:solidFill>
-                  </a:tcPr>
-                </a:tc>
-                <a:tc>
-                  <a:txBody>
-                    <a:bodyPr/>
-                    <a:lstStyle/>
-                    <a:p>
-                      <a:pPr algn="l"/>
-                      <a:r>
-                        <a:rPr sz="1400">
-                          <a:solidFill>
-                            <a:srgbClr val="2A2A2A"/>
-                          </a:solidFill>
-                        </a:rPr>
-                        <a:t>0.846</a:t>
-                      </a:r>
-                    </a:p>
-                  </a:txBody>
-                  <a:tcPr>
-                    <a:solidFill>
-                      <a:srgbClr val="FFFFFF"/>
-                    </a:solidFill>
-                  </a:tcPr>
-                </a:tc>
-                <a:tc>
-                  <a:txBody>
-                    <a:bodyPr/>
-                    <a:lstStyle/>
-                    <a:p>
-                      <a:pPr algn="l"/>
-                      <a:r>
-                        <a:rPr sz="1400">
-                          <a:solidFill>
-                            <a:srgbClr val="2A2A2A"/>
-                          </a:solidFill>
-                        </a:rPr>
-                        <a:t>0.538</a:t>
-                      </a:r>
-                    </a:p>
-                  </a:txBody>
-                  <a:tcPr>
-                    <a:solidFill>
-                      <a:srgbClr val="FFFFFF"/>
-                    </a:solidFill>
-                  </a:tcPr>
-                </a:tc>
-                <a:tc>
-                  <a:txBody>
-                    <a:bodyPr/>
-                    <a:lstStyle/>
-                    <a:p>
-                      <a:pPr algn="l"/>
-                      <a:r>
-                        <a:rPr sz="1400">
-                          <a:solidFill>
-                            <a:srgbClr val="2A2A2A"/>
-                          </a:solidFill>
-                        </a:rPr>
-                        <a:t>1.000</a:t>
-                      </a:r>
-                    </a:p>
-                  </a:txBody>
-                  <a:tcPr>
-                    <a:solidFill>
-                      <a:srgbClr val="FFFFFF"/>
-                    </a:solidFill>
-                  </a:tcPr>
-                </a:tc>
-                <a:tc>
-                  <a:txBody>
-                    <a:bodyPr/>
-                    <a:lstStyle/>
-                    <a:p>
-                      <a:pPr algn="l"/>
-                      <a:r>
-                        <a:rPr sz="1400">
-                          <a:solidFill>
-                            <a:srgbClr val="2A2A2A"/>
-                          </a:solidFill>
-                        </a:rPr>
-                        <a:t>0.474</a:t>
-                      </a:r>
-                    </a:p>
-                  </a:txBody>
-                  <a:tcPr>
-                    <a:solidFill>
-                      <a:srgbClr val="FFFFFF"/>
-                    </a:solidFill>
-                  </a:tcPr>
-                </a:tc>
-              </a:tr>
-              <a:tr h="457200">
-                <a:tc>
-                  <a:txBody>
-                    <a:bodyPr/>
-                    <a:lstStyle/>
-                    <a:p>
-                      <a:pPr algn="l"/>
-                      <a:r>
-                        <a:rPr sz="1400">
-                          <a:solidFill>
-                            <a:srgbClr val="2A2A2A"/>
-                          </a:solidFill>
-                        </a:rPr>
-                        <a:t>best argmax_pm1 (DDG-aligned)</a:t>
-                      </a:r>
-                    </a:p>
-                  </a:txBody>
-                  <a:tcPr>
-                    <a:solidFill>
-                      <a:srgbClr val="F6F8FB"/>
-                    </a:solidFill>
-                  </a:tcPr>
-                </a:tc>
-                <a:tc>
-                  <a:txBody>
-                    <a:bodyPr/>
-                    <a:lstStyle/>
-                    <a:p>
-                      <a:pPr algn="l"/>
-                      <a:r>
-                        <a:rPr sz="1400">
-                          <a:solidFill>
-                            <a:srgbClr val="2A2A2A"/>
-                          </a:solidFill>
-                        </a:rPr>
-                        <a:t>0.615</a:t>
-                      </a:r>
-                    </a:p>
-                  </a:txBody>
-                  <a:tcPr>
-                    <a:solidFill>
-                      <a:srgbClr val="F6F8FB"/>
-                    </a:solidFill>
-                  </a:tcPr>
-                </a:tc>
-                <a:tc>
-                  <a:txBody>
-                    <a:bodyPr/>
-                    <a:lstStyle/>
-                    <a:p>
-                      <a:pPr algn="l"/>
-                      <a:r>
-                        <a:rPr sz="1400">
-                          <a:solidFill>
-                            <a:srgbClr val="2A2A2A"/>
-                          </a:solidFill>
-                        </a:rPr>
-                        <a:t>0.308</a:t>
-                      </a:r>
-                    </a:p>
-                  </a:txBody>
-                  <a:tcPr>
-                    <a:solidFill>
-                      <a:srgbClr val="F6F8FB"/>
-                    </a:solidFill>
-                  </a:tcPr>
-                </a:tc>
-                <a:tc>
-                  <a:txBody>
-                    <a:bodyPr/>
-                    <a:lstStyle/>
-                    <a:p>
-                      <a:pPr algn="l"/>
-                      <a:r>
-                        <a:rPr sz="1400">
-                          <a:solidFill>
-                            <a:srgbClr val="2A2A2A"/>
-                          </a:solidFill>
-                        </a:rPr>
-                        <a:t>0.846</a:t>
-                      </a:r>
-                    </a:p>
-                  </a:txBody>
-                  <a:tcPr>
-                    <a:solidFill>
-                      <a:srgbClr val="F6F8FB"/>
-                    </a:solidFill>
-                  </a:tcPr>
-                </a:tc>
-                <a:tc>
-                  <a:txBody>
-                    <a:bodyPr/>
-                    <a:lstStyle/>
-                    <a:p>
-                      <a:pPr algn="l"/>
-                      <a:r>
-                        <a:rPr sz="1400">
-                          <a:solidFill>
-                            <a:srgbClr val="2A2A2A"/>
-                          </a:solidFill>
-                        </a:rPr>
-                        <a:t>0.541</a:t>
-                      </a:r>
-                    </a:p>
-                  </a:txBody>
-                  <a:tcPr>
-                    <a:solidFill>
-                      <a:srgbClr val="F6F8FB"/>
-                    </a:solidFill>
-                  </a:tcPr>
-                </a:tc>
-              </a:tr>
-              <a:tr h="457200">
-                <a:tc>
-                  <a:txBody>
-                    <a:bodyPr/>
-                    <a:lstStyle/>
-                    <a:p>
-                      <a:pPr algn="l"/>
-                      <a:r>
-                        <a:rPr sz="1400">
-                          <a:solidFill>
-                            <a:srgbClr val="2A2A2A"/>
-                          </a:solidFill>
-                        </a:rPr>
-                        <a:t>best h-arg ±1</a:t>
-                      </a:r>
-                    </a:p>
-                  </a:txBody>
-                  <a:tcPr>
-                    <a:solidFill>
-                      <a:srgbClr val="FFFFFF"/>
-                    </a:solidFill>
-                  </a:tcPr>
-                </a:tc>
-                <a:tc>
-                  <a:txBody>
-                    <a:bodyPr/>
-                    <a:lstStyle/>
-                    <a:p>
-                      <a:pPr algn="l"/>
-                      <a:r>
-                        <a:rPr sz="1400">
-                          <a:solidFill>
-                            <a:srgbClr val="2A2A2A"/>
-                          </a:solidFill>
-                        </a:rPr>
-                        <a:t>0.846</a:t>
-                      </a:r>
-                    </a:p>
-                  </a:txBody>
-                  <a:tcPr>
-                    <a:solidFill>
-                      <a:srgbClr val="FFFFFF"/>
-                    </a:solidFill>
-                  </a:tcPr>
-                </a:tc>
-                <a:tc>
-                  <a:txBody>
-                    <a:bodyPr/>
-                    <a:lstStyle/>
-                    <a:p>
-                      <a:pPr algn="l"/>
-                      <a:r>
-                        <a:rPr sz="1400">
-                          <a:solidFill>
-                            <a:srgbClr val="2A2A2A"/>
-                          </a:solidFill>
-                        </a:rPr>
-                        <a:t>0.538</a:t>
-                      </a:r>
-                    </a:p>
-                  </a:txBody>
-                  <a:tcPr>
-                    <a:solidFill>
-                      <a:srgbClr val="FFFFFF"/>
-                    </a:solidFill>
-                  </a:tcPr>
-                </a:tc>
-                <a:tc>
-                  <a:txBody>
-                    <a:bodyPr/>
-                    <a:lstStyle/>
-                    <a:p>
-                      <a:pPr algn="l"/>
-                      <a:r>
-                        <a:rPr sz="1400">
-                          <a:solidFill>
-                            <a:srgbClr val="2A2A2A"/>
-                          </a:solidFill>
-                        </a:rPr>
-                        <a:t>1.000</a:t>
-                      </a:r>
-                    </a:p>
-                  </a:txBody>
-                  <a:tcPr>
-                    <a:solidFill>
-                      <a:srgbClr val="FFFFFF"/>
-                    </a:solidFill>
-                  </a:tcPr>
-                </a:tc>
-                <a:tc>
-                  <a:txBody>
-                    <a:bodyPr/>
-                    <a:lstStyle/>
-                    <a:p>
-                      <a:pPr algn="l"/>
-                      <a:r>
-                        <a:rPr sz="1400">
-                          <a:solidFill>
-                            <a:srgbClr val="2A2A2A"/>
-                          </a:solidFill>
-                        </a:rPr>
-                        <a:t>0.474</a:t>
-                      </a:r>
-                    </a:p>
-                  </a:txBody>
-                  <a:tcPr>
-                    <a:solidFill>
-                      <a:srgbClr val="FFFFFF"/>
-                    </a:solidFill>
-                  </a:tcPr>
-                </a:tc>
-              </a:tr>
-              <a:tr h="457200">
-                <a:tc>
-                  <a:txBody>
-                    <a:bodyPr/>
-                    <a:lstStyle/>
-                    <a:p>
-                      <a:pPr algn="l"/>
-                      <a:r>
-                        <a:rPr sz="1400">
-                          <a:solidFill>
-                            <a:srgbClr val="2A2A2A"/>
-                          </a:solidFill>
-                        </a:rPr>
-                        <a:t>best h-arg top-1  ★</a:t>
-                      </a:r>
-                    </a:p>
-                  </a:txBody>
-                  <a:tcPr>
-                    <a:solidFill>
-                      <a:srgbClr val="F6F8FB"/>
-                    </a:solidFill>
-                  </a:tcPr>
-                </a:tc>
-                <a:tc>
-                  <a:txBody>
-                    <a:bodyPr/>
-                    <a:lstStyle/>
-                    <a:p>
-                      <a:pPr algn="l"/>
-                      <a:r>
-                        <a:rPr sz="1400">
-                          <a:solidFill>
-                            <a:srgbClr val="2A2A2A"/>
-                          </a:solidFill>
-                        </a:rPr>
-                        <a:t>0.846</a:t>
-                      </a:r>
-                    </a:p>
-                  </a:txBody>
-                  <a:tcPr>
-                    <a:solidFill>
-                      <a:srgbClr val="F6F8FB"/>
-                    </a:solidFill>
-                  </a:tcPr>
-                </a:tc>
-                <a:tc>
-                  <a:txBody>
-                    <a:bodyPr/>
-                    <a:lstStyle/>
-                    <a:p>
-                      <a:pPr algn="l"/>
-                      <a:r>
-                        <a:rPr sz="1400">
-                          <a:solidFill>
-                            <a:srgbClr val="2A2A2A"/>
-                          </a:solidFill>
-                        </a:rPr>
-                        <a:t>0.615</a:t>
-                      </a:r>
-                    </a:p>
-                  </a:txBody>
-                  <a:tcPr>
-                    <a:solidFill>
-                      <a:srgbClr val="F6F8FB"/>
-                    </a:solidFill>
-                  </a:tcPr>
-                </a:tc>
-                <a:tc>
-                  <a:txBody>
-                    <a:bodyPr/>
-                    <a:lstStyle/>
-                    <a:p>
-                      <a:pPr algn="l"/>
-                      <a:r>
-                        <a:rPr sz="1400">
-                          <a:solidFill>
-                            <a:srgbClr val="2A2A2A"/>
-                          </a:solidFill>
-                        </a:rPr>
-                        <a:t>0.923</a:t>
-                      </a:r>
-                    </a:p>
-                  </a:txBody>
-                  <a:tcPr>
-                    <a:solidFill>
-                      <a:srgbClr val="F6F8FB"/>
-                    </a:solidFill>
-                  </a:tcPr>
-                </a:tc>
-                <a:tc>
-                  <a:txBody>
-                    <a:bodyPr/>
-                    <a:lstStyle/>
-                    <a:p>
-                      <a:pPr algn="l"/>
-                      <a:r>
-                        <a:rPr sz="1400">
-                          <a:solidFill>
-                            <a:srgbClr val="2A2A2A"/>
-                          </a:solidFill>
-                        </a:rPr>
-                        <a:t>0.514</a:t>
-                      </a:r>
-                    </a:p>
-                  </a:txBody>
-                  <a:tcPr>
-                    <a:solidFill>
-                      <a:srgbClr val="F6F8FB"/>
-                    </a:solidFill>
-                  </a:tcPr>
-                </a:tc>
-              </a:tr>
-            </a:tbl>
-          </a:graphicData>
-        </a:graphic>
-      </p:graphicFrame>
-      <p:sp>
-        <p:nvSpPr>
-          <p:cNvPr id="5" name="TextBox 4"/>
-          <p:cNvSpPr txBox="1"/>
-          <p:nvPr/>
-        </p:nvSpPr>
-        <p:spPr>
-          <a:xfrm>
-            <a:off x="548640" y="4297680"/>
-            <a:ext cx="11064240" cy="1371600"/>
-          </a:xfrm>
-          <a:prstGeom prst="rect">
-            <a:avLst/>
-          </a:prstGeom>
-          <a:noFill/>
-        </p:spPr>
-        <p:txBody>
-          <a:bodyPr wrap="square" anchor="t">
-            <a:spAutoFit/>
-          </a:bodyPr>
-          <a:lstStyle/>
-          <a:p>
-            <a:pPr algn="l"/>
-            <a:r>
-              <a:rPr sz="1800" b="0">
-                <a:solidFill>
-                  <a:srgbClr val="2A2A2A"/>
-                </a:solidFill>
-              </a:rPr>
-              <a:t>Deploy the bottom row (★): best deployment-shape metric (h-arg top-1 = 0.615), ties for best pairwise (0.846), only −0.036 on auto top-1±1 vs pure-DDG-aligned ckpt.</a:t>
-            </a:r>
-          </a:p>
-        </p:txBody>
-      </p:sp>
-    </p:spTree>
-  </p:cSld>
-  <p:clrMapOvr>
-    <a:masterClrMapping/>
-  </p:clrMapOvr>
-</p:sld>
-</file>
-
-<file path=ppt/slides/slide2.xml><?xml version="1.0" encoding="utf-8"?>
-<p:sld xmlns:a="http://schemas.openxmlformats.org/drawingml/2006/main" xmlns:p="http://schemas.openxmlformats.org/presentationml/2006/main" xmlns:r="http://schemas.openxmlformats.org/officeDocument/2006/relationships">
-  <p:cSld>
-    <p:spTree>
-      <p:nvGrpSpPr>
-        <p:cNvPr id="1" name=""/>
-        <p:cNvGrpSpPr/>
-        <p:nvPr/>
-      </p:nvGrpSpPr>
-      <p:grpSpPr/>
-      <p:sp>
-        <p:nvSpPr>
-          <p:cNvPr id="2" name="TextBox 1"/>
-          <p:cNvSpPr txBox="1"/>
-          <p:nvPr/>
-        </p:nvSpPr>
-        <p:spPr>
-          <a:xfrm>
-            <a:off x="548640" y="365760"/>
-            <a:ext cx="10972800" cy="640080"/>
-          </a:xfrm>
-          <a:prstGeom prst="rect">
-            <a:avLst/>
-          </a:prstGeom>
-          <a:noFill/>
-        </p:spPr>
-        <p:txBody>
-          <a:bodyPr wrap="square" anchor="t">
-            <a:spAutoFit/>
-          </a:bodyPr>
-          <a:lstStyle/>
-          <a:p>
-            <a:pPr algn="l"/>
-            <a:r>
-              <a:rPr sz="3200" b="1">
-                <a:solidFill>
-                  <a:srgbClr val="1F2E55"/>
-                </a:solidFill>
-              </a:rPr>
-              <a:t>Motivation: where MAPF policies break</a:t>
-            </a:r>
-          </a:p>
-        </p:txBody>
-      </p:sp>
-      <p:sp>
-        <p:nvSpPr>
-          <p:cNvPr id="3" name="TextBox 2"/>
-          <p:cNvSpPr txBox="1"/>
-          <p:nvPr/>
-        </p:nvSpPr>
-        <p:spPr>
-          <a:xfrm>
-            <a:off x="548640" y="1371600"/>
-            <a:ext cx="11064240" cy="4389120"/>
-          </a:xfrm>
-          <a:prstGeom prst="rect">
-            <a:avLst/>
-          </a:prstGeom>
-          <a:noFill/>
-        </p:spPr>
-        <p:txBody>
           <a:bodyPr wrap="square">
             <a:spAutoFit/>
           </a:bodyPr>
@@ -5174,7 +4261,7 @@
               </a:lnSpc>
             </a:pPr>
             <a:r>
-              <a:rPr sz="2000">
+              <a:rPr sz="2000" dirty="0">
                 <a:solidFill>
                   <a:srgbClr val="2A2A2A"/>
                 </a:solidFill>
@@ -5182,20 +4269,36 @@
               <a:t>• </a:t>
             </a:r>
             <a:r>
-              <a:rPr sz="2000" b="0">
+              <a:rPr sz="2000" b="0" dirty="0">
                 <a:solidFill>
                   <a:srgbClr val="2A2A2A"/>
                 </a:solidFill>
               </a:rPr>
-              <a:t>Multi-agent pathfinding (MAPF) coordinates teams of robots in shared spaces — </a:t>
-            </a:r>
-            <a:r>
-              <a:rPr sz="2000" b="1">
+              <a:t>Multi-agent pathfinding (MAPF) coordinates teams of robots in shared spaces</a:t>
+            </a:r>
+            <a:r>
+              <a:rPr lang="en-US" sz="2000" b="0" dirty="0">
                 <a:solidFill>
                   <a:srgbClr val="2A2A2A"/>
                 </a:solidFill>
               </a:rPr>
-              <a:t>warehouses, delivery, search-and-rescue.</a:t>
+              <a:t>:</a:t>
+            </a:r>
+            <a:r>
+              <a:rPr sz="2000" b="0" dirty="0">
+                <a:solidFill>
+                  <a:srgbClr val="2A2A2A"/>
+                </a:solidFill>
+              </a:rPr>
+              <a:t> </a:t>
+            </a:r>
+            <a:r>
+              <a:rPr sz="2000" b="1" dirty="0">
+                <a:solidFill>
+                  <a:srgbClr val="2A2A2A"/>
+                </a:solidFill>
+              </a:rPr>
+              <a:t>warehouses, delivery, search-and-rescue</a:t>
             </a:r>
           </a:p>
           <a:p>
@@ -5205,7 +4308,7 @@
               </a:lnSpc>
             </a:pPr>
             <a:r>
-              <a:rPr sz="2000">
+              <a:rPr sz="2000" dirty="0">
                 <a:solidFill>
                   <a:srgbClr val="2A2A2A"/>
                 </a:solidFill>
@@ -5213,7 +4316,7 @@
               <a:t>• </a:t>
             </a:r>
             <a:r>
-              <a:rPr sz="2000" b="0">
+              <a:rPr sz="2000" b="0" dirty="0">
                 <a:solidFill>
                   <a:srgbClr val="2A2A2A"/>
                 </a:solidFill>
@@ -5221,7 +4324,7 @@
               <a:t>State-of-the-art: </a:t>
             </a:r>
             <a:r>
-              <a:rPr sz="2000" b="1">
+              <a:rPr sz="2000" b="1" dirty="0">
                 <a:solidFill>
                   <a:srgbClr val="1F2E55"/>
                 </a:solidFill>
@@ -5229,7 +4332,7 @@
               <a:t>MAPF-GPT</a:t>
             </a:r>
             <a:r>
-              <a:rPr sz="2000" b="0">
+              <a:rPr sz="2000" b="0" dirty="0">
                 <a:solidFill>
                   <a:srgbClr val="2A2A2A"/>
                 </a:solidFill>
@@ -5244,7 +4347,7 @@
               </a:lnSpc>
             </a:pPr>
             <a:r>
-              <a:rPr sz="2000">
+              <a:rPr sz="2000" dirty="0">
                 <a:solidFill>
                   <a:srgbClr val="2A2A2A"/>
                 </a:solidFill>
@@ -5252,7 +4355,7 @@
               <a:t>• </a:t>
             </a:r>
             <a:r>
-              <a:rPr sz="2000" b="0">
+              <a:rPr sz="2000" b="0" dirty="0">
                 <a:solidFill>
                   <a:srgbClr val="2A2A2A"/>
                 </a:solidFill>
@@ -5260,23 +4363,36 @@
               <a:t>Failure mode: </a:t>
             </a:r>
             <a:r>
-              <a:rPr sz="2000" b="1">
+              <a:rPr sz="2000" b="1" dirty="0">
                 <a:solidFill>
                   <a:srgbClr val="2A2A2A"/>
                 </a:solidFill>
-                <a:highlight>
-                  <a:srgbClr val="FFFBCC"/>
-                </a:highlight>
               </a:rPr>
               <a:t>congestion</a:t>
             </a:r>
             <a:r>
-              <a:rPr sz="2000" b="0">
+              <a:rPr sz="2000" b="0" dirty="0">
                 <a:solidFill>
                   <a:srgbClr val="2A2A2A"/>
                 </a:solidFill>
               </a:rPr>
-              <a:t> — agents bunched at corridor pinch-points, deadlocks, swap conflicts.</a:t>
+              <a:t> </a:t>
+            </a:r>
+            <a:r>
+              <a:rPr lang="en-US" sz="2000" b="0" dirty="0">
+                <a:solidFill>
+                  <a:srgbClr val="2A2A2A"/>
+                </a:solidFill>
+              </a:rPr>
+              <a:t>as</a:t>
+            </a:r>
+            <a:r>
+              <a:rPr sz="2000" b="0" dirty="0">
+                <a:solidFill>
+                  <a:srgbClr val="2A2A2A"/>
+                </a:solidFill>
+              </a:rPr>
+              <a:t> agents bunched at corridor pinch-points, deadlocks, swap conflicts.</a:t>
             </a:r>
           </a:p>
           <a:p>
@@ -5286,7 +4402,7 @@
               </a:lnSpc>
             </a:pPr>
             <a:r>
-              <a:rPr sz="2000">
+              <a:rPr sz="2000" dirty="0">
                 <a:solidFill>
                   <a:srgbClr val="2A2A2A"/>
                 </a:solidFill>
@@ -5294,7 +4410,7 @@
               <a:t>• </a:t>
             </a:r>
             <a:r>
-              <a:rPr sz="2000" b="0">
+              <a:rPr sz="2000" b="0" dirty="0">
                 <a:solidFill>
                   <a:srgbClr val="2A2A2A"/>
                 </a:solidFill>
@@ -5302,57 +4418,36 @@
               <a:t>The HRI question: </a:t>
             </a:r>
             <a:r>
-              <a:rPr sz="2000" b="1">
+              <a:rPr sz="2000" b="1" dirty="0">
                 <a:solidFill>
                   <a:srgbClr val="2A2A2A"/>
                 </a:solidFill>
-                <a:highlight>
-                  <a:srgbClr val="FFFBCC"/>
-                </a:highlight>
               </a:rPr>
               <a:t>currently there is no human in this loop.</a:t>
             </a:r>
             <a:r>
-              <a:rPr sz="2000" b="0">
+              <a:rPr sz="2000" b="0" dirty="0">
                 <a:solidFill>
                   <a:srgbClr val="2A2A2A"/>
                 </a:solidFill>
               </a:rPr>
-              <a:t> The policy trains on solver demos and is refined by a hand-tuned threshold. Where does human judgement help?</a:t>
-            </a:r>
-          </a:p>
-        </p:txBody>
-      </p:sp>
-      <p:sp>
-        <p:nvSpPr>
-          <p:cNvPr id="4" name="TextBox 3"/>
-          <p:cNvSpPr txBox="1"/>
-          <p:nvPr/>
-        </p:nvSpPr>
-        <p:spPr>
-          <a:xfrm>
-            <a:off x="365760" y="6126480"/>
-            <a:ext cx="7315200" cy="274320"/>
-          </a:xfrm>
-          <a:prstGeom prst="rect">
-            <a:avLst/>
-          </a:prstGeom>
-          <a:noFill/>
-        </p:spPr>
-        <p:txBody>
-          <a:bodyPr wrap="square" anchor="t">
-            <a:spAutoFit/>
-          </a:bodyPr>
-          <a:lstStyle/>
-          <a:p>
-            <a:pPr algn="l"/>
-            <a:r>
-              <a:rPr sz="1000" b="1">
-                <a:solidFill>
-                  <a:srgbClr val="888888"/>
-                </a:solidFill>
-              </a:rPr>
-              <a:t>[ Speaker: Sparsh · ~30s ]</a:t>
+              <a:t> The policy trains on solver demos and is refined by a hand-tuned threshold. </a:t>
+            </a:r>
+            <a:r>
+              <a:rPr lang="en-US" sz="2000" b="0" dirty="0">
+                <a:solidFill>
+                  <a:srgbClr val="2A2A2A"/>
+                </a:solidFill>
+              </a:rPr>
+              <a:t>Could</a:t>
+            </a:r>
+            <a:r>
+              <a:rPr sz="2000" b="0" dirty="0">
+                <a:solidFill>
+                  <a:srgbClr val="2A2A2A"/>
+                </a:solidFill>
+              </a:rPr>
+              <a:t> human judgement help?</a:t>
             </a:r>
           </a:p>
         </p:txBody>
@@ -5434,7 +4529,7 @@
 </file>
 
 <file path=ppt/slides/slide3.xml><?xml version="1.0" encoding="utf-8"?>
-<p:sld xmlns:a="http://schemas.openxmlformats.org/drawingml/2006/main" xmlns:p="http://schemas.openxmlformats.org/presentationml/2006/main" xmlns:r="http://schemas.openxmlformats.org/officeDocument/2006/relationships">
+<p:sld xmlns:a="http://schemas.openxmlformats.org/drawingml/2006/main" xmlns:r="http://schemas.openxmlformats.org/officeDocument/2006/relationships" xmlns:p="http://schemas.openxmlformats.org/presentationml/2006/main">
   <p:cSld>
     <p:spTree>
       <p:nvGrpSpPr>
@@ -5442,7 +4537,14 @@
         <p:cNvGrpSpPr/>
         <p:nvPr/>
       </p:nvGrpSpPr>
-      <p:grpSpPr/>
+      <p:grpSpPr>
+        <a:xfrm>
+          <a:off x="0" y="0"/>
+          <a:ext cx="0" cy="0"/>
+          <a:chOff x="0" y="0"/>
+          <a:chExt cx="0" cy="0"/>
+        </a:xfrm>
+      </p:grpSpPr>
       <p:sp>
         <p:nvSpPr>
           <p:cNvPr id="2" name="TextBox 1"/>
@@ -5452,7 +4554,7 @@
         <p:spPr>
           <a:xfrm>
             <a:off x="548640" y="365760"/>
-            <a:ext cx="10972800" cy="640080"/>
+            <a:ext cx="10972800" cy="523220"/>
           </a:xfrm>
           <a:prstGeom prst="rect">
             <a:avLst/>
@@ -5467,13 +4569,34 @@
           <a:p>
             <a:pPr algn="l"/>
             <a:r>
-              <a:rPr sz="2800" b="1">
+              <a:rPr lang="en-US" sz="2800" b="1" dirty="0">
                 <a:solidFill>
                   <a:srgbClr val="1F2E55"/>
                 </a:solidFill>
               </a:rPr>
-              <a:t>Approach landscape — what's been done, what's missing</a:t>
-            </a:r>
+              <a:t>Prior work and</a:t>
+            </a:r>
+            <a:r>
+              <a:rPr sz="2800" b="1" dirty="0">
+                <a:solidFill>
+                  <a:srgbClr val="1F2E55"/>
+                </a:solidFill>
+              </a:rPr>
+              <a:t> </a:t>
+            </a:r>
+            <a:r>
+              <a:rPr lang="en-US" sz="2800" b="1" dirty="0">
+                <a:solidFill>
+                  <a:srgbClr val="1F2E55"/>
+                </a:solidFill>
+              </a:rPr>
+              <a:t>our contribution</a:t>
+            </a:r>
+            <a:endParaRPr sz="2800" b="1" dirty="0">
+              <a:solidFill>
+                <a:srgbClr val="1F2E55"/>
+              </a:solidFill>
+            </a:endParaRPr>
           </a:p>
         </p:txBody>
       </p:sp>
@@ -5517,7 +4640,13 @@
           <p:cNvGraphicFramePr>
             <a:graphicFrameLocks noGrp="1"/>
           </p:cNvGraphicFramePr>
-          <p:nvPr/>
+          <p:nvPr>
+            <p:extLst>
+              <p:ext uri="{D42A27DB-BD31-4B8C-83A1-F6EECF244321}">
+                <p14:modId xmlns:p14="http://schemas.microsoft.com/office/powerpoint/2010/main" val="2823050394"/>
+              </p:ext>
+            </p:extLst>
+          </p:nvPr>
         </p:nvGraphicFramePr>
         <p:xfrm>
           <a:off x="548640" y="1554480"/>
@@ -5530,10 +4659,34 @@
                 <a:tableStyleId>{5C22544A-7EE6-4342-B048-85BDC9FD1C3A}</a:tableStyleId>
               </a:tblPr>
               <a:tblGrid>
-                <a:gridCol w="2766060"/>
-                <a:gridCol w="2766060"/>
-                <a:gridCol w="2766060"/>
-                <a:gridCol w="2766060"/>
+                <a:gridCol w="2258355">
+                  <a:extLst>
+                    <a:ext uri="{9D8B030D-6E8A-4147-A177-3AD203B41FA5}">
+                      <a16:colId xmlns:a16="http://schemas.microsoft.com/office/drawing/2014/main" val="20000"/>
+                    </a:ext>
+                  </a:extLst>
+                </a:gridCol>
+                <a:gridCol w="3551275">
+                  <a:extLst>
+                    <a:ext uri="{9D8B030D-6E8A-4147-A177-3AD203B41FA5}">
+                      <a16:colId xmlns:a16="http://schemas.microsoft.com/office/drawing/2014/main" val="20001"/>
+                    </a:ext>
+                  </a:extLst>
+                </a:gridCol>
+                <a:gridCol w="1626781">
+                  <a:extLst>
+                    <a:ext uri="{9D8B030D-6E8A-4147-A177-3AD203B41FA5}">
+                      <a16:colId xmlns:a16="http://schemas.microsoft.com/office/drawing/2014/main" val="20002"/>
+                    </a:ext>
+                  </a:extLst>
+                </a:gridCol>
+                <a:gridCol w="3627829">
+                  <a:extLst>
+                    <a:ext uri="{9D8B030D-6E8A-4147-A177-3AD203B41FA5}">
+                      <a16:colId xmlns:a16="http://schemas.microsoft.com/office/drawing/2014/main" val="20003"/>
+                    </a:ext>
+                  </a:extLst>
+                </a:gridCol>
               </a:tblGrid>
               <a:tr h="493776">
                 <a:tc>
@@ -5609,13 +4762,26 @@
                     <a:p>
                       <a:pPr algn="l"/>
                       <a:r>
-                        <a:rPr sz="1300" b="1">
+                        <a:rPr sz="1300" b="1" dirty="0">
                           <a:solidFill>
                             <a:srgbClr val="1F2E55"/>
                           </a:solidFill>
                         </a:rPr>
-                        <a:t>Limit / gap left open</a:t>
+                        <a:t>Limit</a:t>
                       </a:r>
+                      <a:r>
+                        <a:rPr lang="en-US" sz="1300" b="1" dirty="0">
+                          <a:solidFill>
+                            <a:srgbClr val="1F2E55"/>
+                          </a:solidFill>
+                        </a:rPr>
+                        <a:t>ations</a:t>
+                      </a:r>
+                      <a:endParaRPr sz="1300" b="1" dirty="0">
+                        <a:solidFill>
+                          <a:srgbClr val="1F2E55"/>
+                        </a:solidFill>
+                      </a:endParaRPr>
                     </a:p>
                   </a:txBody>
                   <a:tcPr>
@@ -5624,6 +4790,11 @@
                     </a:solidFill>
                   </a:tcPr>
                 </a:tc>
+                <a:extLst>
+                  <a:ext uri="{0D108BD9-81ED-4DB2-BD59-A6C34878D82A}">
+                    <a16:rowId xmlns:a16="http://schemas.microsoft.com/office/drawing/2014/main" val="10000"/>
+                  </a:ext>
+                </a:extLst>
               </a:tr>
               <a:tr h="493776">
                 <a:tc>
@@ -5714,6 +4885,11 @@
                     </a:solidFill>
                   </a:tcPr>
                 </a:tc>
+                <a:extLst>
+                  <a:ext uri="{0D108BD9-81ED-4DB2-BD59-A6C34878D82A}">
+                    <a16:rowId xmlns:a16="http://schemas.microsoft.com/office/drawing/2014/main" val="10001"/>
+                  </a:ext>
+                </a:extLst>
               </a:tr>
               <a:tr h="493776">
                 <a:tc>
@@ -5789,12 +4965,28 @@
                     <a:p>
                       <a:pPr algn="l"/>
                       <a:r>
-                        <a:rPr sz="1200">
+                        <a:rPr sz="1200" dirty="0">
                           <a:solidFill>
                             <a:srgbClr val="2A2A2A"/>
                           </a:solidFill>
                         </a:rPr>
-                        <a:t>Uniform expert calls per state — expensive at scale</a:t>
+                        <a:t>Uniform expert calls per state</a:t>
+                      </a:r>
+                      <a:r>
+                        <a:rPr lang="en-US" sz="1200" dirty="0">
+                          <a:solidFill>
+                            <a:srgbClr val="2A2A2A"/>
+                          </a:solidFill>
+                        </a:rPr>
+                        <a:t>, making it</a:t>
+                      </a:r>
+                      <a:r>
+                        <a:rPr sz="1200" dirty="0">
+                          <a:solidFill>
+                            <a:srgbClr val="2A2A2A"/>
+                          </a:solidFill>
+                        </a:rPr>
+                        <a:t> expensive at scale</a:t>
                       </a:r>
                     </a:p>
                   </a:txBody>
@@ -5804,6 +4996,11 @@
                     </a:solidFill>
                   </a:tcPr>
                 </a:tc>
+                <a:extLst>
+                  <a:ext uri="{0D108BD9-81ED-4DB2-BD59-A6C34878D82A}">
+                    <a16:rowId xmlns:a16="http://schemas.microsoft.com/office/drawing/2014/main" val="10002"/>
+                  </a:ext>
+                </a:extLst>
               </a:tr>
               <a:tr h="493776">
                 <a:tc>
@@ -5879,7 +5076,7 @@
                     <a:p>
                       <a:pPr algn="l"/>
                       <a:r>
-                        <a:rPr sz="1200">
+                        <a:rPr sz="1200" dirty="0">
                           <a:solidFill>
                             <a:srgbClr val="2A2A2A"/>
                           </a:solidFill>
@@ -5894,6 +5091,11 @@
                     </a:solidFill>
                   </a:tcPr>
                 </a:tc>
+                <a:extLst>
+                  <a:ext uri="{0D108BD9-81ED-4DB2-BD59-A6C34878D82A}">
+                    <a16:rowId xmlns:a16="http://schemas.microsoft.com/office/drawing/2014/main" val="10003"/>
+                  </a:ext>
+                </a:extLst>
               </a:tr>
               <a:tr h="493776">
                 <a:tc>
@@ -5947,7 +5149,7 @@
                     <a:p>
                       <a:pPr algn="l"/>
                       <a:r>
-                        <a:rPr sz="1200">
+                        <a:rPr sz="1200" dirty="0">
                           <a:solidFill>
                             <a:srgbClr val="2A2A2A"/>
                           </a:solidFill>
@@ -5969,12 +5171,20 @@
                     <a:p>
                       <a:pPr algn="l"/>
                       <a:r>
-                        <a:rPr sz="1200">
+                        <a:rPr lang="en-US" sz="1200" dirty="0">
                           <a:solidFill>
                             <a:srgbClr val="2A2A2A"/>
                           </a:solidFill>
                         </a:rPr>
-                        <a:t>(this is the gap we explore)</a:t>
+                        <a:t>(FILL</a:t>
+                      </a:r>
+                      <a:r>
+                        <a:rPr sz="1200" dirty="0">
+                          <a:solidFill>
+                            <a:srgbClr val="2A2A2A"/>
+                          </a:solidFill>
+                        </a:rPr>
+                        <a:t>)</a:t>
                       </a:r>
                     </a:p>
                   </a:txBody>
@@ -5984,6 +5194,11 @@
                     </a:solidFill>
                   </a:tcPr>
                 </a:tc>
+                <a:extLst>
+                  <a:ext uri="{0D108BD9-81ED-4DB2-BD59-A6C34878D82A}">
+                    <a16:rowId xmlns:a16="http://schemas.microsoft.com/office/drawing/2014/main" val="10004"/>
+                  </a:ext>
+                </a:extLst>
               </a:tr>
             </a:tbl>
           </a:graphicData>
@@ -6017,14 +5232,7 @@
           <a:lstStyle/>
           <a:p>
             <a:pPr algn="l"/>
-            <a:r>
-              <a:rPr sz="400" b="0">
-                <a:solidFill>
-                  <a:srgbClr val="2A2A2A"/>
-                </a:solidFill>
-              </a:rPr>
-              <a:t/>
-            </a:r>
+            <a:endParaRPr/>
           </a:p>
         </p:txBody>
       </p:sp>
@@ -6071,7 +5279,7 @@
         <p:spPr>
           <a:xfrm>
             <a:off x="548640" y="4526280"/>
-            <a:ext cx="11064240" cy="1280160"/>
+            <a:ext cx="11064240" cy="1049198"/>
           </a:xfrm>
           <a:prstGeom prst="rect">
             <a:avLst/>
@@ -6090,7 +5298,7 @@
               </a:lnSpc>
             </a:pPr>
             <a:r>
-              <a:rPr sz="1700">
+              <a:rPr sz="1700" dirty="0">
                 <a:solidFill>
                   <a:srgbClr val="2A2A2A"/>
                 </a:solidFill>
@@ -6098,7 +5306,7 @@
               <a:t>• </a:t>
             </a:r>
             <a:r>
-              <a:rPr sz="1700" b="0">
+              <a:rPr sz="1700" b="0" dirty="0">
                 <a:solidFill>
                   <a:srgbClr val="2A2A2A"/>
                 </a:solidFill>
@@ -6106,7 +5314,7 @@
               <a:t>Replace DDG's hand-tuned threshold with a </a:t>
             </a:r>
             <a:r>
-              <a:rPr sz="1700" b="1">
+              <a:rPr sz="1700" b="1" dirty="0">
                 <a:solidFill>
                   <a:srgbClr val="1F2E55"/>
                 </a:solidFill>
@@ -6114,7 +5322,7 @@
               <a:t>learned segment-ranking classifier</a:t>
             </a:r>
             <a:r>
-              <a:rPr sz="1700" b="0">
+              <a:rPr sz="1700" b="0" dirty="0">
                 <a:solidFill>
                   <a:srgbClr val="2A2A2A"/>
                 </a:solidFill>
@@ -6129,7 +5337,7 @@
               </a:lnSpc>
             </a:pPr>
             <a:r>
-              <a:rPr sz="1700">
+              <a:rPr sz="1700" dirty="0">
                 <a:solidFill>
                   <a:srgbClr val="2A2A2A"/>
                 </a:solidFill>
@@ -6137,7 +5345,7 @@
               <a:t>• </a:t>
             </a:r>
             <a:r>
-              <a:rPr sz="1700" b="0">
+              <a:rPr sz="1700" b="0" dirty="0">
                 <a:solidFill>
                   <a:srgbClr val="2A2A2A"/>
                 </a:solidFill>
@@ -6145,26 +5353,71 @@
               <a:t>Compare </a:t>
             </a:r>
             <a:r>
-              <a:rPr sz="1700" b="1">
+              <a:rPr sz="1700" b="1" dirty="0">
                 <a:solidFill>
                   <a:srgbClr val="2A2A2A"/>
                 </a:solidFill>
-                <a:highlight>
-                  <a:srgbClr val="FFFBCC"/>
-                </a:highlight>
               </a:rPr>
               <a:t>four annotation-acquisition strategies</a:t>
             </a:r>
             <a:r>
-              <a:rPr sz="1700" b="0">
+              <a:rPr sz="1700" b="0" dirty="0">
                 <a:solidFill>
                   <a:srgbClr val="2A2A2A"/>
                 </a:solidFill>
               </a:rPr>
-              <a:t> at the same label budget — un-prioritised hand-curation, warm-start AL, cold-start AL — to answer </a:t>
-            </a:r>
-            <a:r>
-              <a:rPr sz="1700" b="1">
+              <a:t> at the same label budget</a:t>
+            </a:r>
+            <a:r>
+              <a:rPr lang="en-US" sz="1700" b="0" dirty="0">
+                <a:solidFill>
+                  <a:srgbClr val="2A2A2A"/>
+                </a:solidFill>
+              </a:rPr>
+              <a:t>:</a:t>
+            </a:r>
+            <a:r>
+              <a:rPr sz="1700" b="0" dirty="0">
+                <a:solidFill>
+                  <a:srgbClr val="2A2A2A"/>
+                </a:solidFill>
+              </a:rPr>
+              <a:t> un-</a:t>
+            </a:r>
+            <a:r>
+              <a:rPr sz="1700" b="0" dirty="0" err="1">
+                <a:solidFill>
+                  <a:srgbClr val="2A2A2A"/>
+                </a:solidFill>
+              </a:rPr>
+              <a:t>prioritised</a:t>
+            </a:r>
+            <a:r>
+              <a:rPr sz="1700" b="0" dirty="0">
+                <a:solidFill>
+                  <a:srgbClr val="2A2A2A"/>
+                </a:solidFill>
+              </a:rPr>
+              <a:t> hand-curation, warm-start AL, cold-start AL</a:t>
+            </a:r>
+            <a:r>
+              <a:rPr lang="en-US" sz="1700" b="0" dirty="0">
+                <a:solidFill>
+                  <a:srgbClr val="2A2A2A"/>
+                </a:solidFill>
+              </a:rPr>
+              <a:t>,</a:t>
+            </a:r>
+            <a:r>
+              <a:rPr sz="1700" b="0" dirty="0">
+                <a:solidFill>
+                  <a:srgbClr val="2A2A2A"/>
+                </a:solidFill>
+              </a:rPr>
+              <a:t> to answer </a:t>
+            </a:r>
+            <a:r>
+              <a:rPr sz="1700" b="1" dirty="0">
                 <a:solidFill>
                   <a:srgbClr val="2A2A2A"/>
                 </a:solidFill>
@@ -6202,14 +5455,7 @@
           <a:lstStyle/>
           <a:p>
             <a:pPr algn="l"/>
-            <a:r>
-              <a:rPr sz="400" b="0">
-                <a:solidFill>
-                  <a:srgbClr val="2A2A2A"/>
-                </a:solidFill>
-              </a:rPr>
-              <a:t/>
-            </a:r>
+            <a:endParaRPr/>
           </a:p>
         </p:txBody>
       </p:sp>
@@ -6256,7 +5502,7 @@
         <p:spPr>
           <a:xfrm>
             <a:off x="868680" y="5806440"/>
-            <a:ext cx="10515600" cy="457200"/>
+            <a:ext cx="10515600" cy="553998"/>
           </a:xfrm>
           <a:prstGeom prst="rect">
             <a:avLst/>
@@ -6271,46 +5517,12 @@
           <a:p>
             <a:pPr algn="l"/>
             <a:r>
-              <a:rPr sz="1500" b="0">
+              <a:rPr sz="1500" b="0" dirty="0">
                 <a:solidFill>
                   <a:srgbClr val="2A2A2A"/>
                 </a:solidFill>
               </a:rPr>
-              <a:t>Can a small set of human-curated pairwise rankings improve a learned MAPF classifier beyond DDG's threshold — and does the strategy used to elicit those rankings matter?</a:t>
-            </a:r>
-          </a:p>
-        </p:txBody>
-      </p:sp>
-      <p:sp>
-        <p:nvSpPr>
-          <p:cNvPr id="11" name="TextBox 10"/>
-          <p:cNvSpPr txBox="1"/>
-          <p:nvPr/>
-        </p:nvSpPr>
-        <p:spPr>
-          <a:xfrm>
-            <a:off x="365760" y="6126480"/>
-            <a:ext cx="7315200" cy="274320"/>
-          </a:xfrm>
-          <a:prstGeom prst="rect">
-            <a:avLst/>
-          </a:prstGeom>
-          <a:noFill/>
-        </p:spPr>
-        <p:txBody>
-          <a:bodyPr wrap="square" anchor="t">
-            <a:spAutoFit/>
-          </a:bodyPr>
-          <a:lstStyle/>
-          <a:p>
-            <a:pPr algn="l"/>
-            <a:r>
-              <a:rPr sz="1000" b="1">
-                <a:solidFill>
-                  <a:srgbClr val="888888"/>
-                </a:solidFill>
-              </a:rPr>
-              <a:t>[ Speaker: Sparsh · ~35s ]</a:t>
+              <a:t>Can a small set of human-curated pairwise rankings improve a learned MAPF classifier beyond DDG's threshold and does the strategy used to elicit those rankings matter?</a:t>
             </a:r>
           </a:p>
         </p:txBody>
@@ -6392,7 +5604,7 @@
 </file>
 
 <file path=ppt/slides/slide4.xml><?xml version="1.0" encoding="utf-8"?>
-<p:sld xmlns:a="http://schemas.openxmlformats.org/drawingml/2006/main" xmlns:p="http://schemas.openxmlformats.org/presentationml/2006/main" xmlns:r="http://schemas.openxmlformats.org/officeDocument/2006/relationships">
+<p:sld xmlns:a="http://schemas.openxmlformats.org/drawingml/2006/main" xmlns:r="http://schemas.openxmlformats.org/officeDocument/2006/relationships" xmlns:p="http://schemas.openxmlformats.org/presentationml/2006/main">
   <p:cSld>
     <p:spTree>
       <p:nvGrpSpPr>
@@ -6400,7 +5612,14 @@
         <p:cNvGrpSpPr/>
         <p:nvPr/>
       </p:nvGrpSpPr>
-      <p:grpSpPr/>
+      <p:grpSpPr>
+        <a:xfrm>
+          <a:off x="0" y="0"/>
+          <a:ext cx="0" cy="0"/>
+          <a:chOff x="0" y="0"/>
+          <a:chExt cx="0" cy="0"/>
+        </a:xfrm>
+      </p:grpSpPr>
       <p:sp>
         <p:nvSpPr>
           <p:cNvPr id="2" name="TextBox 1"/>
@@ -6512,7 +5731,7 @@
         <p:spPr>
           <a:xfrm>
             <a:off x="1280160" y="1965960"/>
-            <a:ext cx="10424160" cy="822960"/>
+            <a:ext cx="10424160" cy="353943"/>
           </a:xfrm>
           <a:prstGeom prst="rect">
             <a:avLst/>
@@ -6527,12 +5746,28 @@
           <a:p>
             <a:pPr algn="l"/>
             <a:r>
-              <a:rPr sz="1700" b="0">
+              <a:rPr sz="1700" b="0" dirty="0">
                 <a:solidFill>
                   <a:srgbClr val="555555"/>
                 </a:solidFill>
               </a:rPr>
-              <a:t>23/52 (44%) of human-marked (worst, clean) pairs have diff(worst) ≤ diff(clean) — the auto pair points the wrong way.</a:t>
+              <a:t>23/52 (44%) of human-marked (worst, clean) pairs have diff(worst) ≤ diff(clean)</a:t>
+            </a:r>
+            <a:r>
+              <a:rPr lang="en-US" sz="1700" dirty="0">
+                <a:solidFill>
+                  <a:srgbClr val="555555"/>
+                </a:solidFill>
+              </a:rPr>
+              <a:t>:</a:t>
+            </a:r>
+            <a:r>
+              <a:rPr sz="1700" b="0" dirty="0">
+                <a:solidFill>
+                  <a:srgbClr val="555555"/>
+                </a:solidFill>
+              </a:rPr>
+              <a:t> the auto pair points the wrong way.</a:t>
             </a:r>
           </a:p>
         </p:txBody>
@@ -6614,7 +5849,7 @@
         <p:spPr>
           <a:xfrm>
             <a:off x="1280160" y="3520440"/>
-            <a:ext cx="10424160" cy="822960"/>
+            <a:ext cx="10424160" cy="353943"/>
           </a:xfrm>
           <a:prstGeom prst="rect">
             <a:avLst/>
@@ -6629,13 +5864,26 @@
           <a:p>
             <a:pPr algn="l"/>
             <a:r>
-              <a:rPr sz="1700" b="0">
+              <a:rPr sz="1700" b="0" dirty="0">
                 <a:solidFill>
                   <a:srgbClr val="555555"/>
                 </a:solidFill>
               </a:rPr>
-              <a:t>Appending human pairs alongside the contradicting auto twins makes them point in opposite directions — net signal lost.</a:t>
-            </a:r>
+              <a:t>Appending human pairs alongside the contradicting auto twins makes them point in opposite directions</a:t>
+            </a:r>
+            <a:r>
+              <a:rPr lang="en-US" sz="1700" b="0" dirty="0">
+                <a:solidFill>
+                  <a:srgbClr val="555555"/>
+                </a:solidFill>
+              </a:rPr>
+              <a:t>, nullifying.</a:t>
+            </a:r>
+            <a:endParaRPr sz="1700" b="0" dirty="0">
+              <a:solidFill>
+                <a:srgbClr val="555555"/>
+              </a:solidFill>
+            </a:endParaRPr>
           </a:p>
         </p:txBody>
       </p:sp>
@@ -6716,7 +5964,7 @@
         <p:spPr>
           <a:xfrm>
             <a:off x="1280160" y="5074920"/>
-            <a:ext cx="10424160" cy="822960"/>
+            <a:ext cx="10424160" cy="615553"/>
           </a:xfrm>
           <a:prstGeom prst="rect">
             <a:avLst/>
@@ -6731,46 +5979,44 @@
           <a:p>
             <a:pPr algn="l"/>
             <a:r>
-              <a:rPr sz="1700" b="0">
+              <a:rPr sz="1700" b="0" dirty="0">
                 <a:solidFill>
                   <a:srgbClr val="555555"/>
                 </a:solidFill>
               </a:rPr>
-              <a:t>≈5 min/episode × 56 budget ≈ 5 hours of human attention. Every annotation has to count — selection strategy itself is part of the problem.</a:t>
-            </a:r>
-          </a:p>
-        </p:txBody>
-      </p:sp>
-      <p:sp>
-        <p:nvSpPr>
-          <p:cNvPr id="12" name="TextBox 11"/>
-          <p:cNvSpPr txBox="1"/>
-          <p:nvPr/>
-        </p:nvSpPr>
-        <p:spPr>
-          <a:xfrm>
-            <a:off x="365760" y="6126480"/>
-            <a:ext cx="7315200" cy="274320"/>
-          </a:xfrm>
-          <a:prstGeom prst="rect">
-            <a:avLst/>
-          </a:prstGeom>
-          <a:noFill/>
-        </p:spPr>
-        <p:txBody>
-          <a:bodyPr wrap="square" anchor="t">
-            <a:spAutoFit/>
-          </a:bodyPr>
-          <a:lstStyle/>
-          <a:p>
-            <a:pPr algn="l"/>
-            <a:r>
-              <a:rPr sz="1000" b="1">
-                <a:solidFill>
-                  <a:srgbClr val="888888"/>
-                </a:solidFill>
-              </a:rPr>
-              <a:t>[ Speaker: Shane · ~30s ]</a:t>
+              <a:t>≈5 min/episode × 56 budget ≈ 5 hours of human attention. Every annotation </a:t>
+            </a:r>
+            <a:r>
+              <a:rPr lang="en-US" sz="1700" b="0" dirty="0">
+                <a:solidFill>
+                  <a:srgbClr val="555555"/>
+                </a:solidFill>
+              </a:rPr>
+              <a:t>must</a:t>
+            </a:r>
+            <a:r>
+              <a:rPr sz="1700" b="0" dirty="0">
+                <a:solidFill>
+                  <a:srgbClr val="555555"/>
+                </a:solidFill>
+              </a:rPr>
+              <a:t> </a:t>
+            </a:r>
+            <a:r>
+              <a:rPr lang="en-US" sz="1700" b="0" dirty="0">
+                <a:solidFill>
+                  <a:srgbClr val="555555"/>
+                </a:solidFill>
+              </a:rPr>
+              <a:t>count, so</a:t>
+            </a:r>
+            <a:r>
+              <a:rPr sz="1700" b="0" dirty="0">
+                <a:solidFill>
+                  <a:srgbClr val="555555"/>
+                </a:solidFill>
+              </a:rPr>
+              <a:t> selection strategy itself is part of the problem.</a:t>
             </a:r>
           </a:p>
         </p:txBody>
@@ -6852,7 +6098,7 @@
 </file>
 
 <file path=ppt/slides/slide5.xml><?xml version="1.0" encoding="utf-8"?>
-<p:sld xmlns:a="http://schemas.openxmlformats.org/drawingml/2006/main" xmlns:p="http://schemas.openxmlformats.org/presentationml/2006/main" xmlns:r="http://schemas.openxmlformats.org/officeDocument/2006/relationships">
+<p:sld xmlns:a="http://schemas.openxmlformats.org/drawingml/2006/main" xmlns:r="http://schemas.openxmlformats.org/officeDocument/2006/relationships" xmlns:p="http://schemas.openxmlformats.org/presentationml/2006/main">
   <p:cSld>
     <p:spTree>
       <p:nvGrpSpPr>
@@ -6860,7 +6106,14 @@
         <p:cNvGrpSpPr/>
         <p:nvPr/>
       </p:nvGrpSpPr>
-      <p:grpSpPr/>
+      <p:grpSpPr>
+        <a:xfrm>
+          <a:off x="0" y="0"/>
+          <a:ext cx="0" cy="0"/>
+          <a:chOff x="0" y="0"/>
+          <a:chExt cx="0" cy="0"/>
+        </a:xfrm>
+      </p:grpSpPr>
       <p:sp>
         <p:nvSpPr>
           <p:cNvPr id="2" name="TextBox 1"/>
@@ -6904,7 +6157,7 @@
         <p:spPr>
           <a:xfrm>
             <a:off x="548640" y="1280160"/>
-            <a:ext cx="5669280" cy="2011680"/>
+            <a:ext cx="5669280" cy="1630062"/>
           </a:xfrm>
           <a:prstGeom prst="rect">
             <a:avLst/>
@@ -6917,22 +6170,14 @@
           </a:ln>
         </p:spPr>
         <p:txBody>
-          <a:bodyPr wrap="square" anchor="t" lIns="182880" rIns="182880" tIns="137160">
+          <a:bodyPr wrap="square" lIns="182880" tIns="137160" rIns="182880" anchor="t">
             <a:spAutoFit/>
           </a:bodyPr>
           <a:lstStyle/>
           <a:p>
             <a:pPr algn="l"/>
             <a:r>
-              <a:rPr sz="1400" b="0">
-                <a:solidFill>
-                  <a:srgbClr val="2A2A2A"/>
-                </a:solidFill>
-              </a:rPr>
-              <a:t/>
-            </a:r>
-            <a:r>
-              <a:rPr sz="1300" b="1">
+              <a:rPr sz="1300" b="1" dirty="0">
                 <a:solidFill>
                   <a:srgbClr val="C0392B"/>
                 </a:solidFill>
@@ -6947,12 +6192,28 @@
               </a:lnSpc>
             </a:pPr>
             <a:r>
-              <a:rPr sz="2000" b="1">
+              <a:rPr sz="2000" b="1" dirty="0">
                 <a:solidFill>
                   <a:srgbClr val="1F2E55"/>
                 </a:solidFill>
               </a:rPr>
-              <a:t>Override, don't augment.</a:t>
+              <a:t>Override</a:t>
+            </a:r>
+            <a:r>
+              <a:rPr lang="en-US" sz="2000" b="1" dirty="0">
+                <a:solidFill>
+                  <a:srgbClr val="1F2E55"/>
+                </a:solidFill>
+              </a:rPr>
+              <a:t> except</a:t>
+            </a:r>
+            <a:r>
+              <a:rPr sz="2000" b="1" dirty="0">
+                <a:solidFill>
+                  <a:srgbClr val="1F2E55"/>
+                </a:solidFill>
+              </a:rPr>
+              <a:t> augment</a:t>
             </a:r>
           </a:p>
           <a:p>
@@ -6962,12 +6223,28 @@
               </a:lnSpc>
             </a:pPr>
             <a:r>
-              <a:rPr sz="1500">
+              <a:rPr sz="1500" dirty="0">
                 <a:solidFill>
                   <a:srgbClr val="2A2A2A"/>
                 </a:solidFill>
               </a:rPr>
-              <a:t>For each annotated episode, replace the auto-pair list entirely with the single human pair at weight 1.0. 39 train pairs ≈ 0.15% of gradient, but placed exactly on the cases auto fits wrong.</a:t>
+              <a:t>For each annotated episode, replace the auto-pair list entirely with the single human pair at weight 1.0. 39 train pairs ≈ 0.15% of </a:t>
+            </a:r>
+            <a:r>
+              <a:rPr lang="en-US" sz="1500" dirty="0">
+                <a:solidFill>
+                  <a:srgbClr val="2A2A2A"/>
+                </a:solidFill>
+              </a:rPr>
+              <a:t>gradient but</a:t>
+            </a:r>
+            <a:r>
+              <a:rPr sz="1500" dirty="0">
+                <a:solidFill>
+                  <a:srgbClr val="2A2A2A"/>
+                </a:solidFill>
+              </a:rPr>
+              <a:t> placed exactly on the cases auto fits wrong.</a:t>
             </a:r>
           </a:p>
         </p:txBody>
@@ -6981,7 +6258,7 @@
         <p:spPr>
           <a:xfrm>
             <a:off x="6400800" y="1280160"/>
-            <a:ext cx="5212080" cy="2011680"/>
+            <a:ext cx="5212080" cy="1630062"/>
           </a:xfrm>
           <a:prstGeom prst="rect">
             <a:avLst/>
@@ -6994,22 +6271,14 @@
           </a:ln>
         </p:spPr>
         <p:txBody>
-          <a:bodyPr wrap="square" anchor="t" lIns="182880" rIns="182880" tIns="137160">
+          <a:bodyPr wrap="square" lIns="182880" tIns="137160" rIns="182880" anchor="t">
             <a:spAutoFit/>
           </a:bodyPr>
           <a:lstStyle/>
           <a:p>
             <a:pPr algn="l"/>
             <a:r>
-              <a:rPr sz="1400" b="0">
-                <a:solidFill>
-                  <a:srgbClr val="2A2A2A"/>
-                </a:solidFill>
-              </a:rPr>
-              <a:t/>
-            </a:r>
-            <a:r>
-              <a:rPr sz="1300" b="1">
+              <a:rPr sz="1300" b="1" dirty="0">
                 <a:solidFill>
                   <a:srgbClr val="C0392B"/>
                 </a:solidFill>
@@ -7024,12 +6293,12 @@
               </a:lnSpc>
             </a:pPr>
             <a:r>
-              <a:rPr sz="2000" b="1">
+              <a:rPr sz="2000" b="1" dirty="0">
                 <a:solidFill>
                   <a:srgbClr val="1F2E55"/>
                 </a:solidFill>
               </a:rPr>
-              <a:t>Strategy of elicitation matters.</a:t>
+              <a:t>Strategy of elicitation matters</a:t>
             </a:r>
           </a:p>
           <a:p>
@@ -7039,12 +6308,28 @@
               </a:lnSpc>
             </a:pPr>
             <a:r>
-              <a:rPr sz="1500">
+              <a:rPr sz="1500" dirty="0">
                 <a:solidFill>
                   <a:srgbClr val="2A2A2A"/>
                 </a:solidFill>
               </a:rPr>
-              <a:t>Compare un-prioritised hand-curation vs uncertainty × diversity active learning vs pure-diversity AL — at the same label budget.</a:t>
+              <a:t>Compare un-</a:t>
+            </a:r>
+            <a:r>
+              <a:rPr sz="1500" dirty="0" err="1">
+                <a:solidFill>
+                  <a:srgbClr val="2A2A2A"/>
+                </a:solidFill>
+              </a:rPr>
+              <a:t>prioritised</a:t>
+            </a:r>
+            <a:r>
+              <a:rPr sz="1500" dirty="0">
+                <a:solidFill>
+                  <a:srgbClr val="2A2A2A"/>
+                </a:solidFill>
+              </a:rPr>
+              <a:t> hand-curation vs uncertainty × diversity active learning vs pure-diversity AL at the same label budget.</a:t>
             </a:r>
           </a:p>
         </p:txBody>
@@ -7122,40 +6407,6 @@
       </p:sp>
       <p:sp>
         <p:nvSpPr>
-          <p:cNvPr id="7" name="TextBox 6"/>
-          <p:cNvSpPr txBox="1"/>
-          <p:nvPr/>
-        </p:nvSpPr>
-        <p:spPr>
-          <a:xfrm>
-            <a:off x="365760" y="6126480"/>
-            <a:ext cx="7315200" cy="274320"/>
-          </a:xfrm>
-          <a:prstGeom prst="rect">
-            <a:avLst/>
-          </a:prstGeom>
-          <a:noFill/>
-        </p:spPr>
-        <p:txBody>
-          <a:bodyPr wrap="square" anchor="t">
-            <a:spAutoFit/>
-          </a:bodyPr>
-          <a:lstStyle/>
-          <a:p>
-            <a:pPr algn="l"/>
-            <a:r>
-              <a:rPr sz="1000" b="1">
-                <a:solidFill>
-                  <a:srgbClr val="888888"/>
-                </a:solidFill>
-              </a:rPr>
-              <a:t>[ Speaker: Shane · ~35s ]</a:t>
-            </a:r>
-          </a:p>
-        </p:txBody>
-      </p:sp>
-      <p:sp>
-        <p:nvSpPr>
           <p:cNvPr id="8" name="TextBox 7"/>
           <p:cNvSpPr txBox="1"/>
           <p:nvPr/>
@@ -7231,7 +6482,7 @@
 </file>
 
 <file path=ppt/slides/slide6.xml><?xml version="1.0" encoding="utf-8"?>
-<p:sld xmlns:a="http://schemas.openxmlformats.org/drawingml/2006/main" xmlns:p="http://schemas.openxmlformats.org/presentationml/2006/main" xmlns:r="http://schemas.openxmlformats.org/officeDocument/2006/relationships">
+<p:sld xmlns:a="http://schemas.openxmlformats.org/drawingml/2006/main" xmlns:r="http://schemas.openxmlformats.org/officeDocument/2006/relationships" xmlns:p="http://schemas.openxmlformats.org/presentationml/2006/main">
   <p:cSld>
     <p:spTree>
       <p:nvGrpSpPr>
@@ -7239,7 +6490,14 @@
         <p:cNvGrpSpPr/>
         <p:nvPr/>
       </p:nvGrpSpPr>
-      <p:grpSpPr/>
+      <p:grpSpPr>
+        <a:xfrm>
+          <a:off x="0" y="0"/>
+          <a:ext cx="0" cy="0"/>
+          <a:chOff x="0" y="0"/>
+          <a:chExt cx="0" cy="0"/>
+        </a:xfrm>
+      </p:grpSpPr>
       <p:sp>
         <p:nvSpPr>
           <p:cNvPr id="2" name="TextBox 1"/>
@@ -7264,7 +6522,7 @@
           <a:p>
             <a:pPr algn="l"/>
             <a:r>
-              <a:rPr sz="3000" b="1">
+              <a:rPr sz="3000" b="1" dirty="0">
                 <a:solidFill>
                   <a:srgbClr val="1F2E55"/>
                 </a:solidFill>
@@ -7298,7 +6556,7 @@
           <a:p>
             <a:pPr algn="l"/>
             <a:r>
-              <a:rPr sz="1500" b="1">
+              <a:rPr sz="1500" b="1" dirty="0">
                 <a:solidFill>
                   <a:srgbClr val="555555"/>
                 </a:solidFill>
@@ -7318,7 +6576,7 @@
         </p:nvGraphicFramePr>
         <p:xfrm>
           <a:off x="548640" y="1554480"/>
-          <a:ext cx="6858000" cy="2377440"/>
+          <a:ext cx="6858000" cy="2548128"/>
         </p:xfrm>
         <a:graphic>
           <a:graphicData uri="http://schemas.openxmlformats.org/drawingml/2006/table">
@@ -7327,10 +6585,34 @@
                 <a:tableStyleId>{5C22544A-7EE6-4342-B048-85BDC9FD1C3A}</a:tableStyleId>
               </a:tblPr>
               <a:tblGrid>
-                <a:gridCol w="1714500"/>
-                <a:gridCol w="1714500"/>
-                <a:gridCol w="1714500"/>
-                <a:gridCol w="1714500"/>
+                <a:gridCol w="1714500">
+                  <a:extLst>
+                    <a:ext uri="{9D8B030D-6E8A-4147-A177-3AD203B41FA5}">
+                      <a16:colId xmlns:a16="http://schemas.microsoft.com/office/drawing/2014/main" val="20000"/>
+                    </a:ext>
+                  </a:extLst>
+                </a:gridCol>
+                <a:gridCol w="1714500">
+                  <a:extLst>
+                    <a:ext uri="{9D8B030D-6E8A-4147-A177-3AD203B41FA5}">
+                      <a16:colId xmlns:a16="http://schemas.microsoft.com/office/drawing/2014/main" val="20001"/>
+                    </a:ext>
+                  </a:extLst>
+                </a:gridCol>
+                <a:gridCol w="1714500">
+                  <a:extLst>
+                    <a:ext uri="{9D8B030D-6E8A-4147-A177-3AD203B41FA5}">
+                      <a16:colId xmlns:a16="http://schemas.microsoft.com/office/drawing/2014/main" val="20002"/>
+                    </a:ext>
+                  </a:extLst>
+                </a:gridCol>
+                <a:gridCol w="1714500">
+                  <a:extLst>
+                    <a:ext uri="{9D8B030D-6E8A-4147-A177-3AD203B41FA5}">
+                      <a16:colId xmlns:a16="http://schemas.microsoft.com/office/drawing/2014/main" val="20003"/>
+                    </a:ext>
+                  </a:extLst>
+                </a:gridCol>
               </a:tblGrid>
               <a:tr h="475488">
                 <a:tc>
@@ -7421,6 +6703,11 @@
                     </a:solidFill>
                   </a:tcPr>
                 </a:tc>
+                <a:extLst>
+                  <a:ext uri="{0D108BD9-81ED-4DB2-BD59-A6C34878D82A}">
+                    <a16:rowId xmlns:a16="http://schemas.microsoft.com/office/drawing/2014/main" val="10000"/>
+                  </a:ext>
+                </a:extLst>
               </a:tr>
               <a:tr h="475488">
                 <a:tc>
@@ -7511,6 +6798,11 @@
                     </a:solidFill>
                   </a:tcPr>
                 </a:tc>
+                <a:extLst>
+                  <a:ext uri="{0D108BD9-81ED-4DB2-BD59-A6C34878D82A}">
+                    <a16:rowId xmlns:a16="http://schemas.microsoft.com/office/drawing/2014/main" val="10001"/>
+                  </a:ext>
+                </a:extLst>
               </a:tr>
               <a:tr h="475488">
                 <a:tc>
@@ -7601,6 +6893,11 @@
                     </a:solidFill>
                   </a:tcPr>
                 </a:tc>
+                <a:extLst>
+                  <a:ext uri="{0D108BD9-81ED-4DB2-BD59-A6C34878D82A}">
+                    <a16:rowId xmlns:a16="http://schemas.microsoft.com/office/drawing/2014/main" val="10002"/>
+                  </a:ext>
+                </a:extLst>
               </a:tr>
               <a:tr h="475488">
                 <a:tc>
@@ -7691,6 +6988,11 @@
                     </a:solidFill>
                   </a:tcPr>
                 </a:tc>
+                <a:extLst>
+                  <a:ext uri="{0D108BD9-81ED-4DB2-BD59-A6C34878D82A}">
+                    <a16:rowId xmlns:a16="http://schemas.microsoft.com/office/drawing/2014/main" val="10003"/>
+                  </a:ext>
+                </a:extLst>
               </a:tr>
               <a:tr h="475488">
                 <a:tc>
@@ -7781,35 +7083,16 @@
                     </a:solidFill>
                   </a:tcPr>
                 </a:tc>
+                <a:extLst>
+                  <a:ext uri="{0D108BD9-81ED-4DB2-BD59-A6C34878D82A}">
+                    <a16:rowId xmlns:a16="http://schemas.microsoft.com/office/drawing/2014/main" val="10004"/>
+                  </a:ext>
+                </a:extLst>
               </a:tr>
             </a:tbl>
           </a:graphicData>
         </a:graphic>
       </p:graphicFrame>
-      <p:pic>
-        <p:nvPicPr>
-          <p:cNvPr id="5" name="Picture 4" descr="comparison_2.png"/>
-          <p:cNvPicPr>
-            <a:picLocks noChangeAspect="1"/>
-          </p:cNvPicPr>
-          <p:nvPr/>
-        </p:nvPicPr>
-        <p:blipFill>
-          <a:blip r:embed="rId2"/>
-          <a:stretch>
-            <a:fillRect/>
-          </a:stretch>
-        </p:blipFill>
-        <p:spPr>
-          <a:xfrm>
-            <a:off x="7589520" y="1554480"/>
-            <a:ext cx="4297680" cy="936366"/>
-          </a:xfrm>
-          <a:prstGeom prst="rect">
-            <a:avLst/>
-          </a:prstGeom>
-        </p:spPr>
-      </p:pic>
       <p:sp>
         <p:nvSpPr>
           <p:cNvPr id="6" name="TextBox 5"/>
@@ -7834,7 +7117,7 @@
           <a:p>
             <a:pPr algn="l"/>
             <a:r>
-              <a:rPr sz="1500" b="1">
+              <a:rPr sz="1500" b="1" dirty="0">
                 <a:solidFill>
                   <a:srgbClr val="C0392B"/>
                 </a:solidFill>
@@ -7853,7 +7136,7 @@
         <p:spPr>
           <a:xfrm>
             <a:off x="548640" y="4572000"/>
-            <a:ext cx="11064240" cy="1554480"/>
+            <a:ext cx="11064240" cy="1105431"/>
           </a:xfrm>
           <a:prstGeom prst="rect">
             <a:avLst/>
@@ -7872,7 +7155,7 @@
               </a:lnSpc>
             </a:pPr>
             <a:r>
-              <a:rPr sz="1800">
+              <a:rPr sz="1800" dirty="0">
                 <a:solidFill>
                   <a:srgbClr val="2A2A2A"/>
                 </a:solidFill>
@@ -7880,7 +7163,7 @@
               <a:t>• </a:t>
             </a:r>
             <a:r>
-              <a:rPr sz="1800" b="1">
+              <a:rPr sz="1800" b="1" dirty="0">
                 <a:solidFill>
                   <a:srgbClr val="C0392B"/>
                 </a:solidFill>
@@ -7888,7 +7171,7 @@
               <a:t>+3 of 13 pairs</a:t>
             </a:r>
             <a:r>
-              <a:rPr sz="1800" b="0">
+              <a:rPr sz="1800" b="0" dirty="0">
                 <a:solidFill>
                   <a:srgbClr val="2A2A2A"/>
                 </a:solidFill>
@@ -7896,7 +7179,7 @@
               <a:t> ranked correctly · </a:t>
             </a:r>
             <a:r>
-              <a:rPr sz="1800" b="1">
+              <a:rPr sz="1800" b="1" dirty="0">
                 <a:solidFill>
                   <a:srgbClr val="C0392B"/>
                 </a:solidFill>
@@ -7904,7 +7187,7 @@
               <a:t>+1 of 13</a:t>
             </a:r>
             <a:r>
-              <a:rPr sz="1800" b="0">
+              <a:rPr sz="1800" b="0" dirty="0">
                 <a:solidFill>
                   <a:srgbClr val="2A2A2A"/>
                 </a:solidFill>
@@ -7919,7 +7202,7 @@
               </a:lnSpc>
             </a:pPr>
             <a:r>
-              <a:rPr sz="1800">
+              <a:rPr sz="1800" dirty="0">
                 <a:solidFill>
                   <a:srgbClr val="2A2A2A"/>
                 </a:solidFill>
@@ -7927,23 +7210,44 @@
               <a:t>• </a:t>
             </a:r>
             <a:r>
-              <a:rPr sz="1800" b="1">
+              <a:rPr sz="1800" b="1" dirty="0">
                 <a:solidFill>
                   <a:srgbClr val="2A2A2A"/>
                 </a:solidFill>
-                <a:highlight>
-                  <a:srgbClr val="FFFBCC"/>
-                </a:highlight>
               </a:rPr>
               <a:t>No measurable cost</a:t>
             </a:r>
             <a:r>
+              <a:rPr sz="1800" b="0" dirty="0">
+                <a:solidFill>
+                  <a:srgbClr val="2A2A2A"/>
+                </a:solidFill>
+              </a:rPr>
+              <a:t> on </a:t>
+            </a:r>
+            <a:r>
               <a:rPr sz="1800" b="0">
                 <a:solidFill>
                   <a:srgbClr val="2A2A2A"/>
                 </a:solidFill>
               </a:rPr>
-              <a:t> on auto-aligned ranking — both DDG metrics within 2 points.</a:t>
+              <a:t>auto-aligned ranking </a:t>
+            </a:r>
+            <a:r>
+              <a:rPr lang="en-US" sz="1800" b="0" dirty="0">
+                <a:solidFill>
+                  <a:srgbClr val="2A2A2A"/>
+                </a:solidFill>
+              </a:rPr>
+              <a:t>both DDG</a:t>
+            </a:r>
+            <a:r>
+              <a:rPr sz="1800" b="0" dirty="0">
+                <a:solidFill>
+                  <a:srgbClr val="2A2A2A"/>
+                </a:solidFill>
+              </a:rPr>
+              <a:t> metrics within 2 points.</a:t>
             </a:r>
           </a:p>
           <a:p>
@@ -7953,7 +7257,7 @@
               </a:lnSpc>
             </a:pPr>
             <a:r>
-              <a:rPr sz="1800">
+              <a:rPr sz="1800" dirty="0">
                 <a:solidFill>
                   <a:srgbClr val="2A2A2A"/>
                 </a:solidFill>
@@ -7961,7 +7265,7 @@
               <a:t>• </a:t>
             </a:r>
             <a:r>
-              <a:rPr sz="1800" b="0">
+              <a:rPr sz="1800" b="0" dirty="0">
                 <a:solidFill>
                   <a:srgbClr val="2A2A2A"/>
                 </a:solidFill>
@@ -7969,7 +7273,7 @@
               <a:t>Deployment-ready checkpoint: </a:t>
             </a:r>
             <a:r>
-              <a:rPr sz="1600" b="1">
+              <a:rPr sz="1600" b="1" dirty="0">
                 <a:solidFill>
                   <a:srgbClr val="1F2E55"/>
                 </a:solidFill>
@@ -7977,46 +7281,12 @@
               <a:t>with_human_labels.human_argmax_top1.pt</a:t>
             </a:r>
             <a:r>
-              <a:rPr sz="1800" b="0">
+              <a:rPr sz="1800" b="0" dirty="0">
                 <a:solidFill>
                   <a:srgbClr val="2A2A2A"/>
                 </a:solidFill>
               </a:rPr>
               <a:t> (best across all 4 save criteria).</a:t>
-            </a:r>
-          </a:p>
-        </p:txBody>
-      </p:sp>
-      <p:sp>
-        <p:nvSpPr>
-          <p:cNvPr id="8" name="TextBox 7"/>
-          <p:cNvSpPr txBox="1"/>
-          <p:nvPr/>
-        </p:nvSpPr>
-        <p:spPr>
-          <a:xfrm>
-            <a:off x="365760" y="6126480"/>
-            <a:ext cx="7315200" cy="274320"/>
-          </a:xfrm>
-          <a:prstGeom prst="rect">
-            <a:avLst/>
-          </a:prstGeom>
-          <a:noFill/>
-        </p:spPr>
-        <p:txBody>
-          <a:bodyPr wrap="square" anchor="t">
-            <a:spAutoFit/>
-          </a:bodyPr>
-          <a:lstStyle/>
-          <a:p>
-            <a:pPr algn="l"/>
-            <a:r>
-              <a:rPr sz="1000" b="1">
-                <a:solidFill>
-                  <a:srgbClr val="888888"/>
-                </a:solidFill>
-              </a:rPr>
-              <a:t>[ Speaker: Isabel · ~45s ]</a:t>
             </a:r>
           </a:p>
         </p:txBody>
@@ -8098,7 +7368,7 @@
 </file>
 
 <file path=ppt/slides/slide7.xml><?xml version="1.0" encoding="utf-8"?>
-<p:sld xmlns:a="http://schemas.openxmlformats.org/drawingml/2006/main" xmlns:p="http://schemas.openxmlformats.org/presentationml/2006/main" xmlns:r="http://schemas.openxmlformats.org/officeDocument/2006/relationships">
+<p:sld xmlns:a="http://schemas.openxmlformats.org/drawingml/2006/main" xmlns:r="http://schemas.openxmlformats.org/officeDocument/2006/relationships" xmlns:p="http://schemas.openxmlformats.org/presentationml/2006/main">
   <p:cSld>
     <p:spTree>
       <p:nvGrpSpPr>
@@ -8106,17 +7376,96 @@
         <p:cNvGrpSpPr/>
         <p:nvPr/>
       </p:nvGrpSpPr>
-      <p:grpSpPr/>
-      <p:sp>
-        <p:nvSpPr>
-          <p:cNvPr id="2" name="TextBox 1"/>
+      <p:grpSpPr>
+        <a:xfrm>
+          <a:off x="0" y="0"/>
+          <a:ext cx="0" cy="0"/>
+          <a:chOff x="0" y="0"/>
+          <a:chExt cx="0" cy="0"/>
+        </a:xfrm>
+      </p:grpSpPr>
+      <p:graphicFrame>
+        <p:nvGraphicFramePr>
+          <p:cNvPr id="3" name="think-cell data - do not delete" hidden="1">
+            <a:extLst>
+              <a:ext uri="{FF2B5EF4-FFF2-40B4-BE49-F238E27FC236}">
+                <a16:creationId xmlns:a16="http://schemas.microsoft.com/office/drawing/2014/main" id="{143D7C21-76FB-1EFC-8346-D375F0D57F58}"/>
+              </a:ext>
+            </a:extLst>
+          </p:cNvPr>
+          <p:cNvGraphicFramePr>
+            <a:graphicFrameLocks/>
+          </p:cNvGraphicFramePr>
+          <p:nvPr>
+            <p:custDataLst>
+              <p:tags r:id="rId1"/>
+            </p:custDataLst>
+            <p:extLst>
+              <p:ext uri="{D42A27DB-BD31-4B8C-83A1-F6EECF244321}">
+                <p14:modId xmlns:p14="http://schemas.microsoft.com/office/powerpoint/2010/main" val="1453799386"/>
+              </p:ext>
+            </p:extLst>
+          </p:nvPr>
+        </p:nvGraphicFramePr>
+        <p:xfrm>
+          <a:off x="1588" y="1588"/>
+          <a:ext cx="1227" cy="1588"/>
+        </p:xfrm>
+        <a:graphic>
+          <a:graphicData uri="http://schemas.openxmlformats.org/presentationml/2006/ole">
+            <mc:AlternateContent xmlns:mc="http://schemas.openxmlformats.org/markup-compatibility/2006">
+              <mc:Choice xmlns:v="urn:schemas-microsoft-com:vml" Requires="v">
+                <p:oleObj name="think-cell Slide" r:id="rId3" imgW="7772400" imgH="10058400" progId="TCLayout.ActiveDocument.1">
+                  <p:embed/>
+                </p:oleObj>
+              </mc:Choice>
+              <mc:Fallback>
+                <p:oleObj name="think-cell Slide" r:id="rId3" imgW="7772400" imgH="10058400" progId="TCLayout.ActiveDocument.1">
+                  <p:embed/>
+                  <p:pic>
+                    <p:nvPicPr>
+                      <p:cNvPr id="0" name=""/>
+                      <p:cNvPicPr/>
+                      <p:nvPr/>
+                    </p:nvPicPr>
+                    <p:blipFill>
+                      <a:blip r:embed="rId4"/>
+                      <a:stretch>
+                        <a:fillRect/>
+                      </a:stretch>
+                    </p:blipFill>
+                    <p:spPr>
+                      <a:xfrm>
+                        <a:off x="1588" y="1588"/>
+                        <a:ext cx="1227" cy="1588"/>
+                      </a:xfrm>
+                      <a:prstGeom prst="rect">
+                        <a:avLst/>
+                      </a:prstGeom>
+                    </p:spPr>
+                  </p:pic>
+                </p:oleObj>
+              </mc:Fallback>
+            </mc:AlternateContent>
+          </a:graphicData>
+        </a:graphic>
+      </p:graphicFrame>
+      <p:sp>
+        <p:nvSpPr>
+          <p:cNvPr id="10" name="TextBox 9">
+            <a:extLst>
+              <a:ext uri="{FF2B5EF4-FFF2-40B4-BE49-F238E27FC236}">
+                <a16:creationId xmlns:a16="http://schemas.microsoft.com/office/drawing/2014/main" id="{65D5E117-B642-C392-CCE2-6B4A61C967FC}"/>
+              </a:ext>
+            </a:extLst>
+          </p:cNvPr>
           <p:cNvSpPr txBox="1"/>
           <p:nvPr/>
         </p:nvSpPr>
         <p:spPr>
           <a:xfrm>
             <a:off x="548640" y="365760"/>
-            <a:ext cx="10972800" cy="640080"/>
+            <a:ext cx="10972800" cy="553998"/>
           </a:xfrm>
           <a:prstGeom prst="rect">
             <a:avLst/>
@@ -8131,26 +7480,61 @@
           <a:p>
             <a:pPr algn="l"/>
             <a:r>
-              <a:rPr sz="2800" b="1">
+              <a:rPr lang="en-US" sz="3000" b="1" dirty="0">
                 <a:solidFill>
                   <a:srgbClr val="1F2E55"/>
                 </a:solidFill>
               </a:rPr>
-              <a:t>Active-learning extension — strategy comparison</a:t>
-            </a:r>
-          </a:p>
-        </p:txBody>
-      </p:sp>
-      <p:sp>
-        <p:nvSpPr>
-          <p:cNvPr id="3" name="TextBox 2"/>
+              <a:t>Add SVGs</a:t>
+            </a:r>
+            <a:endParaRPr sz="3000" b="1" dirty="0">
+              <a:solidFill>
+                <a:srgbClr val="1F2E55"/>
+              </a:solidFill>
+            </a:endParaRPr>
+          </a:p>
+        </p:txBody>
+      </p:sp>
+    </p:spTree>
+    <p:extLst>
+      <p:ext uri="{BB962C8B-B14F-4D97-AF65-F5344CB8AC3E}">
+        <p14:creationId xmlns:p14="http://schemas.microsoft.com/office/powerpoint/2010/main" val="4042011954"/>
+      </p:ext>
+    </p:extLst>
+  </p:cSld>
+  <p:clrMapOvr>
+    <a:masterClrMapping/>
+  </p:clrMapOvr>
+</p:sld>
+</file>
+
+<file path=ppt/slides/slide8.xml><?xml version="1.0" encoding="utf-8"?>
+<p:sld xmlns:a="http://schemas.openxmlformats.org/drawingml/2006/main" xmlns:r="http://schemas.openxmlformats.org/officeDocument/2006/relationships" xmlns:p="http://schemas.openxmlformats.org/presentationml/2006/main">
+  <p:cSld>
+    <p:spTree>
+      <p:nvGrpSpPr>
+        <p:cNvPr id="1" name=""/>
+        <p:cNvGrpSpPr/>
+        <p:nvPr/>
+      </p:nvGrpSpPr>
+      <p:grpSpPr>
+        <a:xfrm>
+          <a:off x="0" y="0"/>
+          <a:ext cx="0" cy="0"/>
+          <a:chOff x="0" y="0"/>
+          <a:chExt cx="0" cy="0"/>
+        </a:xfrm>
+      </p:grpSpPr>
+      <p:sp>
+        <p:nvSpPr>
+          <p:cNvPr id="2" name="TextBox 1"/>
           <p:cNvSpPr txBox="1"/>
           <p:nvPr/>
         </p:nvSpPr>
         <p:spPr>
           <a:xfrm>
-            <a:off x="548640" y="1051560"/>
-            <a:ext cx="11064240" cy="365760"/>
+            <a:off x="548640" y="365760"/>
+            <a:ext cx="10972800" cy="523220"/>
           </a:xfrm>
           <a:prstGeom prst="rect">
             <a:avLst/>
@@ -8165,12 +7549,75 @@
           <a:p>
             <a:pPr algn="l"/>
             <a:r>
-              <a:rPr sz="1400" b="0">
+              <a:rPr sz="2800" b="1" dirty="0">
+                <a:solidFill>
+                  <a:srgbClr val="1F2E55"/>
+                </a:solidFill>
+              </a:rPr>
+              <a:t>Active-learning exte</a:t>
+            </a:r>
+            <a:r>
+              <a:rPr lang="en-US" sz="2800" b="1" dirty="0">
+                <a:solidFill>
+                  <a:srgbClr val="1F2E55"/>
+                </a:solidFill>
+              </a:rPr>
+              <a:t>nsion</a:t>
+            </a:r>
+            <a:endParaRPr sz="2800" b="1" dirty="0">
+              <a:solidFill>
+                <a:srgbClr val="1F2E55"/>
+              </a:solidFill>
+            </a:endParaRPr>
+          </a:p>
+        </p:txBody>
+      </p:sp>
+      <p:sp>
+        <p:nvSpPr>
+          <p:cNvPr id="3" name="TextBox 2"/>
+          <p:cNvSpPr txBox="1"/>
+          <p:nvPr/>
+        </p:nvSpPr>
+        <p:spPr>
+          <a:xfrm>
+            <a:off x="548640" y="1051560"/>
+            <a:ext cx="11064240" cy="307777"/>
+          </a:xfrm>
+          <a:prstGeom prst="rect">
+            <a:avLst/>
+          </a:prstGeom>
+          <a:noFill/>
+        </p:spPr>
+        <p:txBody>
+          <a:bodyPr wrap="square" anchor="t">
+            <a:spAutoFit/>
+          </a:bodyPr>
+          <a:lstStyle/>
+          <a:p>
+            <a:pPr algn="l"/>
+            <a:r>
+              <a:rPr sz="1400" b="0" dirty="0">
                 <a:solidFill>
                   <a:srgbClr val="555555"/>
                 </a:solidFill>
               </a:rPr>
-              <a:t>Same trainer, same data, same ~56-label budget — only the acquisition strategy differs.</a:t>
+              <a:t>Same trainer, same data, same ~56-label budget</a:t>
+            </a:r>
+            <a:r>
+              <a:rPr lang="en-US" sz="1400" b="0" dirty="0">
+                <a:solidFill>
+                  <a:srgbClr val="555555"/>
+                </a:solidFill>
+              </a:rPr>
+              <a:t>:</a:t>
+            </a:r>
+            <a:r>
+              <a:rPr sz="1400" b="0" dirty="0">
+                <a:solidFill>
+                  <a:srgbClr val="555555"/>
+                </a:solidFill>
+              </a:rPr>
+              <a:t> only the acquisition strategy differs.</a:t>
             </a:r>
           </a:p>
         </p:txBody>
@@ -8185,7 +7632,7 @@
         </p:nvGraphicFramePr>
         <p:xfrm>
           <a:off x="548640" y="1554480"/>
-          <a:ext cx="11064240" cy="2743200"/>
+          <a:ext cx="11064240" cy="2857500"/>
         </p:xfrm>
         <a:graphic>
           <a:graphicData uri="http://schemas.openxmlformats.org/drawingml/2006/table">
@@ -8194,11 +7641,41 @@
                 <a:tableStyleId>{5C22544A-7EE6-4342-B048-85BDC9FD1C3A}</a:tableStyleId>
               </a:tblPr>
               <a:tblGrid>
-                <a:gridCol w="2212848"/>
-                <a:gridCol w="2212848"/>
-                <a:gridCol w="2212848"/>
-                <a:gridCol w="2212848"/>
-                <a:gridCol w="2212848"/>
+                <a:gridCol w="2212848">
+                  <a:extLst>
+                    <a:ext uri="{9D8B030D-6E8A-4147-A177-3AD203B41FA5}">
+                      <a16:colId xmlns:a16="http://schemas.microsoft.com/office/drawing/2014/main" val="20000"/>
+                    </a:ext>
+                  </a:extLst>
+                </a:gridCol>
+                <a:gridCol w="2212848">
+                  <a:extLst>
+                    <a:ext uri="{9D8B030D-6E8A-4147-A177-3AD203B41FA5}">
+                      <a16:colId xmlns:a16="http://schemas.microsoft.com/office/drawing/2014/main" val="20001"/>
+                    </a:ext>
+                  </a:extLst>
+                </a:gridCol>
+                <a:gridCol w="2212848">
+                  <a:extLst>
+                    <a:ext uri="{9D8B030D-6E8A-4147-A177-3AD203B41FA5}">
+                      <a16:colId xmlns:a16="http://schemas.microsoft.com/office/drawing/2014/main" val="20002"/>
+                    </a:ext>
+                  </a:extLst>
+                </a:gridCol>
+                <a:gridCol w="2212848">
+                  <a:extLst>
+                    <a:ext uri="{9D8B030D-6E8A-4147-A177-3AD203B41FA5}">
+                      <a16:colId xmlns:a16="http://schemas.microsoft.com/office/drawing/2014/main" val="20003"/>
+                    </a:ext>
+                  </a:extLst>
+                </a:gridCol>
+                <a:gridCol w="2212848">
+                  <a:extLst>
+                    <a:ext uri="{9D8B030D-6E8A-4147-A177-3AD203B41FA5}">
+                      <a16:colId xmlns:a16="http://schemas.microsoft.com/office/drawing/2014/main" val="20004"/>
+                    </a:ext>
+                  </a:extLst>
+                </a:gridCol>
               </a:tblGrid>
               <a:tr h="342900">
                 <a:tc>
@@ -8207,14 +7684,7 @@
                     <a:lstStyle/>
                     <a:p>
                       <a:pPr algn="l"/>
-                      <a:r>
-                        <a:rPr sz="1200" b="1">
-                          <a:solidFill>
-                            <a:srgbClr val="1F2E55"/>
-                          </a:solidFill>
-                        </a:rPr>
-                        <a:t/>
-                      </a:r>
+                      <a:endParaRPr/>
                     </a:p>
                   </a:txBody>
                   <a:tcPr>
@@ -8315,6 +7785,11 @@
                     </a:solidFill>
                   </a:tcPr>
                 </a:tc>
+                <a:extLst>
+                  <a:ext uri="{0D108BD9-81ED-4DB2-BD59-A6C34878D82A}">
+                    <a16:rowId xmlns:a16="http://schemas.microsoft.com/office/drawing/2014/main" val="10000"/>
+                  </a:ext>
+                </a:extLst>
               </a:tr>
               <a:tr h="342900">
                 <a:tc>
@@ -8427,6 +7902,11 @@
                     </a:solidFill>
                   </a:tcPr>
                 </a:tc>
+                <a:extLst>
+                  <a:ext uri="{0D108BD9-81ED-4DB2-BD59-A6C34878D82A}">
+                    <a16:rowId xmlns:a16="http://schemas.microsoft.com/office/drawing/2014/main" val="10001"/>
+                  </a:ext>
+                </a:extLst>
               </a:tr>
               <a:tr h="342900">
                 <a:tc>
@@ -8539,6 +8019,11 @@
                     </a:solidFill>
                   </a:tcPr>
                 </a:tc>
+                <a:extLst>
+                  <a:ext uri="{0D108BD9-81ED-4DB2-BD59-A6C34878D82A}">
+                    <a16:rowId xmlns:a16="http://schemas.microsoft.com/office/drawing/2014/main" val="10002"/>
+                  </a:ext>
+                </a:extLst>
               </a:tr>
               <a:tr h="342900">
                 <a:tc>
@@ -8651,6 +8136,11 @@
                     </a:solidFill>
                   </a:tcPr>
                 </a:tc>
+                <a:extLst>
+                  <a:ext uri="{0D108BD9-81ED-4DB2-BD59-A6C34878D82A}">
+                    <a16:rowId xmlns:a16="http://schemas.microsoft.com/office/drawing/2014/main" val="10003"/>
+                  </a:ext>
+                </a:extLst>
               </a:tr>
               <a:tr h="342900">
                 <a:tc>
@@ -8763,6 +8253,11 @@
                     </a:solidFill>
                   </a:tcPr>
                 </a:tc>
+                <a:extLst>
+                  <a:ext uri="{0D108BD9-81ED-4DB2-BD59-A6C34878D82A}">
+                    <a16:rowId xmlns:a16="http://schemas.microsoft.com/office/drawing/2014/main" val="10004"/>
+                  </a:ext>
+                </a:extLst>
               </a:tr>
               <a:tr h="342900">
                 <a:tc>
@@ -8875,6 +8370,11 @@
                     </a:solidFill>
                   </a:tcPr>
                 </a:tc>
+                <a:extLst>
+                  <a:ext uri="{0D108BD9-81ED-4DB2-BD59-A6C34878D82A}">
+                    <a16:rowId xmlns:a16="http://schemas.microsoft.com/office/drawing/2014/main" val="10005"/>
+                  </a:ext>
+                </a:extLst>
               </a:tr>
               <a:tr h="342900">
                 <a:tc>
@@ -8987,6 +8487,11 @@
                     </a:solidFill>
                   </a:tcPr>
                 </a:tc>
+                <a:extLst>
+                  <a:ext uri="{0D108BD9-81ED-4DB2-BD59-A6C34878D82A}">
+                    <a16:rowId xmlns:a16="http://schemas.microsoft.com/office/drawing/2014/main" val="10006"/>
+                  </a:ext>
+                </a:extLst>
               </a:tr>
               <a:tr h="342900">
                 <a:tc>
@@ -9099,6 +8604,11 @@
                     </a:solidFill>
                   </a:tcPr>
                 </a:tc>
+                <a:extLst>
+                  <a:ext uri="{0D108BD9-81ED-4DB2-BD59-A6C34878D82A}">
+                    <a16:rowId xmlns:a16="http://schemas.microsoft.com/office/drawing/2014/main" val="10007"/>
+                  </a:ext>
+                </a:extLst>
               </a:tr>
             </a:tbl>
           </a:graphicData>
@@ -9113,7 +8623,7 @@
         <p:spPr>
           <a:xfrm>
             <a:off x="548640" y="4434840"/>
-            <a:ext cx="11064240" cy="365760"/>
+            <a:ext cx="11064240" cy="307777"/>
           </a:xfrm>
           <a:prstGeom prst="rect">
             <a:avLst/>
@@ -9126,14 +8636,13 @@
           </a:bodyPr>
           <a:lstStyle/>
           <a:p>
-            <a:pPr algn="l"/>
-            <a:r>
-              <a:rPr sz="1400" b="1">
+            <a:r>
+              <a:rPr lang="en-US" sz="1400" b="1" dirty="0">
                 <a:solidFill>
                   <a:srgbClr val="C0392B"/>
                 </a:solidFill>
               </a:rPr>
-              <a:t>How to read it once Stages 3 &amp; 4 land</a:t>
+              <a:t>Walk-aways</a:t>
             </a:r>
           </a:p>
         </p:txBody>
@@ -9147,7 +8656,7 @@
         <p:spPr>
           <a:xfrm>
             <a:off x="548640" y="4800600"/>
-            <a:ext cx="11064240" cy="1371600"/>
+            <a:ext cx="11064240" cy="359522"/>
           </a:xfrm>
           <a:prstGeom prst="rect">
             <a:avLst/>
@@ -9166,125 +8675,18 @@
               </a:lnSpc>
             </a:pPr>
             <a:r>
-              <a:rPr sz="1500">
+              <a:rPr lang="en-US" sz="1500" b="0" dirty="0">
                 <a:solidFill>
                   <a:srgbClr val="2A2A2A"/>
                 </a:solidFill>
               </a:rPr>
-              <a:t>• </a:t>
-            </a:r>
-            <a:r>
-              <a:rPr sz="1500" b="1">
-                <a:solidFill>
-                  <a:srgbClr val="2A2A2A"/>
-                </a:solidFill>
-              </a:rPr>
-              <a:t>Stage 3 ≫ Stage 2  →  </a:t>
-            </a:r>
-            <a:r>
-              <a:rPr sz="1500" b="0">
-                <a:solidFill>
-                  <a:srgbClr val="2A2A2A"/>
-                </a:solidFill>
-              </a:rPr>
-              <a:t>uncertainty-driven AL beats un-prioritised hand-curation; engineering investment pays off.</a:t>
-            </a:r>
-          </a:p>
-          <a:p>
-            <a:pPr>
-              <a:lnSpc>
-                <a:spcPct val="125000"/>
-              </a:lnSpc>
-            </a:pPr>
-            <a:r>
-              <a:rPr sz="1500">
-                <a:solidFill>
-                  <a:srgbClr val="2A2A2A"/>
-                </a:solidFill>
-              </a:rPr>
-              <a:t>• </a:t>
-            </a:r>
-            <a:r>
-              <a:rPr sz="1500" b="1">
-                <a:solidFill>
-                  <a:srgbClr val="2A2A2A"/>
-                </a:solidFill>
-              </a:rPr>
-              <a:t>Stage 3 ≈ Stage 4  →  </a:t>
-            </a:r>
-            <a:r>
-              <a:rPr sz="1500" b="0">
-                <a:solidFill>
-                  <a:srgbClr val="2A2A2A"/>
-                </a:solidFill>
-              </a:rPr>
-              <a:t>diversity alone explains the lift; a much simpler heuristic is the better default.</a:t>
-            </a:r>
-          </a:p>
-          <a:p>
-            <a:pPr>
-              <a:lnSpc>
-                <a:spcPct val="125000"/>
-              </a:lnSpc>
-            </a:pPr>
-            <a:r>
-              <a:rPr sz="1500">
-                <a:solidFill>
-                  <a:srgbClr val="2A2A2A"/>
-                </a:solidFill>
-              </a:rPr>
-              <a:t>• </a:t>
-            </a:r>
-            <a:r>
-              <a:rPr sz="1500" b="1">
-                <a:solidFill>
-                  <a:srgbClr val="2A2A2A"/>
-                </a:solidFill>
-              </a:rPr>
-              <a:t>Stages 3, 4 ≈ Stage 2  →  </a:t>
-            </a:r>
-            <a:r>
-              <a:rPr sz="1500" b="0">
-                <a:solidFill>
-                  <a:srgbClr val="2A2A2A"/>
-                </a:solidFill>
-              </a:rPr>
-              <a:t>selection strategy matters less than just having human signal at all.</a:t>
-            </a:r>
-          </a:p>
-        </p:txBody>
-      </p:sp>
-      <p:sp>
-        <p:nvSpPr>
-          <p:cNvPr id="7" name="TextBox 6"/>
-          <p:cNvSpPr txBox="1"/>
-          <p:nvPr/>
-        </p:nvSpPr>
-        <p:spPr>
-          <a:xfrm>
-            <a:off x="365760" y="6126480"/>
-            <a:ext cx="7315200" cy="274320"/>
-          </a:xfrm>
-          <a:prstGeom prst="rect">
-            <a:avLst/>
-          </a:prstGeom>
-          <a:noFill/>
-        </p:spPr>
-        <p:txBody>
-          <a:bodyPr wrap="square" anchor="t">
-            <a:spAutoFit/>
-          </a:bodyPr>
-          <a:lstStyle/>
-          <a:p>
-            <a:pPr algn="l"/>
-            <a:r>
-              <a:rPr sz="1000" b="1">
-                <a:solidFill>
-                  <a:srgbClr val="888888"/>
-                </a:solidFill>
-              </a:rPr>
-              <a:t>[ Speaker: Isabel · ~35s ]</a:t>
-            </a:r>
+              <a:t>[FILL IN with 2-3 takeaways]</a:t>
+            </a:r>
+            <a:endParaRPr sz="1500" b="0" dirty="0">
+              <a:solidFill>
+                <a:srgbClr val="2A2A2A"/>
+              </a:solidFill>
+            </a:endParaRPr>
           </a:p>
         </p:txBody>
       </p:sp>
@@ -9364,8 +8766,8 @@
 </p:sld>
 </file>
 
-<file path=ppt/slides/slide8.xml><?xml version="1.0" encoding="utf-8"?>
-<p:sld xmlns:a="http://schemas.openxmlformats.org/drawingml/2006/main" xmlns:p="http://schemas.openxmlformats.org/presentationml/2006/main" xmlns:r="http://schemas.openxmlformats.org/officeDocument/2006/relationships">
+<file path=ppt/slides/slide9.xml><?xml version="1.0" encoding="utf-8"?>
+<p:sld xmlns:a="http://schemas.openxmlformats.org/drawingml/2006/main" xmlns:r="http://schemas.openxmlformats.org/officeDocument/2006/relationships" xmlns:p="http://schemas.openxmlformats.org/presentationml/2006/main">
   <p:cSld>
     <p:spTree>
       <p:nvGrpSpPr>
@@ -9373,7 +8775,14 @@
         <p:cNvGrpSpPr/>
         <p:nvPr/>
       </p:nvGrpSpPr>
-      <p:grpSpPr/>
+      <p:grpSpPr>
+        <a:xfrm>
+          <a:off x="0" y="0"/>
+          <a:ext cx="0" cy="0"/>
+          <a:chOff x="0" y="0"/>
+          <a:chExt cx="0" cy="0"/>
+        </a:xfrm>
+      </p:grpSpPr>
       <p:sp>
         <p:nvSpPr>
           <p:cNvPr id="2" name="TextBox 1"/>
@@ -9398,7 +8807,7 @@
           <a:p>
             <a:pPr algn="l"/>
             <a:r>
-              <a:rPr sz="3200" b="1">
+              <a:rPr sz="3200" b="1" dirty="0">
                 <a:solidFill>
                   <a:srgbClr val="1F2E55"/>
                 </a:solidFill>
@@ -9451,7 +8860,7 @@
         <p:spPr>
           <a:xfrm>
             <a:off x="548640" y="1554480"/>
-            <a:ext cx="11064240" cy="2286000"/>
+            <a:ext cx="11064240" cy="1161793"/>
           </a:xfrm>
           <a:prstGeom prst="rect">
             <a:avLst/>
@@ -9470,7 +8879,7 @@
               </a:lnSpc>
             </a:pPr>
             <a:r>
-              <a:rPr sz="1900">
+              <a:rPr sz="1900" dirty="0">
                 <a:solidFill>
                   <a:srgbClr val="2A2A2A"/>
                 </a:solidFill>
@@ -9478,7 +8887,7 @@
               <a:t>• </a:t>
             </a:r>
             <a:r>
-              <a:rPr sz="1900" b="0">
+              <a:rPr sz="1900" b="0" dirty="0">
                 <a:solidFill>
                   <a:srgbClr val="2A2A2A"/>
                 </a:solidFill>
@@ -9486,7 +8895,7 @@
               <a:t>39 human pairs (≈0.15% of gradient) → </a:t>
             </a:r>
             <a:r>
-              <a:rPr sz="1900" b="1">
+              <a:rPr sz="1900" b="1" dirty="0">
                 <a:solidFill>
                   <a:srgbClr val="C0392B"/>
                 </a:solidFill>
@@ -9494,7 +8903,7 @@
               <a:t>+23 pp pairwise / +8 pp exact-match</a:t>
             </a:r>
             <a:r>
-              <a:rPr sz="1900" b="0">
+              <a:rPr sz="1900" b="0" dirty="0">
                 <a:solidFill>
                   <a:srgbClr val="2A2A2A"/>
                 </a:solidFill>
@@ -9509,7 +8918,7 @@
               </a:lnSpc>
             </a:pPr>
             <a:r>
-              <a:rPr sz="1900">
+              <a:rPr sz="1900" dirty="0">
                 <a:solidFill>
                   <a:srgbClr val="2A2A2A"/>
                 </a:solidFill>
@@ -9517,7 +8926,7 @@
               <a:t>• </a:t>
             </a:r>
             <a:r>
-              <a:rPr sz="1900" b="0">
+              <a:rPr sz="1900" b="0" dirty="0">
                 <a:solidFill>
                   <a:srgbClr val="2A2A2A"/>
                 </a:solidFill>
@@ -9525,7 +8934,7 @@
               <a:t>The </a:t>
             </a:r>
             <a:r>
-              <a:rPr sz="1900" b="1">
+              <a:rPr sz="1900" b="1" dirty="0">
                 <a:solidFill>
                   <a:srgbClr val="2A2A2A"/>
                 </a:solidFill>
@@ -9533,12 +8942,28 @@
               <a:t>save-best criterion</a:t>
             </a:r>
             <a:r>
-              <a:rPr sz="1900" b="0">
+              <a:rPr sz="1900" b="0" dirty="0">
                 <a:solidFill>
                   <a:srgbClr val="2A2A2A"/>
                 </a:solidFill>
               </a:rPr>
-              <a:t> is itself a deployment choice — 4 saved checkpoints differ by 31 pp on top-1 metric.</a:t>
+              <a:t> is itself a deployment choice</a:t>
+            </a:r>
+            <a:r>
+              <a:rPr lang="en-US" sz="1900" b="0" dirty="0">
+                <a:solidFill>
+                  <a:srgbClr val="2A2A2A"/>
+                </a:solidFill>
+              </a:rPr>
+              <a:t>:</a:t>
+            </a:r>
+            <a:r>
+              <a:rPr sz="1900" b="0" dirty="0">
+                <a:solidFill>
+                  <a:srgbClr val="2A2A2A"/>
+                </a:solidFill>
+              </a:rPr>
+              <a:t> 4 saved checkpoints differ by 31 pp on top-1 metric.</a:t>
             </a:r>
           </a:p>
           <a:p>
@@ -9548,7 +8973,7 @@
               </a:lnSpc>
             </a:pPr>
             <a:r>
-              <a:rPr sz="1900">
+              <a:rPr sz="1900" dirty="0">
                 <a:solidFill>
                   <a:srgbClr val="2A2A2A"/>
                 </a:solidFill>
@@ -9556,7 +8981,7 @@
               <a:t>• </a:t>
             </a:r>
             <a:r>
-              <a:rPr sz="1900" b="0">
+              <a:rPr sz="1900" b="0" dirty="0">
                 <a:solidFill>
                   <a:srgbClr val="2A2A2A"/>
                 </a:solidFill>
@@ -9564,18 +8989,15 @@
               <a:t>The </a:t>
             </a:r>
             <a:r>
-              <a:rPr sz="1900" b="1">
+              <a:rPr sz="1900" b="1" dirty="0">
                 <a:solidFill>
                   <a:srgbClr val="2A2A2A"/>
                 </a:solidFill>
-                <a:highlight>
-                  <a:srgbClr val="FFFBCC"/>
-                </a:highlight>
               </a:rPr>
               <a:t>acquisition-strategy comparison</a:t>
             </a:r>
             <a:r>
-              <a:rPr sz="1900" b="0">
+              <a:rPr sz="1900" b="0" dirty="0">
                 <a:solidFill>
                   <a:srgbClr val="2A2A2A"/>
                 </a:solidFill>
@@ -9628,7 +9050,7 @@
         <p:spPr>
           <a:xfrm>
             <a:off x="548640" y="4297680"/>
-            <a:ext cx="11064240" cy="1828800"/>
+            <a:ext cx="11064240" cy="1703223"/>
           </a:xfrm>
           <a:prstGeom prst="rect">
             <a:avLst/>
@@ -9647,12 +9069,28 @@
               </a:lnSpc>
             </a:pPr>
             <a:r>
-              <a:rPr sz="1700">
+              <a:rPr sz="1700" dirty="0">
                 <a:solidFill>
                   <a:srgbClr val="555555"/>
                 </a:solidFill>
               </a:rPr>
-              <a:t>• Run-to-run variance is large: hp_val swung 0.615 ↔ 0.846 across two reseeds. Multi-seed averaging is the obvious follow-up.</a:t>
+              <a:t>• Run-to-run variance is large: </a:t>
+            </a:r>
+            <a:r>
+              <a:rPr sz="1700" dirty="0" err="1">
+                <a:solidFill>
+                  <a:srgbClr val="555555"/>
+                </a:solidFill>
+              </a:rPr>
+              <a:t>hp_val</a:t>
+            </a:r>
+            <a:r>
+              <a:rPr sz="1700" dirty="0">
+                <a:solidFill>
+                  <a:srgbClr val="555555"/>
+                </a:solidFill>
+              </a:rPr>
+              <a:t> swung 0.615 ↔ 0.846 across two reseeds. Multi-seed averaging is the obvious follow-up.</a:t>
             </a:r>
           </a:p>
           <a:p>
@@ -9662,7 +9100,7 @@
               </a:lnSpc>
             </a:pPr>
             <a:r>
-              <a:rPr sz="1700">
+              <a:rPr sz="1700" dirty="0">
                 <a:solidFill>
                   <a:srgbClr val="555555"/>
                 </a:solidFill>
@@ -9677,46 +9115,44 @@
               </a:lnSpc>
             </a:pPr>
             <a:r>
-              <a:rPr sz="1700">
+              <a:rPr sz="1700" dirty="0">
                 <a:solidFill>
                   <a:srgbClr val="555555"/>
                 </a:solidFill>
               </a:rPr>
-              <a:t>• No downstream MAPF-GPT impact study yet — does using this classifier in DDG actually train a better policy on POGEMA? The most consequential open question.</a:t>
-            </a:r>
-          </a:p>
-        </p:txBody>
-      </p:sp>
-      <p:sp>
-        <p:nvSpPr>
-          <p:cNvPr id="7" name="TextBox 6"/>
-          <p:cNvSpPr txBox="1"/>
-          <p:nvPr/>
-        </p:nvSpPr>
-        <p:spPr>
-          <a:xfrm>
-            <a:off x="365760" y="6126480"/>
-            <a:ext cx="7315200" cy="274320"/>
-          </a:xfrm>
-          <a:prstGeom prst="rect">
-            <a:avLst/>
-          </a:prstGeom>
-          <a:noFill/>
-        </p:spPr>
-        <p:txBody>
-          <a:bodyPr wrap="square" anchor="t">
-            <a:spAutoFit/>
-          </a:bodyPr>
-          <a:lstStyle/>
-          <a:p>
-            <a:pPr algn="l"/>
-            <a:r>
-              <a:rPr sz="1000" b="1">
-                <a:solidFill>
-                  <a:srgbClr val="888888"/>
-                </a:solidFill>
-              </a:rPr>
-              <a:t>[ Speaker: Isabel · ~25s ]</a:t>
+              <a:t>• No downstream MAPF-GPT impact study yet</a:t>
+            </a:r>
+            <a:r>
+              <a:rPr lang="en-US" sz="1700" dirty="0">
+                <a:solidFill>
+                  <a:srgbClr val="555555"/>
+                </a:solidFill>
+              </a:rPr>
+              <a:t>:</a:t>
+            </a:r>
+            <a:r>
+              <a:rPr sz="1700" dirty="0">
+                <a:solidFill>
+                  <a:srgbClr val="555555"/>
+                </a:solidFill>
+              </a:rPr>
+              <a:t> does using this classifier in DDG </a:t>
+            </a:r>
+            <a:r>
+              <a:rPr lang="en-US" sz="1700" dirty="0">
+                <a:solidFill>
+                  <a:srgbClr val="555555"/>
+                </a:solidFill>
+              </a:rPr>
+              <a:t>train</a:t>
+            </a:r>
+            <a:r>
+              <a:rPr sz="1700" dirty="0">
+                <a:solidFill>
+                  <a:srgbClr val="555555"/>
+                </a:solidFill>
+              </a:rPr>
+              <a:t> a better policy on POGEMA? The most consequential open question.</a:t>
             </a:r>
           </a:p>
         </p:txBody>
@@ -9797,380 +9233,16 @@
 </p:sld>
 </file>
 
-<file path=ppt/slides/slide9.xml><?xml version="1.0" encoding="utf-8"?>
-<p:sld xmlns:a="http://schemas.openxmlformats.org/drawingml/2006/main" xmlns:p="http://schemas.openxmlformats.org/presentationml/2006/main" xmlns:r="http://schemas.openxmlformats.org/officeDocument/2006/relationships">
-  <p:cSld>
-    <p:spTree>
-      <p:nvGrpSpPr>
-        <p:cNvPr id="1" name=""/>
-        <p:cNvGrpSpPr/>
-        <p:nvPr/>
-      </p:nvGrpSpPr>
-      <p:grpSpPr/>
-      <p:sp>
-        <p:nvSpPr>
-          <p:cNvPr id="2" name="TextBox 1"/>
-          <p:cNvSpPr txBox="1"/>
-          <p:nvPr/>
-        </p:nvSpPr>
-        <p:spPr>
-          <a:xfrm>
-            <a:off x="548640" y="365760"/>
-            <a:ext cx="10972800" cy="640080"/>
-          </a:xfrm>
-          <a:prstGeom prst="rect">
-            <a:avLst/>
-          </a:prstGeom>
-          <a:noFill/>
-        </p:spPr>
-        <p:txBody>
-          <a:bodyPr wrap="square" anchor="t">
-            <a:spAutoFit/>
-          </a:bodyPr>
-          <a:lstStyle/>
-          <a:p>
-            <a:pPr algn="l"/>
-            <a:r>
-              <a:rPr sz="2800" b="1">
-                <a:solidFill>
-                  <a:srgbClr val="1F2E55"/>
-                </a:solidFill>
-              </a:rPr>
-              <a:t>Backup A — auto-label disagreement breakdown</a:t>
-            </a:r>
-          </a:p>
-        </p:txBody>
-      </p:sp>
-      <p:sp>
-        <p:nvSpPr>
-          <p:cNvPr id="3" name="TextBox 2"/>
-          <p:cNvSpPr txBox="1"/>
-          <p:nvPr/>
-        </p:nvSpPr>
-        <p:spPr>
-          <a:xfrm>
-            <a:off x="548640" y="1097280"/>
-            <a:ext cx="11064240" cy="365760"/>
-          </a:xfrm>
-          <a:prstGeom prst="rect">
-            <a:avLst/>
-          </a:prstGeom>
-          <a:noFill/>
-        </p:spPr>
-        <p:txBody>
-          <a:bodyPr wrap="square" anchor="t">
-            <a:spAutoFit/>
-          </a:bodyPr>
-          <a:lstStyle/>
-          <a:p>
-            <a:pPr algn="l"/>
-            <a:r>
-              <a:rPr sz="1400" b="0">
-                <a:solidFill>
-                  <a:srgbClr val="555555"/>
-                </a:solidFill>
-              </a:rPr>
-              <a:t>How the 52 valid annotations relate to the auto-pair ordering</a:t>
-            </a:r>
-          </a:p>
-        </p:txBody>
-      </p:sp>
-      <p:graphicFrame>
-        <p:nvGraphicFramePr>
-          <p:cNvPr id="4" name="Table 3"/>
-          <p:cNvGraphicFramePr>
-            <a:graphicFrameLocks noGrp="1"/>
-          </p:cNvGraphicFramePr>
-          <p:nvPr/>
-        </p:nvGraphicFramePr>
-        <p:xfrm>
-          <a:off x="1371600" y="1737360"/>
-          <a:ext cx="9418320" cy="2286000"/>
-        </p:xfrm>
-        <a:graphic>
-          <a:graphicData uri="http://schemas.openxmlformats.org/drawingml/2006/table">
-            <a:tbl>
-              <a:tblPr firstRow="1" bandRow="1">
-                <a:tableStyleId>{5C22544A-7EE6-4342-B048-85BDC9FD1C3A}</a:tableStyleId>
-              </a:tblPr>
-              <a:tblGrid>
-                <a:gridCol w="4709160"/>
-                <a:gridCol w="4709160"/>
-              </a:tblGrid>
-              <a:tr h="457200">
-                <a:tc>
-                  <a:txBody>
-                    <a:bodyPr/>
-                    <a:lstStyle/>
-                    <a:p>
-                      <a:pPr algn="l"/>
-                      <a:r>
-                        <a:rPr sz="1400" b="1">
-                          <a:solidFill>
-                            <a:srgbClr val="1F2E55"/>
-                          </a:solidFill>
-                        </a:rPr>
-                        <a:t>Relationship to auto-diff ordering</a:t>
-                      </a:r>
-                    </a:p>
-                  </a:txBody>
-                  <a:tcPr>
-                    <a:solidFill>
-                      <a:srgbClr val="E8EEF5"/>
-                    </a:solidFill>
-                  </a:tcPr>
-                </a:tc>
-                <a:tc>
-                  <a:txBody>
-                    <a:bodyPr/>
-                    <a:lstStyle/>
-                    <a:p>
-                      <a:pPr algn="l"/>
-                      <a:r>
-                        <a:rPr sz="1400" b="1">
-                          <a:solidFill>
-                            <a:srgbClr val="1F2E55"/>
-                          </a:solidFill>
-                        </a:rPr>
-                        <a:t>Count</a:t>
-                      </a:r>
-                    </a:p>
-                  </a:txBody>
-                  <a:tcPr>
-                    <a:solidFill>
-                      <a:srgbClr val="E8EEF5"/>
-                    </a:solidFill>
-                  </a:tcPr>
-                </a:tc>
-              </a:tr>
-              <a:tr h="457200">
-                <a:tc>
-                  <a:txBody>
-                    <a:bodyPr/>
-                    <a:lstStyle/>
-                    <a:p>
-                      <a:pPr algn="l"/>
-                      <a:r>
-                        <a:rPr sz="1400">
-                          <a:solidFill>
-                            <a:srgbClr val="2A2A2A"/>
-                          </a:solidFill>
-                        </a:rPr>
-                        <a:t>Human pair contradicts auto-diff (diff(worst) ≤ diff(clean))</a:t>
-                      </a:r>
-                    </a:p>
-                  </a:txBody>
-                  <a:tcPr>
-                    <a:solidFill>
-                      <a:srgbClr val="FFFFFF"/>
-                    </a:solidFill>
-                  </a:tcPr>
-                </a:tc>
-                <a:tc>
-                  <a:txBody>
-                    <a:bodyPr/>
-                    <a:lstStyle/>
-                    <a:p>
-                      <a:pPr algn="l"/>
-                      <a:r>
-                        <a:rPr sz="1400" b="1">
-                          <a:solidFill>
-                            <a:srgbClr val="C0392B"/>
-                          </a:solidFill>
-                        </a:rPr>
-                        <a:t>23</a:t>
-                      </a:r>
-                    </a:p>
-                  </a:txBody>
-                  <a:tcPr>
-                    <a:solidFill>
-                      <a:srgbClr val="FFFFFF"/>
-                    </a:solidFill>
-                  </a:tcPr>
-                </a:tc>
-              </a:tr>
-              <a:tr h="457200">
-                <a:tc>
-                  <a:txBody>
-                    <a:bodyPr/>
-                    <a:lstStyle/>
-                    <a:p>
-                      <a:pPr algn="l"/>
-                      <a:r>
-                        <a:rPr sz="1400">
-                          <a:solidFill>
-                            <a:srgbClr val="2A2A2A"/>
-                          </a:solidFill>
-                        </a:rPr>
-                        <a:t>Human pair upgrades an auto 0.5-weight pair to 1.0</a:t>
-                      </a:r>
-                    </a:p>
-                  </a:txBody>
-                  <a:tcPr>
-                    <a:solidFill>
-                      <a:srgbClr val="F6F8FB"/>
-                    </a:solidFill>
-                  </a:tcPr>
-                </a:tc>
-                <a:tc>
-                  <a:txBody>
-                    <a:bodyPr/>
-                    <a:lstStyle/>
-                    <a:p>
-                      <a:pPr algn="l"/>
-                      <a:r>
-                        <a:rPr sz="1400" b="1">
-                          <a:solidFill>
-                            <a:srgbClr val="C0392B"/>
-                          </a:solidFill>
-                        </a:rPr>
-                        <a:t>23</a:t>
-                      </a:r>
-                    </a:p>
-                  </a:txBody>
-                  <a:tcPr>
-                    <a:solidFill>
-                      <a:srgbClr val="F6F8FB"/>
-                    </a:solidFill>
-                  </a:tcPr>
-                </a:tc>
-              </a:tr>
-              <a:tr h="457200">
-                <a:tc>
-                  <a:txBody>
-                    <a:bodyPr/>
-                    <a:lstStyle/>
-                    <a:p>
-                      <a:pPr algn="l"/>
-                      <a:r>
-                        <a:rPr sz="1400">
-                          <a:solidFill>
-                            <a:srgbClr val="2A2A2A"/>
-                          </a:solidFill>
-                        </a:rPr>
-                        <a:t>Human pair creates a new pair (both segments same bucket)</a:t>
-                      </a:r>
-                    </a:p>
-                  </a:txBody>
-                  <a:tcPr>
-                    <a:solidFill>
-                      <a:srgbClr val="FFFFFF"/>
-                    </a:solidFill>
-                  </a:tcPr>
-                </a:tc>
-                <a:tc>
-                  <a:txBody>
-                    <a:bodyPr/>
-                    <a:lstStyle/>
-                    <a:p>
-                      <a:pPr algn="l"/>
-                      <a:r>
-                        <a:rPr sz="1400" b="1">
-                          <a:solidFill>
-                            <a:srgbClr val="C0392B"/>
-                          </a:solidFill>
-                        </a:rPr>
-                        <a:t>3</a:t>
-                      </a:r>
-                    </a:p>
-                  </a:txBody>
-                  <a:tcPr>
-                    <a:solidFill>
-                      <a:srgbClr val="FFFFFF"/>
-                    </a:solidFill>
-                  </a:tcPr>
-                </a:tc>
-              </a:tr>
-              <a:tr h="457200">
-                <a:tc>
-                  <a:txBody>
-                    <a:bodyPr/>
-                    <a:lstStyle/>
-                    <a:p>
-                      <a:pPr algn="l"/>
-                      <a:r>
-                        <a:rPr sz="1400">
-                          <a:solidFill>
-                            <a:srgbClr val="2A2A2A"/>
-                          </a:solidFill>
-                        </a:rPr>
-                        <a:t>Human pair confirms an existing 1.0 auto pair</a:t>
-                      </a:r>
-                    </a:p>
-                  </a:txBody>
-                  <a:tcPr>
-                    <a:solidFill>
-                      <a:srgbClr val="F6F8FB"/>
-                    </a:solidFill>
-                  </a:tcPr>
-                </a:tc>
-                <a:tc>
-                  <a:txBody>
-                    <a:bodyPr/>
-                    <a:lstStyle/>
-                    <a:p>
-                      <a:pPr algn="l"/>
-                      <a:r>
-                        <a:rPr sz="1400" b="1">
-                          <a:solidFill>
-                            <a:srgbClr val="C0392B"/>
-                          </a:solidFill>
-                        </a:rPr>
-                        <a:t>3</a:t>
-                      </a:r>
-                    </a:p>
-                  </a:txBody>
-                  <a:tcPr>
-                    <a:solidFill>
-                      <a:srgbClr val="F6F8FB"/>
-                    </a:solidFill>
-                  </a:tcPr>
-                </a:tc>
-              </a:tr>
-            </a:tbl>
-          </a:graphicData>
-        </a:graphic>
-      </p:graphicFrame>
-      <p:sp>
-        <p:nvSpPr>
-          <p:cNvPr id="5" name="TextBox 4"/>
-          <p:cNvSpPr txBox="1"/>
-          <p:nvPr/>
-        </p:nvSpPr>
-        <p:spPr>
-          <a:xfrm>
-            <a:off x="548640" y="4297680"/>
-            <a:ext cx="11064240" cy="1371600"/>
-          </a:xfrm>
-          <a:prstGeom prst="rect">
-            <a:avLst/>
-          </a:prstGeom>
-          <a:noFill/>
-        </p:spPr>
-        <p:txBody>
-          <a:bodyPr wrap="square" anchor="t">
-            <a:spAutoFit/>
-          </a:bodyPr>
-          <a:lstStyle/>
-          <a:p>
-            <a:pPr algn="l"/>
-            <a:r>
-              <a:rPr sz="1800" b="0">
-                <a:solidFill>
-                  <a:srgbClr val="2A2A2A"/>
-                </a:solidFill>
-              </a:rPr>
-              <a:t>44% contradiction rate is stable to ±2 points across two independent annotation batches (12/26 in batch 1, 23/52 across both) — this is a property of the auto-label, not annotator noise.</a:t>
-            </a:r>
-          </a:p>
-        </p:txBody>
-      </p:sp>
-    </p:spTree>
-  </p:cSld>
-  <p:clrMapOvr>
-    <a:masterClrMapping/>
-  </p:clrMapOvr>
-</p:sld>
+<file path=ppt/tags/tag1.xml><?xml version="1.0" encoding="utf-8"?>
+<p:tagLst xmlns:a="http://schemas.openxmlformats.org/drawingml/2006/main" xmlns:r="http://schemas.openxmlformats.org/officeDocument/2006/relationships" xmlns:p="http://schemas.openxmlformats.org/presentationml/2006/main">
+  <p:tag name="THINKCELLSHAPEDONOTDELETE" val="thinkcellActiveDocDoNotDelete"/>
+</p:tagLst>
+</file>
+
+<file path=ppt/tags/tag2.xml><?xml version="1.0" encoding="utf-8"?>
+<p:tagLst xmlns:a="http://schemas.openxmlformats.org/drawingml/2006/main" xmlns:r="http://schemas.openxmlformats.org/officeDocument/2006/relationships" xmlns:p="http://schemas.openxmlformats.org/presentationml/2006/main">
+  <p:tag name="THINKCELLSHAPEDONOTDELETE" val="thinkcellActiveDocDoNotDelete"/>
+</p:tagLst>
 </file>
 
 <file path=ppt/theme/theme1.xml><?xml version="1.0" encoding="utf-8"?>
@@ -10504,44 +9576,44 @@
         <a:sysClr val="window" lastClr="FFFFFF"/>
       </a:lt1>
       <a:dk2>
-        <a:srgbClr val="1F497D"/>
+        <a:srgbClr val="0E2841"/>
       </a:dk2>
       <a:lt2>
-        <a:srgbClr val="EEECE1"/>
+        <a:srgbClr val="E8E8E8"/>
       </a:lt2>
       <a:accent1>
-        <a:srgbClr val="4F81BD"/>
+        <a:srgbClr val="156082"/>
       </a:accent1>
       <a:accent2>
-        <a:srgbClr val="C0504D"/>
+        <a:srgbClr val="E97132"/>
       </a:accent2>
       <a:accent3>
-        <a:srgbClr val="9BBB59"/>
+        <a:srgbClr val="196B24"/>
       </a:accent3>
       <a:accent4>
-        <a:srgbClr val="8064A2"/>
+        <a:srgbClr val="0F9ED5"/>
       </a:accent4>
       <a:accent5>
-        <a:srgbClr val="4BACC6"/>
+        <a:srgbClr val="A02B93"/>
       </a:accent5>
       <a:accent6>
-        <a:srgbClr val="F79646"/>
+        <a:srgbClr val="4EA72E"/>
       </a:accent6>
       <a:hlink>
-        <a:srgbClr val="0000FF"/>
+        <a:srgbClr val="467886"/>
       </a:hlink>
       <a:folHlink>
-        <a:srgbClr val="800080"/>
+        <a:srgbClr val="96607D"/>
       </a:folHlink>
     </a:clrScheme>
     <a:fontScheme name="Office">
       <a:majorFont>
-        <a:latin typeface="Calibri"/>
+        <a:latin typeface="Aptos Display" panose="02110004020202020204"/>
         <a:ea typeface=""/>
         <a:cs typeface=""/>
-        <a:font script="Jpan" typeface="ＭＳ Ｐゴシック"/>
+        <a:font script="Jpan" typeface="游ゴシック Light"/>
         <a:font script="Hang" typeface="맑은 고딕"/>
-        <a:font script="Hans" typeface="宋体"/>
+        <a:font script="Hans" typeface="等线 Light"/>
         <a:font script="Hant" typeface="新細明體"/>
         <a:font script="Arab" typeface="Times New Roman"/>
         <a:font script="Hebr" typeface="Times New Roman"/>
@@ -10569,14 +9641,31 @@
         <a:font script="Viet" typeface="Times New Roman"/>
         <a:font script="Uigh" typeface="Microsoft Uighur"/>
         <a:font script="Geor" typeface="Sylfaen"/>
+        <a:font script="Armn" typeface="Arial"/>
+        <a:font script="Bugi" typeface="Leelawadee UI"/>
+        <a:font script="Bopo" typeface="Microsoft JhengHei"/>
+        <a:font script="Java" typeface="Javanese Text"/>
+        <a:font script="Lisu" typeface="Segoe UI"/>
+        <a:font script="Mymr" typeface="Myanmar Text"/>
+        <a:font script="Nkoo" typeface="Ebrima"/>
+        <a:font script="Olck" typeface="Nirmala UI"/>
+        <a:font script="Osma" typeface="Ebrima"/>
+        <a:font script="Phag" typeface="Phagspa"/>
+        <a:font script="Syrn" typeface="Estrangelo Edessa"/>
+        <a:font script="Syrj" typeface="Estrangelo Edessa"/>
+        <a:font script="Syre" typeface="Estrangelo Edessa"/>
+        <a:font script="Sora" typeface="Nirmala UI"/>
+        <a:font script="Tale" typeface="Microsoft Tai Le"/>
+        <a:font script="Talu" typeface="Microsoft New Tai Lue"/>
+        <a:font script="Tfng" typeface="Ebrima"/>
       </a:majorFont>
       <a:minorFont>
-        <a:latin typeface="Calibri"/>
+        <a:latin typeface="Aptos" panose="02110004020202020204"/>
         <a:ea typeface=""/>
         <a:cs typeface=""/>
-        <a:font script="Jpan" typeface="ＭＳ Ｐゴシック"/>
+        <a:font script="Jpan" typeface="游ゴシック"/>
         <a:font script="Hang" typeface="맑은 고딕"/>
-        <a:font script="Hans" typeface="宋体"/>
+        <a:font script="Hans" typeface="等线"/>
         <a:font script="Hant" typeface="新細明體"/>
         <a:font script="Arab" typeface="Arial"/>
         <a:font script="Hebr" typeface="Arial"/>
@@ -10604,6 +9693,23 @@
         <a:font script="Viet" typeface="Arial"/>
         <a:font script="Uigh" typeface="Microsoft Uighur"/>
         <a:font script="Geor" typeface="Sylfaen"/>
+        <a:font script="Armn" typeface="Arial"/>
+        <a:font script="Bugi" typeface="Leelawadee UI"/>
+        <a:font script="Bopo" typeface="Microsoft JhengHei"/>
+        <a:font script="Java" typeface="Javanese Text"/>
+        <a:font script="Lisu" typeface="Segoe UI"/>
+        <a:font script="Mymr" typeface="Myanmar Text"/>
+        <a:font script="Nkoo" typeface="Ebrima"/>
+        <a:font script="Olck" typeface="Nirmala UI"/>
+        <a:font script="Osma" typeface="Ebrima"/>
+        <a:font script="Phag" typeface="Phagspa"/>
+        <a:font script="Syrn" typeface="Estrangelo Edessa"/>
+        <a:font script="Syrj" typeface="Estrangelo Edessa"/>
+        <a:font script="Syre" typeface="Estrangelo Edessa"/>
+        <a:font script="Sora" typeface="Nirmala UI"/>
+        <a:font script="Tale" typeface="Microsoft Tai Le"/>
+        <a:font script="Talu" typeface="Microsoft New Tai Lue"/>
+        <a:font script="Tfng" typeface="Ebrima"/>
       </a:minorFont>
     </a:fontScheme>
     <a:fmtScheme name="Office">
@@ -10615,180 +9721,136 @@
           <a:gsLst>
             <a:gs pos="0">
               <a:schemeClr val="phClr">
-                <a:tint val="50000"/>
-                <a:satMod val="300000"/>
+                <a:lumMod val="110000"/>
+                <a:satMod val="105000"/>
+                <a:tint val="67000"/>
               </a:schemeClr>
             </a:gs>
-            <a:gs pos="35000">
+            <a:gs pos="50000">
               <a:schemeClr val="phClr">
-                <a:tint val="37000"/>
-                <a:satMod val="300000"/>
+                <a:lumMod val="105000"/>
+                <a:satMod val="103000"/>
+                <a:tint val="73000"/>
               </a:schemeClr>
             </a:gs>
             <a:gs pos="100000">
               <a:schemeClr val="phClr">
-                <a:tint val="15000"/>
-                <a:satMod val="350000"/>
+                <a:lumMod val="105000"/>
+                <a:satMod val="109000"/>
+                <a:tint val="81000"/>
               </a:schemeClr>
             </a:gs>
           </a:gsLst>
-          <a:lin ang="16200000" scaled="1"/>
+          <a:lin ang="5400000" scaled="0"/>
         </a:gradFill>
         <a:gradFill rotWithShape="1">
           <a:gsLst>
             <a:gs pos="0">
               <a:schemeClr val="phClr">
-                <a:tint val="100000"/>
+                <a:satMod val="103000"/>
+                <a:lumMod val="102000"/>
+                <a:tint val="94000"/>
+              </a:schemeClr>
+            </a:gs>
+            <a:gs pos="50000">
+              <a:schemeClr val="phClr">
+                <a:satMod val="110000"/>
+                <a:lumMod val="100000"/>
                 <a:shade val="100000"/>
-                <a:satMod val="130000"/>
               </a:schemeClr>
             </a:gs>
             <a:gs pos="100000">
               <a:schemeClr val="phClr">
-                <a:tint val="50000"/>
-                <a:shade val="100000"/>
-                <a:satMod val="350000"/>
+                <a:lumMod val="99000"/>
+                <a:satMod val="120000"/>
+                <a:shade val="78000"/>
               </a:schemeClr>
             </a:gs>
           </a:gsLst>
-          <a:lin ang="16200000" scaled="0"/>
+          <a:lin ang="5400000" scaled="0"/>
         </a:gradFill>
       </a:fillStyleLst>
       <a:lnStyleLst>
-        <a:ln w="9525" cap="flat" cmpd="sng" algn="ctr">
+        <a:ln w="12700" cap="flat" cmpd="sng" algn="ctr">
           <a:solidFill>
-            <a:schemeClr val="phClr">
-              <a:shade val="95000"/>
-              <a:satMod val="105000"/>
-            </a:schemeClr>
+            <a:schemeClr val="phClr"/>
           </a:solidFill>
           <a:prstDash val="solid"/>
+          <a:miter lim="800000"/>
+        </a:ln>
+        <a:ln w="19050" cap="flat" cmpd="sng" algn="ctr">
+          <a:solidFill>
+            <a:schemeClr val="phClr"/>
+          </a:solidFill>
+          <a:prstDash val="solid"/>
+          <a:miter lim="800000"/>
         </a:ln>
         <a:ln w="25400" cap="flat" cmpd="sng" algn="ctr">
           <a:solidFill>
             <a:schemeClr val="phClr"/>
           </a:solidFill>
           <a:prstDash val="solid"/>
-        </a:ln>
-        <a:ln w="38100" cap="flat" cmpd="sng" algn="ctr">
-          <a:solidFill>
-            <a:schemeClr val="phClr"/>
-          </a:solidFill>
-          <a:prstDash val="solid"/>
+          <a:miter lim="800000"/>
         </a:ln>
       </a:lnStyleLst>
       <a:effectStyleLst>
         <a:effectStyle>
+          <a:effectLst/>
+        </a:effectStyle>
+        <a:effectStyle>
+          <a:effectLst/>
+        </a:effectStyle>
+        <a:effectStyle>
           <a:effectLst>
-            <a:outerShdw blurRad="40000" dist="20000" dir="5400000" rotWithShape="0">
+            <a:outerShdw blurRad="57150" dist="19050" dir="5400000" algn="ctr" rotWithShape="0">
               <a:srgbClr val="000000">
-                <a:alpha val="38000"/>
+                <a:alpha val="63000"/>
               </a:srgbClr>
             </a:outerShdw>
           </a:effectLst>
-        </a:effectStyle>
-        <a:effectStyle>
-          <a:effectLst>
-            <a:outerShdw blurRad="40000" dist="23000" dir="5400000" rotWithShape="0">
-              <a:srgbClr val="000000">
-                <a:alpha val="35000"/>
-              </a:srgbClr>
-            </a:outerShdw>
-          </a:effectLst>
-        </a:effectStyle>
-        <a:effectStyle>
-          <a:effectLst>
-            <a:outerShdw blurRad="40000" dist="23000" dir="5400000" rotWithShape="0">
-              <a:srgbClr val="000000">
-                <a:alpha val="35000"/>
-              </a:srgbClr>
-            </a:outerShdw>
-          </a:effectLst>
-          <a:scene3d>
-            <a:camera prst="orthographicFront">
-              <a:rot lat="0" lon="0" rev="0"/>
-            </a:camera>
-            <a:lightRig rig="threePt" dir="t">
-              <a:rot lat="0" lon="0" rev="1200000"/>
-            </a:lightRig>
-          </a:scene3d>
-          <a:sp3d>
-            <a:bevelT w="63500" h="25400"/>
-          </a:sp3d>
         </a:effectStyle>
       </a:effectStyleLst>
       <a:bgFillStyleLst>
         <a:solidFill>
           <a:schemeClr val="phClr"/>
         </a:solidFill>
+        <a:solidFill>
+          <a:schemeClr val="phClr">
+            <a:tint val="95000"/>
+            <a:satMod val="170000"/>
+          </a:schemeClr>
+        </a:solidFill>
         <a:gradFill rotWithShape="1">
           <a:gsLst>
             <a:gs pos="0">
               <a:schemeClr val="phClr">
-                <a:tint val="40000"/>
-                <a:satMod val="350000"/>
+                <a:tint val="93000"/>
+                <a:satMod val="150000"/>
+                <a:shade val="98000"/>
+                <a:lumMod val="102000"/>
               </a:schemeClr>
             </a:gs>
-            <a:gs pos="40000">
+            <a:gs pos="50000">
               <a:schemeClr val="phClr">
-                <a:tint val="45000"/>
-                <a:shade val="99000"/>
-                <a:satMod val="350000"/>
+                <a:tint val="98000"/>
+                <a:satMod val="130000"/>
+                <a:shade val="90000"/>
+                <a:lumMod val="103000"/>
               </a:schemeClr>
             </a:gs>
             <a:gs pos="100000">
               <a:schemeClr val="phClr">
-                <a:shade val="20000"/>
-                <a:satMod val="255000"/>
+                <a:shade val="63000"/>
+                <a:satMod val="120000"/>
               </a:schemeClr>
             </a:gs>
           </a:gsLst>
-          <a:path path="circle">
-            <a:fillToRect l="50000" t="-80000" r="50000" b="180000"/>
-          </a:path>
-        </a:gradFill>
-        <a:gradFill rotWithShape="1">
-          <a:gsLst>
-            <a:gs pos="0">
-              <a:schemeClr val="phClr">
-                <a:tint val="80000"/>
-                <a:satMod val="300000"/>
-              </a:schemeClr>
-            </a:gs>
-            <a:gs pos="100000">
-              <a:schemeClr val="phClr">
-                <a:shade val="30000"/>
-                <a:satMod val="200000"/>
-              </a:schemeClr>
-            </a:gs>
-          </a:gsLst>
-          <a:path path="circle">
-            <a:fillToRect l="50000" t="50000" r="50000" b="50000"/>
-          </a:path>
+          <a:lin ang="5400000" scaled="0"/>
         </a:gradFill>
       </a:bgFillStyleLst>
     </a:fmtScheme>
   </a:themeElements>
   <a:objectDefaults>
-    <a:spDef>
-      <a:spPr/>
-      <a:bodyPr/>
-      <a:lstStyle/>
-      <a:style>
-        <a:lnRef idx="1">
-          <a:schemeClr val="accent1"/>
-        </a:lnRef>
-        <a:fillRef idx="3">
-          <a:schemeClr val="accent1"/>
-        </a:fillRef>
-        <a:effectRef idx="2">
-          <a:schemeClr val="accent1"/>
-        </a:effectRef>
-        <a:fontRef idx="minor">
-          <a:schemeClr val="lt1"/>
-        </a:fontRef>
-      </a:style>
-    </a:spDef>
     <a:lnDef>
       <a:spPr/>
       <a:bodyPr/>
@@ -10810,5 +9872,10 @@
     </a:lnDef>
   </a:objectDefaults>
   <a:extraClrSchemeLst/>
+  <a:extLst>
+    <a:ext uri="{05A4C25C-085E-4340-85A3-A5531E510DB2}">
+      <thm15:themeFamily xmlns:thm15="http://schemas.microsoft.com/office/thememl/2012/main" name="Office Theme" id="{2E142A2C-CD16-42D6-873A-C26D2A0506FA}" vid="{1BDDFF52-6CD6-40A5-AB3C-68EB2F1E4D0A}"/>
+    </a:ext>
+  </a:extLst>
 </a:theme>
 </file>
--- a/slides.pptx
+++ b/slides.pptx
@@ -999,7 +999,7 @@
           <a:p>
             <a:fld id="{5BCAD085-E8A6-8845-BD4E-CB4CCA059FC4}" type="datetimeFigureOut">
               <a:rPr lang="en-US" smtClean="0"/>
-              <a:t>5/2/26</a:t>
+              <a:t>5/3/26</a:t>
             </a:fld>
             <a:endParaRPr lang="en-US"/>
           </a:p>
@@ -1167,7 +1167,7 @@
           <a:p>
             <a:fld id="{5BCAD085-E8A6-8845-BD4E-CB4CCA059FC4}" type="datetimeFigureOut">
               <a:rPr lang="en-US" smtClean="0"/>
-              <a:t>5/2/26</a:t>
+              <a:t>5/3/26</a:t>
             </a:fld>
             <a:endParaRPr lang="en-US"/>
           </a:p>
@@ -1345,7 +1345,7 @@
           <a:p>
             <a:fld id="{5BCAD085-E8A6-8845-BD4E-CB4CCA059FC4}" type="datetimeFigureOut">
               <a:rPr lang="en-US" smtClean="0"/>
-              <a:t>5/2/26</a:t>
+              <a:t>5/3/26</a:t>
             </a:fld>
             <a:endParaRPr lang="en-US"/>
           </a:p>
@@ -1513,7 +1513,7 @@
           <a:p>
             <a:fld id="{5BCAD085-E8A6-8845-BD4E-CB4CCA059FC4}" type="datetimeFigureOut">
               <a:rPr lang="en-US" smtClean="0"/>
-              <a:t>5/2/26</a:t>
+              <a:t>5/3/26</a:t>
             </a:fld>
             <a:endParaRPr lang="en-US"/>
           </a:p>
@@ -1758,7 +1758,7 @@
           <a:p>
             <a:fld id="{5BCAD085-E8A6-8845-BD4E-CB4CCA059FC4}" type="datetimeFigureOut">
               <a:rPr lang="en-US" smtClean="0"/>
-              <a:t>5/2/26</a:t>
+              <a:t>5/3/26</a:t>
             </a:fld>
             <a:endParaRPr lang="en-US"/>
           </a:p>
@@ -2043,7 +2043,7 @@
           <a:p>
             <a:fld id="{5BCAD085-E8A6-8845-BD4E-CB4CCA059FC4}" type="datetimeFigureOut">
               <a:rPr lang="en-US" smtClean="0"/>
-              <a:t>5/2/26</a:t>
+              <a:t>5/3/26</a:t>
             </a:fld>
             <a:endParaRPr lang="en-US"/>
           </a:p>
@@ -2462,7 +2462,7 @@
           <a:p>
             <a:fld id="{5BCAD085-E8A6-8845-BD4E-CB4CCA059FC4}" type="datetimeFigureOut">
               <a:rPr lang="en-US" smtClean="0"/>
-              <a:t>5/2/26</a:t>
+              <a:t>5/3/26</a:t>
             </a:fld>
             <a:endParaRPr lang="en-US"/>
           </a:p>
@@ -2579,7 +2579,7 @@
           <a:p>
             <a:fld id="{5BCAD085-E8A6-8845-BD4E-CB4CCA059FC4}" type="datetimeFigureOut">
               <a:rPr lang="en-US" smtClean="0"/>
-              <a:t>5/2/26</a:t>
+              <a:t>5/3/26</a:t>
             </a:fld>
             <a:endParaRPr lang="en-US"/>
           </a:p>
@@ -2674,7 +2674,7 @@
           <a:p>
             <a:fld id="{5BCAD085-E8A6-8845-BD4E-CB4CCA059FC4}" type="datetimeFigureOut">
               <a:rPr lang="en-US" smtClean="0"/>
-              <a:t>5/2/26</a:t>
+              <a:t>5/3/26</a:t>
             </a:fld>
             <a:endParaRPr lang="en-US"/>
           </a:p>
@@ -2949,7 +2949,7 @@
           <a:p>
             <a:fld id="{5BCAD085-E8A6-8845-BD4E-CB4CCA059FC4}" type="datetimeFigureOut">
               <a:rPr lang="en-US" smtClean="0"/>
-              <a:t>5/2/26</a:t>
+              <a:t>5/3/26</a:t>
             </a:fld>
             <a:endParaRPr lang="en-US"/>
           </a:p>
@@ -3201,7 +3201,7 @@
           <a:p>
             <a:fld id="{5BCAD085-E8A6-8845-BD4E-CB4CCA059FC4}" type="datetimeFigureOut">
               <a:rPr lang="en-US" smtClean="0"/>
-              <a:t>5/2/26</a:t>
+              <a:t>5/3/26</a:t>
             </a:fld>
             <a:endParaRPr lang="en-US"/>
           </a:p>
@@ -3478,7 +3478,7 @@
           <a:p>
             <a:fld id="{5BCAD085-E8A6-8845-BD4E-CB4CCA059FC4}" type="datetimeFigureOut">
               <a:rPr lang="en-US" smtClean="0"/>
-              <a:t>5/2/26</a:t>
+              <a:t>5/3/26</a:t>
             </a:fld>
             <a:endParaRPr lang="en-US"/>
           </a:p>
@@ -7632,7 +7632,7 @@
         </p:nvGraphicFramePr>
         <p:xfrm>
           <a:off x="548640" y="1554480"/>
-          <a:ext cx="11064240" cy="2857500"/>
+          <a:ext cx="11064240" cy="3025140"/>
         </p:xfrm>
         <a:graphic>
           <a:graphicData uri="http://schemas.openxmlformats.org/drawingml/2006/table">
@@ -7729,7 +7729,7 @@
                           </a:solidFill>
                         </a:rPr>
                         <a:t>Stage 2
-(un-prioritised hand)</a:t>
+(random sampling)</a:t>
                       </a:r>
                     </a:p>
                   </a:txBody>
@@ -7775,7 +7775,7 @@
                           </a:solidFill>
                         </a:rPr>
                         <a:t>Stage 4
-(cold-start AL)</a:t>
+(iterative AL · 4×14)</a:t>
                       </a:r>
                     </a:p>
                   </a:txBody>
@@ -7799,7 +7799,7 @@
                     <a:p>
                       <a:pPr algn="l"/>
                       <a:r>
-                        <a:rPr sz="1200">
+                        <a:rPr sz="1100" b="0">
                           <a:solidFill>
                             <a:srgbClr val="2A2A2A"/>
                           </a:solidFill>
@@ -7821,7 +7821,7 @@
                     <a:p>
                       <a:pPr algn="l"/>
                       <a:r>
-                        <a:rPr sz="1200">
+                        <a:rPr sz="1100" b="0">
                           <a:solidFill>
                             <a:srgbClr val="2A2A2A"/>
                           </a:solidFill>
@@ -7843,12 +7843,12 @@
                     <a:p>
                       <a:pPr algn="l"/>
                       <a:r>
-                        <a:rPr sz="1200">
+                        <a:rPr sz="1100" b="0">
                           <a:solidFill>
                             <a:srgbClr val="2A2A2A"/>
                           </a:solidFill>
                         </a:rPr>
-                        <a:t>annotator coverage</a:t>
+                        <a:t>uniform random</a:t>
                       </a:r>
                     </a:p>
                   </a:txBody>
@@ -7865,7 +7865,7 @@
                     <a:p>
                       <a:pPr algn="l"/>
                       <a:r>
-                        <a:rPr sz="1200">
+                        <a:rPr sz="1100" b="0">
                           <a:solidFill>
                             <a:srgbClr val="2A2A2A"/>
                           </a:solidFill>
@@ -7887,12 +7887,12 @@
                     <a:p>
                       <a:pPr algn="l"/>
                       <a:r>
-                        <a:rPr sz="1200">
+                        <a:rPr sz="1100" b="0">
                           <a:solidFill>
                             <a:srgbClr val="2A2A2A"/>
                           </a:solidFill>
                         </a:rPr>
-                        <a:t>pure feature diversity</a:t>
+                        <a:t>uncertainty × div., 4 rounds</a:t>
                       </a:r>
                     </a:p>
                   </a:txBody>
@@ -7916,12 +7916,12 @@
                     <a:p>
                       <a:pPr algn="l"/>
                       <a:r>
-                        <a:rPr sz="1200">
+                        <a:rPr sz="1100" b="0">
                           <a:solidFill>
                             <a:srgbClr val="2A2A2A"/>
                           </a:solidFill>
                         </a:rPr>
-                        <a:t>Pairwise (hp_v on 13)</a:t>
+                        <a:t>hp_val (val-map · 12 pairs)</a:t>
                       </a:r>
                     </a:p>
                   </a:txBody>
@@ -7938,12 +7938,12 @@
                     <a:p>
                       <a:pPr algn="l"/>
                       <a:r>
-                        <a:rPr sz="1200">
+                        <a:rPr sz="1100" b="0">
                           <a:solidFill>
                             <a:srgbClr val="2A2A2A"/>
                           </a:solidFill>
                         </a:rPr>
-                        <a:t>0.615</a:t>
+                        <a:t>0.417 (5/12)</a:t>
                       </a:r>
                     </a:p>
                   </a:txBody>
@@ -7960,12 +7960,12 @@
                     <a:p>
                       <a:pPr algn="l"/>
                       <a:r>
-                        <a:rPr sz="1200">
+                        <a:rPr sz="1100" b="0">
                           <a:solidFill>
                             <a:srgbClr val="2A2A2A"/>
                           </a:solidFill>
                         </a:rPr>
-                        <a:t>0.846</a:t>
+                        <a:t>0.417 (5/12)</a:t>
                       </a:r>
                     </a:p>
                   </a:txBody>
@@ -7982,12 +7982,12 @@
                     <a:p>
                       <a:pPr algn="l"/>
                       <a:r>
-                        <a:rPr sz="1200">
+                        <a:rPr sz="1100" b="1">
                           <a:solidFill>
-                            <a:srgbClr val="2A2A2A"/>
+                            <a:srgbClr val="C0392B"/>
                           </a:solidFill>
                         </a:rPr>
-                        <a:t>[PENDING]</a:t>
+                        <a:t>0.583 (7/12)</a:t>
                       </a:r>
                     </a:p>
                   </a:txBody>
@@ -8004,12 +8004,12 @@
                     <a:p>
                       <a:pPr algn="l"/>
                       <a:r>
-                        <a:rPr sz="1200">
+                        <a:rPr sz="1100" b="1">
                           <a:solidFill>
-                            <a:srgbClr val="2A2A2A"/>
+                            <a:srgbClr val="C0392B"/>
                           </a:solidFill>
                         </a:rPr>
-                        <a:t>[PENDING]</a:t>
+                        <a:t>0.583 (7/12)</a:t>
                       </a:r>
                     </a:p>
                   </a:txBody>
@@ -8033,12 +8033,12 @@
                     <a:p>
                       <a:pPr algn="l"/>
                       <a:r>
-                        <a:rPr sz="1200">
+                        <a:rPr sz="1100" b="0">
                           <a:solidFill>
                             <a:srgbClr val="2A2A2A"/>
                           </a:solidFill>
                         </a:rPr>
-                        <a:t>Exact-match (h-arg top-1, 13)</a:t>
+                        <a:t>DDG argmax_pm1 (val maps 144-147)</a:t>
                       </a:r>
                     </a:p>
                   </a:txBody>
@@ -8055,12 +8055,12 @@
                     <a:p>
                       <a:pPr algn="l"/>
                       <a:r>
-                        <a:rPr sz="1200">
+                        <a:rPr sz="1100" b="0">
                           <a:solidFill>
                             <a:srgbClr val="2A2A2A"/>
                           </a:solidFill>
                         </a:rPr>
-                        <a:t>0.538</a:t>
+                        <a:t>0.565</a:t>
                       </a:r>
                     </a:p>
                   </a:txBody>
@@ -8077,12 +8077,12 @@
                     <a:p>
                       <a:pPr algn="l"/>
                       <a:r>
-                        <a:rPr sz="1200">
+                        <a:rPr sz="1100" b="0">
                           <a:solidFill>
                             <a:srgbClr val="2A2A2A"/>
                           </a:solidFill>
                         </a:rPr>
-                        <a:t>0.615</a:t>
+                        <a:t>0.556</a:t>
                       </a:r>
                     </a:p>
                   </a:txBody>
@@ -8099,12 +8099,12 @@
                     <a:p>
                       <a:pPr algn="l"/>
                       <a:r>
-                        <a:rPr sz="1200">
+                        <a:rPr sz="1100" b="0">
                           <a:solidFill>
                             <a:srgbClr val="2A2A2A"/>
                           </a:solidFill>
                         </a:rPr>
-                        <a:t>[PENDING]</a:t>
+                        <a:t>0.562</a:t>
                       </a:r>
                     </a:p>
                   </a:txBody>
@@ -8121,12 +8121,12 @@
                     <a:p>
                       <a:pPr algn="l"/>
                       <a:r>
-                        <a:rPr sz="1200">
+                        <a:rPr sz="1100" b="0">
                           <a:solidFill>
                             <a:srgbClr val="2A2A2A"/>
                           </a:solidFill>
                         </a:rPr>
-                        <a:t>[PENDING]</a:t>
+                        <a:t>0.541</a:t>
                       </a:r>
                     </a:p>
                   </a:txBody>
@@ -8150,12 +8150,12 @@
                     <a:p>
                       <a:pPr algn="l"/>
                       <a:r>
-                        <a:rPr sz="1200">
+                        <a:rPr sz="1100" b="0">
                           <a:solidFill>
                             <a:srgbClr val="2A2A2A"/>
                           </a:solidFill>
                         </a:rPr>
-                        <a:t>DDG argmax_pm1 (auto val)</a:t>
+                        <a:t>best round (Stage 4 only)</a:t>
                       </a:r>
                     </a:p>
                   </a:txBody>
@@ -8172,12 +8172,12 @@
                     <a:p>
                       <a:pPr algn="l"/>
                       <a:r>
-                        <a:rPr sz="1200">
+                        <a:rPr sz="1100" b="0">
                           <a:solidFill>
                             <a:srgbClr val="2A2A2A"/>
                           </a:solidFill>
                         </a:rPr>
-                        <a:t>0.550</a:t>
+                        <a:t>—</a:t>
                       </a:r>
                     </a:p>
                   </a:txBody>
@@ -8194,12 +8194,12 @@
                     <a:p>
                       <a:pPr algn="l"/>
                       <a:r>
-                        <a:rPr sz="1200">
+                        <a:rPr sz="1100" b="0">
                           <a:solidFill>
                             <a:srgbClr val="2A2A2A"/>
                           </a:solidFill>
                         </a:rPr>
-                        <a:t>0.541</a:t>
+                        <a:t>—</a:t>
                       </a:r>
                     </a:p>
                   </a:txBody>
@@ -8216,12 +8216,12 @@
                     <a:p>
                       <a:pPr algn="l"/>
                       <a:r>
-                        <a:rPr sz="1200">
+                        <a:rPr sz="1100" b="0">
                           <a:solidFill>
                             <a:srgbClr val="2A2A2A"/>
                           </a:solidFill>
                         </a:rPr>
-                        <a:t>[PENDING]</a:t>
+                        <a:t>—</a:t>
                       </a:r>
                     </a:p>
                   </a:txBody>
@@ -8238,12 +8238,12 @@
                     <a:p>
                       <a:pPr algn="l"/>
                       <a:r>
-                        <a:rPr sz="1200">
+                        <a:rPr sz="1100" b="0">
                           <a:solidFill>
                             <a:srgbClr val="2A2A2A"/>
                           </a:solidFill>
                         </a:rPr>
-                        <a:t>[PENDING]</a:t>
+                        <a:t>round 3 (pm1=0.565, hp_val=0.583)</a:t>
                       </a:r>
                     </a:p>
                   </a:txBody>
@@ -8267,12 +8267,12 @@
                     <a:p>
                       <a:pPr algn="l"/>
                       <a:r>
-                        <a:rPr sz="1200">
+                        <a:rPr sz="1100" b="0">
                           <a:solidFill>
                             <a:srgbClr val="2A2A2A"/>
                           </a:solidFill>
                         </a:rPr>
-                        <a:t>DDG top-3 (auto val)</a:t>
+                        <a:t>Train labels used</a:t>
                       </a:r>
                     </a:p>
                   </a:txBody>
@@ -8289,12 +8289,12 @@
                     <a:p>
                       <a:pPr algn="l"/>
                       <a:r>
-                        <a:rPr sz="1200">
+                        <a:rPr sz="1100" b="0">
                           <a:solidFill>
                             <a:srgbClr val="2A2A2A"/>
                           </a:solidFill>
                         </a:rPr>
-                        <a:t>0.578</a:t>
+                        <a:t>0</a:t>
                       </a:r>
                     </a:p>
                   </a:txBody>
@@ -8311,12 +8311,12 @@
                     <a:p>
                       <a:pPr algn="l"/>
                       <a:r>
-                        <a:rPr sz="1200">
+                        <a:rPr sz="1100" b="0">
                           <a:solidFill>
                             <a:srgbClr val="2A2A2A"/>
                           </a:solidFill>
                         </a:rPr>
-                        <a:t>0.559</a:t>
+                        <a:t>56 (random)</a:t>
                       </a:r>
                     </a:p>
                   </a:txBody>
@@ -8333,12 +8333,12 @@
                     <a:p>
                       <a:pPr algn="l"/>
                       <a:r>
-                        <a:rPr sz="1200">
+                        <a:rPr sz="1100" b="0">
                           <a:solidFill>
                             <a:srgbClr val="2A2A2A"/>
                           </a:solidFill>
                         </a:rPr>
-                        <a:t>[PENDING]</a:t>
+                        <a:t>56 (pool AL)</a:t>
                       </a:r>
                     </a:p>
                   </a:txBody>
@@ -8355,12 +8355,12 @@
                     <a:p>
                       <a:pPr algn="l"/>
                       <a:r>
-                        <a:rPr sz="1200">
+                        <a:rPr sz="1100" b="0">
                           <a:solidFill>
                             <a:srgbClr val="2A2A2A"/>
                           </a:solidFill>
                         </a:rPr>
-                        <a:t>[PENDING]</a:t>
+                        <a:t>4 × 14 (iter AL)</a:t>
                       </a:r>
                     </a:p>
                   </a:txBody>
@@ -8384,7 +8384,7 @@
                     <a:p>
                       <a:pPr algn="l"/>
                       <a:r>
-                        <a:rPr sz="1200">
+                        <a:rPr sz="1100" b="0">
                           <a:solidFill>
                             <a:srgbClr val="2A2A2A"/>
                           </a:solidFill>
@@ -8406,7 +8406,7 @@
                     <a:p>
                       <a:pPr algn="l"/>
                       <a:r>
-                        <a:rPr sz="1200">
+                        <a:rPr sz="1100" b="0">
                           <a:solidFill>
                             <a:srgbClr val="2A2A2A"/>
                           </a:solidFill>
@@ -8428,7 +8428,7 @@
                     <a:p>
                       <a:pPr algn="l"/>
                       <a:r>
-                        <a:rPr sz="1200">
+                        <a:rPr sz="1100" b="0">
                           <a:solidFill>
                             <a:srgbClr val="2A2A2A"/>
                           </a:solidFill>
@@ -8450,7 +8450,7 @@
                     <a:p>
                       <a:pPr algn="l"/>
                       <a:r>
-                        <a:rPr sz="1200">
+                        <a:rPr sz="1100" b="0">
                           <a:solidFill>
                             <a:srgbClr val="2A2A2A"/>
                           </a:solidFill>
@@ -8472,12 +8472,12 @@
                     <a:p>
                       <a:pPr algn="l"/>
                       <a:r>
-                        <a:rPr sz="1200">
+                        <a:rPr sz="1100" b="0">
                           <a:solidFill>
                             <a:srgbClr val="2A2A2A"/>
                           </a:solidFill>
                         </a:rPr>
-                        <a:t>≈3</a:t>
+                        <a:t>≈3 (split across rounds)</a:t>
                       </a:r>
                     </a:p>
                   </a:txBody>
@@ -8501,12 +8501,12 @@
                     <a:p>
                       <a:pPr algn="l"/>
                       <a:r>
-                        <a:rPr sz="1200">
+                        <a:rPr sz="1100" b="0">
                           <a:solidFill>
                             <a:srgbClr val="2A2A2A"/>
                           </a:solidFill>
                         </a:rPr>
-                        <a:t>Distinct episodes labelled</a:t>
+                        <a:t>Distinct episodes</a:t>
                       </a:r>
                     </a:p>
                   </a:txBody>
@@ -8523,7 +8523,7 @@
                     <a:p>
                       <a:pPr algn="l"/>
                       <a:r>
-                        <a:rPr sz="1200">
+                        <a:rPr sz="1100" b="0">
                           <a:solidFill>
                             <a:srgbClr val="2A2A2A"/>
                           </a:solidFill>
@@ -8545,12 +8545,12 @@
                     <a:p>
                       <a:pPr algn="l"/>
                       <a:r>
-                        <a:rPr sz="1200">
+                        <a:rPr sz="1100" b="0">
                           <a:solidFill>
                             <a:srgbClr val="2A2A2A"/>
                           </a:solidFill>
                         </a:rPr>
-                        <a:t>28</a:t>
+                        <a:t>≤56 (no cap)</a:t>
                       </a:r>
                     </a:p>
                   </a:txBody>
@@ -8567,12 +8567,12 @@
                     <a:p>
                       <a:pPr algn="l"/>
                       <a:r>
-                        <a:rPr sz="1200">
+                        <a:rPr sz="1100" b="0">
                           <a:solidFill>
                             <a:srgbClr val="2A2A2A"/>
                           </a:solidFill>
                         </a:rPr>
-                        <a:t>≤28 (cap)</a:t>
+                        <a:t>≤28 (cap=2)</a:t>
                       </a:r>
                     </a:p>
                   </a:txBody>
@@ -8589,12 +8589,12 @@
                     <a:p>
                       <a:pPr algn="l"/>
                       <a:r>
-                        <a:rPr sz="1200">
+                        <a:rPr sz="1100" b="0">
                           <a:solidFill>
                             <a:srgbClr val="2A2A2A"/>
                           </a:solidFill>
                         </a:rPr>
-                        <a:t>≤28 (cap)</a:t>
+                        <a:t>≤28 (cap=2)</a:t>
                       </a:r>
                     </a:p>
                   </a:txBody>
@@ -8656,7 +8656,7 @@
         <p:spPr>
           <a:xfrm>
             <a:off x="548640" y="4800600"/>
-            <a:ext cx="11064240" cy="359522"/>
+            <a:ext cx="11064240" cy="2030556"/>
           </a:xfrm>
           <a:prstGeom prst="rect">
             <a:avLst/>
@@ -8671,22 +8671,182 @@
           <a:p>
             <a:pPr>
               <a:lnSpc>
-                <a:spcPct val="125000"/>
+                <a:spcPct val="130000"/>
               </a:lnSpc>
             </a:pPr>
             <a:r>
-              <a:rPr lang="en-US" sz="1500" b="0" dirty="0">
+              <a:rPr sz="1400" dirty="0">
                 <a:solidFill>
                   <a:srgbClr val="2A2A2A"/>
                 </a:solidFill>
               </a:rPr>
-              <a:t>[FILL IN with 2-3 takeaways]</a:t>
+              <a:t>• </a:t>
+            </a:r>
+            <a:r>
+              <a:rPr sz="1400" b="0" dirty="0">
+                <a:solidFill>
+                  <a:srgbClr val="2A2A2A"/>
+                </a:solidFill>
+              </a:rPr>
+              <a:t>Random sampling at fixed budget gives </a:t>
+            </a:r>
+            <a:r>
+              <a:rPr sz="1400" b="1" dirty="0">
+                <a:solidFill>
+                  <a:srgbClr val="C0392B"/>
+                </a:solidFill>
+              </a:rPr>
+              <a:t>zero lift</a:t>
+            </a:r>
+            <a:r>
+              <a:rPr sz="1400" b="0" dirty="0">
+                <a:solidFill>
+                  <a:srgbClr val="2A2A2A"/>
+                </a:solidFill>
+              </a:rPr>
+              <a:t> over auto-only on </a:t>
+            </a:r>
+            <a:r>
+              <a:rPr sz="1400" b="0" dirty="0" err="1">
+                <a:solidFill>
+                  <a:srgbClr val="2A2A2A"/>
+                </a:solidFill>
+              </a:rPr>
+              <a:t>hp_val</a:t>
+            </a:r>
+            <a:r>
+              <a:rPr sz="1400" b="0" dirty="0">
+                <a:solidFill>
+                  <a:srgbClr val="2A2A2A"/>
+                </a:solidFill>
+              </a:rPr>
+              <a:t> (Stage 2 = Stage 1 = 0.417). Just adding human labels without selection priority is not enough.</a:t>
             </a:r>
             <a:endParaRPr sz="1500" b="0" dirty="0">
               <a:solidFill>
                 <a:srgbClr val="2A2A2A"/>
               </a:solidFill>
             </a:endParaRPr>
+          </a:p>
+          <a:p>
+            <a:pPr>
+              <a:lnSpc>
+                <a:spcPct val="130000"/>
+              </a:lnSpc>
+            </a:pPr>
+            <a:r>
+              <a:rPr sz="1400" dirty="0">
+                <a:solidFill>
+                  <a:srgbClr val="2A2A2A"/>
+                </a:solidFill>
+              </a:rPr>
+              <a:t>• </a:t>
+            </a:r>
+            <a:r>
+              <a:rPr sz="1400" b="0" dirty="0">
+                <a:solidFill>
+                  <a:srgbClr val="2A2A2A"/>
+                </a:solidFill>
+              </a:rPr>
+              <a:t>AL with uncertainty × diversity selection: </a:t>
+            </a:r>
+            <a:r>
+              <a:rPr sz="1400" b="1" dirty="0">
+                <a:solidFill>
+                  <a:srgbClr val="C0392B"/>
+                </a:solidFill>
+              </a:rPr>
+              <a:t>+17 pp on </a:t>
+            </a:r>
+            <a:r>
+              <a:rPr sz="1400" b="1" dirty="0" err="1">
+                <a:solidFill>
+                  <a:srgbClr val="C0392B"/>
+                </a:solidFill>
+              </a:rPr>
+              <a:t>hp_val</a:t>
+            </a:r>
+            <a:r>
+              <a:rPr sz="1400" b="0" dirty="0">
+                <a:solidFill>
+                  <a:srgbClr val="2A2A2A"/>
+                </a:solidFill>
+              </a:rPr>
+              <a:t> over random (5/12 → 7/12) at the same 56-label budget. Selection strategy matters more than label volume.</a:t>
+            </a:r>
+          </a:p>
+          <a:p>
+            <a:pPr>
+              <a:lnSpc>
+                <a:spcPct val="130000"/>
+              </a:lnSpc>
+            </a:pPr>
+            <a:r>
+              <a:rPr sz="1400" dirty="0">
+                <a:solidFill>
+                  <a:srgbClr val="2A2A2A"/>
+                </a:solidFill>
+              </a:rPr>
+              <a:t>• </a:t>
+            </a:r>
+            <a:r>
+              <a:rPr sz="1400" b="1" dirty="0">
+                <a:solidFill>
+                  <a:srgbClr val="2A2A2A"/>
+                </a:solidFill>
+              </a:rPr>
+              <a:t>Iterative AL ≈ single-shot AL</a:t>
+            </a:r>
+            <a:r>
+              <a:rPr sz="1400" b="0" dirty="0">
+                <a:solidFill>
+                  <a:srgbClr val="2A2A2A"/>
+                </a:solidFill>
+              </a:rPr>
+              <a:t> at this budget. 4 rounds of 14 labels with model retrained between matches one batch of 56. Engineering the loop did not pay off here.</a:t>
+            </a:r>
+          </a:p>
+          <a:p>
+            <a:pPr>
+              <a:lnSpc>
+                <a:spcPct val="130000"/>
+              </a:lnSpc>
+            </a:pPr>
+            <a:r>
+              <a:rPr sz="1400" dirty="0">
+                <a:solidFill>
+                  <a:srgbClr val="2A2A2A"/>
+                </a:solidFill>
+              </a:rPr>
+              <a:t>• </a:t>
+            </a:r>
+            <a:r>
+              <a:rPr sz="1400" b="0" dirty="0">
+                <a:solidFill>
+                  <a:srgbClr val="2A2A2A"/>
+                </a:solidFill>
+              </a:rPr>
+              <a:t>DDG-aligned ranking </a:t>
+            </a:r>
+            <a:r>
+              <a:rPr sz="1400" b="1" dirty="0">
+                <a:solidFill>
+                  <a:srgbClr val="2A2A2A"/>
+                </a:solidFill>
+                <a:highlight>
+                  <a:srgbClr val="FFFBCC"/>
+                </a:highlight>
+              </a:rPr>
+              <a:t>preserved</a:t>
+            </a:r>
+            <a:r>
+              <a:rPr sz="1400" b="0" dirty="0">
+                <a:solidFill>
+                  <a:srgbClr val="2A2A2A"/>
+                </a:solidFill>
+              </a:rPr>
+              <a:t> across all four stages: argmax_pm1 ∈ [0.541, 0.565].</a:t>
+            </a:r>
           </a:p>
         </p:txBody>
       </p:sp>

--- a/slides.pptx
+++ b/slides.pptx
@@ -5,7 +5,7 @@
     <p:sldMasterId id="2147483648" r:id="rId1"/>
   </p:sldMasterIdLst>
   <p:notesMasterIdLst>
-    <p:notesMasterId r:id="rId12"/>
+    <p:notesMasterId r:id="rId13"/>
   </p:notesMasterIdLst>
   <p:sldIdLst>
     <p:sldId id="256" r:id="rId2"/>
@@ -13,11 +13,12 @@
     <p:sldId id="258" r:id="rId4"/>
     <p:sldId id="259" r:id="rId5"/>
     <p:sldId id="260" r:id="rId6"/>
-    <p:sldId id="261" r:id="rId7"/>
-    <p:sldId id="266" r:id="rId8"/>
+    <p:sldId id="266" r:id="rId7"/>
+    <p:sldId id="268" r:id="rId8"/>
     <p:sldId id="262" r:id="rId9"/>
     <p:sldId id="263" r:id="rId10"/>
     <p:sldId id="267" r:id="rId11"/>
+    <p:sldId id="261" r:id="rId12"/>
   </p:sldIdLst>
   <p:sldSz cx="12192000" cy="6858000"/>
   <p:notesSz cx="6858000" cy="9144000"/>
@@ -655,7 +656,7 @@
           <a:lstStyle/>
           <a:p>
             <a:r>
-              <a:t>[Isabel, ~45s] Lead with the top two table rows — those are the headline. Then point at the figure: same data, different views. End on the walk-away: NO auto cost. That sells the override-don't-augment design.</a:t>
+              <a:t>[Isabel, ~35s] This is the slide that frames our depth contribution. Walk down the columns — Stages 3 and 4 share the same 56-label budget as Stage 2 and only the acquisition rule differs. Stages 3 &amp; 4 are still being collected, but the framework itself is the contribution: any ordering of the [PENDING] cells answers a substantive AL-design question. Once we have the numbers, we can update this single slide in PowerPoint and the whole story crystallises.</a:t>
             </a:r>
           </a:p>
         </p:txBody>
@@ -725,7 +726,7 @@
           <a:lstStyle/>
           <a:p>
             <a:r>
-              <a:t>[Isabel, ~35s] This is the slide that frames our depth contribution. Walk down the columns — Stages 3 and 4 share the same 56-label budget as Stage 2 and only the acquisition rule differs. Stages 3 &amp; 4 are still being collected, but the framework itself is the contribution: any ordering of the [PENDING] cells answers a substantive AL-design question. Once we have the numbers, we can update this single slide in PowerPoint and the whole story crystallises.</a:t>
+              <a:t>[Isabel, ~25s] Three walk-aways, three honest limitations. Don't oversell — the audience respects the variance disclosure. Land softly to invite Q&amp;A.</a:t>
             </a:r>
           </a:p>
         </p:txBody>
@@ -795,7 +796,7 @@
           <a:lstStyle/>
           <a:p>
             <a:r>
-              <a:t>[Isabel, ~25s] Three walk-aways, three honest limitations. Don't oversell — the audience respects the variance disclosure. Land softly to invite Q&amp;A.</a:t>
+              <a:t>[Isabel, ~45s] Lead with the top two table rows — those are the headline. Then point at the figure: same data, different views. End on the walk-away: NO auto cost. That sells the override-don't-augment design.</a:t>
             </a:r>
           </a:p>
         </p:txBody>
@@ -4182,6 +4183,890 @@
 </p:sld>
 </file>
 
+<file path=ppt/slides/slide11.xml><?xml version="1.0" encoding="utf-8"?>
+<p:sld xmlns:a="http://schemas.openxmlformats.org/drawingml/2006/main" xmlns:r="http://schemas.openxmlformats.org/officeDocument/2006/relationships" xmlns:p="http://schemas.openxmlformats.org/presentationml/2006/main" show="0">
+  <p:cSld>
+    <p:spTree>
+      <p:nvGrpSpPr>
+        <p:cNvPr id="1" name=""/>
+        <p:cNvGrpSpPr/>
+        <p:nvPr/>
+      </p:nvGrpSpPr>
+      <p:grpSpPr>
+        <a:xfrm>
+          <a:off x="0" y="0"/>
+          <a:ext cx="0" cy="0"/>
+          <a:chOff x="0" y="0"/>
+          <a:chExt cx="0" cy="0"/>
+        </a:xfrm>
+      </p:grpSpPr>
+      <p:sp>
+        <p:nvSpPr>
+          <p:cNvPr id="2" name="TextBox 1"/>
+          <p:cNvSpPr txBox="1"/>
+          <p:nvPr/>
+        </p:nvSpPr>
+        <p:spPr>
+          <a:xfrm>
+            <a:off x="548640" y="365760"/>
+            <a:ext cx="10972800" cy="640080"/>
+          </a:xfrm>
+          <a:prstGeom prst="rect">
+            <a:avLst/>
+          </a:prstGeom>
+          <a:noFill/>
+        </p:spPr>
+        <p:txBody>
+          <a:bodyPr wrap="square" anchor="t">
+            <a:spAutoFit/>
+          </a:bodyPr>
+          <a:lstStyle/>
+          <a:p>
+            <a:pPr algn="l"/>
+            <a:r>
+              <a:rPr sz="3000" b="1" dirty="0">
+                <a:solidFill>
+                  <a:srgbClr val="1F2E55"/>
+                </a:solidFill>
+              </a:rPr>
+              <a:t>Results: hand-curation lifts every gold-label metric</a:t>
+            </a:r>
+          </a:p>
+        </p:txBody>
+      </p:sp>
+      <p:sp>
+        <p:nvSpPr>
+          <p:cNvPr id="3" name="TextBox 2"/>
+          <p:cNvSpPr txBox="1"/>
+          <p:nvPr/>
+        </p:nvSpPr>
+        <p:spPr>
+          <a:xfrm>
+            <a:off x="548640" y="1097280"/>
+            <a:ext cx="11064240" cy="365760"/>
+          </a:xfrm>
+          <a:prstGeom prst="rect">
+            <a:avLst/>
+          </a:prstGeom>
+          <a:noFill/>
+        </p:spPr>
+        <p:txBody>
+          <a:bodyPr wrap="square" anchor="t">
+            <a:spAutoFit/>
+          </a:bodyPr>
+          <a:lstStyle/>
+          <a:p>
+            <a:pPr algn="l"/>
+            <a:r>
+              <a:rPr sz="1500" b="1" dirty="0">
+                <a:solidFill>
+                  <a:srgbClr val="555555"/>
+                </a:solidFill>
+              </a:rPr>
+              <a:t>On the same 13 held-out human pairs · best checkpoint per stage</a:t>
+            </a:r>
+          </a:p>
+        </p:txBody>
+      </p:sp>
+      <p:graphicFrame>
+        <p:nvGraphicFramePr>
+          <p:cNvPr id="4" name="Table 3"/>
+          <p:cNvGraphicFramePr>
+            <a:graphicFrameLocks noGrp="1"/>
+          </p:cNvGraphicFramePr>
+          <p:nvPr>
+            <p:extLst>
+              <p:ext uri="{D42A27DB-BD31-4B8C-83A1-F6EECF244321}">
+                <p14:modId xmlns:p14="http://schemas.microsoft.com/office/powerpoint/2010/main" val="876351334"/>
+              </p:ext>
+            </p:extLst>
+          </p:nvPr>
+        </p:nvGraphicFramePr>
+        <p:xfrm>
+          <a:off x="548640" y="1554480"/>
+          <a:ext cx="6858000" cy="2548128"/>
+        </p:xfrm>
+        <a:graphic>
+          <a:graphicData uri="http://schemas.openxmlformats.org/drawingml/2006/table">
+            <a:tbl>
+              <a:tblPr firstRow="1" bandRow="1">
+                <a:tableStyleId>{5C22544A-7EE6-4342-B048-85BDC9FD1C3A}</a:tableStyleId>
+              </a:tblPr>
+              <a:tblGrid>
+                <a:gridCol w="2340334">
+                  <a:extLst>
+                    <a:ext uri="{9D8B030D-6E8A-4147-A177-3AD203B41FA5}">
+                      <a16:colId xmlns:a16="http://schemas.microsoft.com/office/drawing/2014/main" val="20000"/>
+                    </a:ext>
+                  </a:extLst>
+                </a:gridCol>
+                <a:gridCol w="1088666">
+                  <a:extLst>
+                    <a:ext uri="{9D8B030D-6E8A-4147-A177-3AD203B41FA5}">
+                      <a16:colId xmlns:a16="http://schemas.microsoft.com/office/drawing/2014/main" val="20001"/>
+                    </a:ext>
+                  </a:extLst>
+                </a:gridCol>
+                <a:gridCol w="1714500">
+                  <a:extLst>
+                    <a:ext uri="{9D8B030D-6E8A-4147-A177-3AD203B41FA5}">
+                      <a16:colId xmlns:a16="http://schemas.microsoft.com/office/drawing/2014/main" val="20002"/>
+                    </a:ext>
+                  </a:extLst>
+                </a:gridCol>
+                <a:gridCol w="1714500">
+                  <a:extLst>
+                    <a:ext uri="{9D8B030D-6E8A-4147-A177-3AD203B41FA5}">
+                      <a16:colId xmlns:a16="http://schemas.microsoft.com/office/drawing/2014/main" val="20003"/>
+                    </a:ext>
+                  </a:extLst>
+                </a:gridCol>
+              </a:tblGrid>
+              <a:tr h="475488">
+                <a:tc>
+                  <a:txBody>
+                    <a:bodyPr/>
+                    <a:lstStyle/>
+                    <a:p>
+                      <a:pPr algn="l"/>
+                      <a:r>
+                        <a:rPr sz="1400" b="1" dirty="0">
+                          <a:solidFill>
+                            <a:srgbClr val="1F2E55"/>
+                          </a:solidFill>
+                        </a:rPr>
+                        <a:t>Metric</a:t>
+                      </a:r>
+                    </a:p>
+                  </a:txBody>
+                  <a:tcPr>
+                    <a:solidFill>
+                      <a:srgbClr val="E8EEF5"/>
+                    </a:solidFill>
+                  </a:tcPr>
+                </a:tc>
+                <a:tc>
+                  <a:txBody>
+                    <a:bodyPr/>
+                    <a:lstStyle/>
+                    <a:p>
+                      <a:pPr algn="l"/>
+                      <a:r>
+                        <a:rPr sz="1400" b="1">
+                          <a:solidFill>
+                            <a:srgbClr val="1F2E55"/>
+                          </a:solidFill>
+                        </a:rPr>
+                        <a:t>Stage 1 (auto only)</a:t>
+                      </a:r>
+                    </a:p>
+                  </a:txBody>
+                  <a:tcPr>
+                    <a:solidFill>
+                      <a:srgbClr val="E8EEF5"/>
+                    </a:solidFill>
+                  </a:tcPr>
+                </a:tc>
+                <a:tc>
+                  <a:txBody>
+                    <a:bodyPr/>
+                    <a:lstStyle/>
+                    <a:p>
+                      <a:pPr algn="l"/>
+                      <a:r>
+                        <a:rPr sz="1400" b="1">
+                          <a:solidFill>
+                            <a:srgbClr val="1F2E55"/>
+                          </a:solidFill>
+                        </a:rPr>
+                        <a:t>Stage 2 (+39 human)</a:t>
+                      </a:r>
+                    </a:p>
+                  </a:txBody>
+                  <a:tcPr>
+                    <a:solidFill>
+                      <a:srgbClr val="E8EEF5"/>
+                    </a:solidFill>
+                  </a:tcPr>
+                </a:tc>
+                <a:tc>
+                  <a:txBody>
+                    <a:bodyPr/>
+                    <a:lstStyle/>
+                    <a:p>
+                      <a:pPr algn="l"/>
+                      <a:r>
+                        <a:rPr sz="1400" b="1">
+                          <a:solidFill>
+                            <a:srgbClr val="1F2E55"/>
+                          </a:solidFill>
+                        </a:rPr>
+                        <a:t>Δ</a:t>
+                      </a:r>
+                    </a:p>
+                  </a:txBody>
+                  <a:tcPr>
+                    <a:solidFill>
+                      <a:srgbClr val="E8EEF5"/>
+                    </a:solidFill>
+                  </a:tcPr>
+                </a:tc>
+                <a:extLst>
+                  <a:ext uri="{0D108BD9-81ED-4DB2-BD59-A6C34878D82A}">
+                    <a16:rowId xmlns:a16="http://schemas.microsoft.com/office/drawing/2014/main" val="10000"/>
+                  </a:ext>
+                </a:extLst>
+              </a:tr>
+              <a:tr h="475488">
+                <a:tc>
+                  <a:txBody>
+                    <a:bodyPr/>
+                    <a:lstStyle/>
+                    <a:p>
+                      <a:pPr algn="l"/>
+                      <a:r>
+                        <a:rPr sz="1400">
+                          <a:solidFill>
+                            <a:srgbClr val="2A2A2A"/>
+                          </a:solidFill>
+                        </a:rPr>
+                        <a:t>Pairwise (hp_v on 13)</a:t>
+                      </a:r>
+                    </a:p>
+                  </a:txBody>
+                  <a:tcPr>
+                    <a:solidFill>
+                      <a:srgbClr val="FFFFFF"/>
+                    </a:solidFill>
+                  </a:tcPr>
+                </a:tc>
+                <a:tc>
+                  <a:txBody>
+                    <a:bodyPr/>
+                    <a:lstStyle/>
+                    <a:p>
+                      <a:pPr algn="l"/>
+                      <a:r>
+                        <a:rPr sz="1400">
+                          <a:solidFill>
+                            <a:srgbClr val="2A2A2A"/>
+                          </a:solidFill>
+                        </a:rPr>
+                        <a:t>0.615  (8/13)</a:t>
+                      </a:r>
+                    </a:p>
+                  </a:txBody>
+                  <a:tcPr>
+                    <a:solidFill>
+                      <a:srgbClr val="FFFFFF"/>
+                    </a:solidFill>
+                  </a:tcPr>
+                </a:tc>
+                <a:tc>
+                  <a:txBody>
+                    <a:bodyPr/>
+                    <a:lstStyle/>
+                    <a:p>
+                      <a:pPr algn="l"/>
+                      <a:r>
+                        <a:rPr sz="1400" b="1">
+                          <a:solidFill>
+                            <a:srgbClr val="C0392B"/>
+                          </a:solidFill>
+                        </a:rPr>
+                        <a:t>0.846  (11/13)</a:t>
+                      </a:r>
+                    </a:p>
+                  </a:txBody>
+                  <a:tcPr>
+                    <a:solidFill>
+                      <a:srgbClr val="FFFFFF"/>
+                    </a:solidFill>
+                  </a:tcPr>
+                </a:tc>
+                <a:tc>
+                  <a:txBody>
+                    <a:bodyPr/>
+                    <a:lstStyle/>
+                    <a:p>
+                      <a:pPr algn="l"/>
+                      <a:r>
+                        <a:rPr sz="1400" b="1">
+                          <a:solidFill>
+                            <a:srgbClr val="C0392B"/>
+                          </a:solidFill>
+                        </a:rPr>
+                        <a:t>+0.231</a:t>
+                      </a:r>
+                    </a:p>
+                  </a:txBody>
+                  <a:tcPr>
+                    <a:solidFill>
+                      <a:srgbClr val="FFFFFF"/>
+                    </a:solidFill>
+                  </a:tcPr>
+                </a:tc>
+                <a:extLst>
+                  <a:ext uri="{0D108BD9-81ED-4DB2-BD59-A6C34878D82A}">
+                    <a16:rowId xmlns:a16="http://schemas.microsoft.com/office/drawing/2014/main" val="10001"/>
+                  </a:ext>
+                </a:extLst>
+              </a:tr>
+              <a:tr h="475488">
+                <a:tc>
+                  <a:txBody>
+                    <a:bodyPr/>
+                    <a:lstStyle/>
+                    <a:p>
+                      <a:pPr algn="l"/>
+                      <a:r>
+                        <a:rPr sz="1400">
+                          <a:solidFill>
+                            <a:srgbClr val="2A2A2A"/>
+                          </a:solidFill>
+                        </a:rPr>
+                        <a:t>Exact-match (h-arg top-1)</a:t>
+                      </a:r>
+                    </a:p>
+                  </a:txBody>
+                  <a:tcPr>
+                    <a:solidFill>
+                      <a:srgbClr val="F6F8FB"/>
+                    </a:solidFill>
+                  </a:tcPr>
+                </a:tc>
+                <a:tc>
+                  <a:txBody>
+                    <a:bodyPr/>
+                    <a:lstStyle/>
+                    <a:p>
+                      <a:pPr algn="l"/>
+                      <a:r>
+                        <a:rPr sz="1400">
+                          <a:solidFill>
+                            <a:srgbClr val="2A2A2A"/>
+                          </a:solidFill>
+                        </a:rPr>
+                        <a:t>0.538  (7/13)</a:t>
+                      </a:r>
+                    </a:p>
+                  </a:txBody>
+                  <a:tcPr>
+                    <a:solidFill>
+                      <a:srgbClr val="F6F8FB"/>
+                    </a:solidFill>
+                  </a:tcPr>
+                </a:tc>
+                <a:tc>
+                  <a:txBody>
+                    <a:bodyPr/>
+                    <a:lstStyle/>
+                    <a:p>
+                      <a:pPr algn="l"/>
+                      <a:r>
+                        <a:rPr sz="1400" b="1">
+                          <a:solidFill>
+                            <a:srgbClr val="C0392B"/>
+                          </a:solidFill>
+                        </a:rPr>
+                        <a:t>0.615  (8/13)</a:t>
+                      </a:r>
+                    </a:p>
+                  </a:txBody>
+                  <a:tcPr>
+                    <a:solidFill>
+                      <a:srgbClr val="F6F8FB"/>
+                    </a:solidFill>
+                  </a:tcPr>
+                </a:tc>
+                <a:tc>
+                  <a:txBody>
+                    <a:bodyPr/>
+                    <a:lstStyle/>
+                    <a:p>
+                      <a:pPr algn="l"/>
+                      <a:r>
+                        <a:rPr sz="1400" b="1">
+                          <a:solidFill>
+                            <a:srgbClr val="C0392B"/>
+                          </a:solidFill>
+                        </a:rPr>
+                        <a:t>+0.077</a:t>
+                      </a:r>
+                    </a:p>
+                  </a:txBody>
+                  <a:tcPr>
+                    <a:solidFill>
+                      <a:srgbClr val="F6F8FB"/>
+                    </a:solidFill>
+                  </a:tcPr>
+                </a:tc>
+                <a:extLst>
+                  <a:ext uri="{0D108BD9-81ED-4DB2-BD59-A6C34878D82A}">
+                    <a16:rowId xmlns:a16="http://schemas.microsoft.com/office/drawing/2014/main" val="10002"/>
+                  </a:ext>
+                </a:extLst>
+              </a:tr>
+              <a:tr h="475488">
+                <a:tc>
+                  <a:txBody>
+                    <a:bodyPr/>
+                    <a:lstStyle/>
+                    <a:p>
+                      <a:pPr algn="l"/>
+                      <a:r>
+                        <a:rPr sz="1400">
+                          <a:solidFill>
+                            <a:srgbClr val="2A2A2A"/>
+                          </a:solidFill>
+                        </a:rPr>
+                        <a:t>DDG argmax_pm1 (auto val maps)</a:t>
+                      </a:r>
+                    </a:p>
+                  </a:txBody>
+                  <a:tcPr>
+                    <a:solidFill>
+                      <a:srgbClr val="FFFFFF"/>
+                    </a:solidFill>
+                  </a:tcPr>
+                </a:tc>
+                <a:tc>
+                  <a:txBody>
+                    <a:bodyPr/>
+                    <a:lstStyle/>
+                    <a:p>
+                      <a:pPr algn="l"/>
+                      <a:r>
+                        <a:rPr sz="1400">
+                          <a:solidFill>
+                            <a:srgbClr val="2A2A2A"/>
+                          </a:solidFill>
+                        </a:rPr>
+                        <a:t>0.550</a:t>
+                      </a:r>
+                    </a:p>
+                  </a:txBody>
+                  <a:tcPr>
+                    <a:solidFill>
+                      <a:srgbClr val="FFFFFF"/>
+                    </a:solidFill>
+                  </a:tcPr>
+                </a:tc>
+                <a:tc>
+                  <a:txBody>
+                    <a:bodyPr/>
+                    <a:lstStyle/>
+                    <a:p>
+                      <a:pPr algn="l"/>
+                      <a:r>
+                        <a:rPr sz="1400" b="1">
+                          <a:solidFill>
+                            <a:srgbClr val="C0392B"/>
+                          </a:solidFill>
+                        </a:rPr>
+                        <a:t>0.541</a:t>
+                      </a:r>
+                    </a:p>
+                  </a:txBody>
+                  <a:tcPr>
+                    <a:solidFill>
+                      <a:srgbClr val="FFFFFF"/>
+                    </a:solidFill>
+                  </a:tcPr>
+                </a:tc>
+                <a:tc>
+                  <a:txBody>
+                    <a:bodyPr/>
+                    <a:lstStyle/>
+                    <a:p>
+                      <a:pPr algn="l"/>
+                      <a:r>
+                        <a:rPr sz="1400" b="1">
+                          <a:solidFill>
+                            <a:srgbClr val="C0392B"/>
+                          </a:solidFill>
+                        </a:rPr>
+                        <a:t>−0.009</a:t>
+                      </a:r>
+                    </a:p>
+                  </a:txBody>
+                  <a:tcPr>
+                    <a:solidFill>
+                      <a:srgbClr val="FFFFFF"/>
+                    </a:solidFill>
+                  </a:tcPr>
+                </a:tc>
+                <a:extLst>
+                  <a:ext uri="{0D108BD9-81ED-4DB2-BD59-A6C34878D82A}">
+                    <a16:rowId xmlns:a16="http://schemas.microsoft.com/office/drawing/2014/main" val="10003"/>
+                  </a:ext>
+                </a:extLst>
+              </a:tr>
+              <a:tr h="475488">
+                <a:tc>
+                  <a:txBody>
+                    <a:bodyPr/>
+                    <a:lstStyle/>
+                    <a:p>
+                      <a:pPr algn="l"/>
+                      <a:r>
+                        <a:rPr sz="1400">
+                          <a:solidFill>
+                            <a:srgbClr val="2A2A2A"/>
+                          </a:solidFill>
+                        </a:rPr>
+                        <a:t>DDG top-3 (auto val maps)</a:t>
+                      </a:r>
+                    </a:p>
+                  </a:txBody>
+                  <a:tcPr>
+                    <a:solidFill>
+                      <a:srgbClr val="F6F8FB"/>
+                    </a:solidFill>
+                  </a:tcPr>
+                </a:tc>
+                <a:tc>
+                  <a:txBody>
+                    <a:bodyPr/>
+                    <a:lstStyle/>
+                    <a:p>
+                      <a:pPr algn="l"/>
+                      <a:r>
+                        <a:rPr sz="1400">
+                          <a:solidFill>
+                            <a:srgbClr val="2A2A2A"/>
+                          </a:solidFill>
+                        </a:rPr>
+                        <a:t>0.578</a:t>
+                      </a:r>
+                    </a:p>
+                  </a:txBody>
+                  <a:tcPr>
+                    <a:solidFill>
+                      <a:srgbClr val="F6F8FB"/>
+                    </a:solidFill>
+                  </a:tcPr>
+                </a:tc>
+                <a:tc>
+                  <a:txBody>
+                    <a:bodyPr/>
+                    <a:lstStyle/>
+                    <a:p>
+                      <a:pPr algn="l"/>
+                      <a:r>
+                        <a:rPr sz="1400" b="1">
+                          <a:solidFill>
+                            <a:srgbClr val="C0392B"/>
+                          </a:solidFill>
+                        </a:rPr>
+                        <a:t>0.559</a:t>
+                      </a:r>
+                    </a:p>
+                  </a:txBody>
+                  <a:tcPr>
+                    <a:solidFill>
+                      <a:srgbClr val="F6F8FB"/>
+                    </a:solidFill>
+                  </a:tcPr>
+                </a:tc>
+                <a:tc>
+                  <a:txBody>
+                    <a:bodyPr/>
+                    <a:lstStyle/>
+                    <a:p>
+                      <a:pPr algn="l"/>
+                      <a:r>
+                        <a:rPr sz="1400" b="1" dirty="0">
+                          <a:solidFill>
+                            <a:srgbClr val="C0392B"/>
+                          </a:solidFill>
+                        </a:rPr>
+                        <a:t>−0.019</a:t>
+                      </a:r>
+                    </a:p>
+                  </a:txBody>
+                  <a:tcPr>
+                    <a:solidFill>
+                      <a:srgbClr val="F6F8FB"/>
+                    </a:solidFill>
+                  </a:tcPr>
+                </a:tc>
+                <a:extLst>
+                  <a:ext uri="{0D108BD9-81ED-4DB2-BD59-A6C34878D82A}">
+                    <a16:rowId xmlns:a16="http://schemas.microsoft.com/office/drawing/2014/main" val="10004"/>
+                  </a:ext>
+                </a:extLst>
+              </a:tr>
+            </a:tbl>
+          </a:graphicData>
+        </a:graphic>
+      </p:graphicFrame>
+      <p:sp>
+        <p:nvSpPr>
+          <p:cNvPr id="6" name="TextBox 5"/>
+          <p:cNvSpPr txBox="1"/>
+          <p:nvPr/>
+        </p:nvSpPr>
+        <p:spPr>
+          <a:xfrm>
+            <a:off x="548640" y="4206240"/>
+            <a:ext cx="11064240" cy="457200"/>
+          </a:xfrm>
+          <a:prstGeom prst="rect">
+            <a:avLst/>
+          </a:prstGeom>
+          <a:noFill/>
+        </p:spPr>
+        <p:txBody>
+          <a:bodyPr wrap="square" anchor="t">
+            <a:spAutoFit/>
+          </a:bodyPr>
+          <a:lstStyle/>
+          <a:p>
+            <a:pPr algn="l"/>
+            <a:r>
+              <a:rPr sz="1500" b="1" dirty="0">
+                <a:solidFill>
+                  <a:srgbClr val="C0392B"/>
+                </a:solidFill>
+              </a:rPr>
+              <a:t>Walk-away</a:t>
+            </a:r>
+          </a:p>
+        </p:txBody>
+      </p:sp>
+      <p:sp>
+        <p:nvSpPr>
+          <p:cNvPr id="7" name="TextBox 6"/>
+          <p:cNvSpPr txBox="1"/>
+          <p:nvPr/>
+        </p:nvSpPr>
+        <p:spPr>
+          <a:xfrm>
+            <a:off x="548640" y="4572000"/>
+            <a:ext cx="11064240" cy="1105431"/>
+          </a:xfrm>
+          <a:prstGeom prst="rect">
+            <a:avLst/>
+          </a:prstGeom>
+          <a:noFill/>
+        </p:spPr>
+        <p:txBody>
+          <a:bodyPr wrap="square">
+            <a:spAutoFit/>
+          </a:bodyPr>
+          <a:lstStyle/>
+          <a:p>
+            <a:pPr>
+              <a:lnSpc>
+                <a:spcPct val="125000"/>
+              </a:lnSpc>
+            </a:pPr>
+            <a:r>
+              <a:rPr sz="1800" dirty="0">
+                <a:solidFill>
+                  <a:srgbClr val="2A2A2A"/>
+                </a:solidFill>
+              </a:rPr>
+              <a:t>• </a:t>
+            </a:r>
+            <a:r>
+              <a:rPr sz="1800" b="1" dirty="0">
+                <a:solidFill>
+                  <a:srgbClr val="C0392B"/>
+                </a:solidFill>
+              </a:rPr>
+              <a:t>+3 of 13 pairs</a:t>
+            </a:r>
+            <a:r>
+              <a:rPr sz="1800" b="0" dirty="0">
+                <a:solidFill>
+                  <a:srgbClr val="2A2A2A"/>
+                </a:solidFill>
+              </a:rPr>
+              <a:t> ranked correctly · </a:t>
+            </a:r>
+            <a:r>
+              <a:rPr sz="1800" b="1" dirty="0">
+                <a:solidFill>
+                  <a:srgbClr val="C0392B"/>
+                </a:solidFill>
+              </a:rPr>
+              <a:t>+1 of 13</a:t>
+            </a:r>
+            <a:r>
+              <a:rPr sz="1800" b="0" dirty="0">
+                <a:solidFill>
+                  <a:srgbClr val="2A2A2A"/>
+                </a:solidFill>
+              </a:rPr>
+              <a:t> worst-segments identified exactly.</a:t>
+            </a:r>
+          </a:p>
+          <a:p>
+            <a:pPr>
+              <a:lnSpc>
+                <a:spcPct val="125000"/>
+              </a:lnSpc>
+            </a:pPr>
+            <a:r>
+              <a:rPr sz="1800" dirty="0">
+                <a:solidFill>
+                  <a:srgbClr val="2A2A2A"/>
+                </a:solidFill>
+              </a:rPr>
+              <a:t>• </a:t>
+            </a:r>
+            <a:r>
+              <a:rPr sz="1800" b="1" dirty="0">
+                <a:solidFill>
+                  <a:srgbClr val="2A2A2A"/>
+                </a:solidFill>
+              </a:rPr>
+              <a:t>No measurable cost</a:t>
+            </a:r>
+            <a:r>
+              <a:rPr sz="1800" b="0" dirty="0">
+                <a:solidFill>
+                  <a:srgbClr val="2A2A2A"/>
+                </a:solidFill>
+              </a:rPr>
+              <a:t> on auto-aligned ranking </a:t>
+            </a:r>
+            <a:r>
+              <a:rPr lang="en-US" sz="1800" b="0" dirty="0">
+                <a:solidFill>
+                  <a:srgbClr val="2A2A2A"/>
+                </a:solidFill>
+              </a:rPr>
+              <a:t>both DDG</a:t>
+            </a:r>
+            <a:r>
+              <a:rPr sz="1800" b="0" dirty="0">
+                <a:solidFill>
+                  <a:srgbClr val="2A2A2A"/>
+                </a:solidFill>
+              </a:rPr>
+              <a:t> metrics within 2 points.</a:t>
+            </a:r>
+          </a:p>
+          <a:p>
+            <a:pPr>
+              <a:lnSpc>
+                <a:spcPct val="125000"/>
+              </a:lnSpc>
+            </a:pPr>
+            <a:r>
+              <a:rPr sz="1800" dirty="0">
+                <a:solidFill>
+                  <a:srgbClr val="2A2A2A"/>
+                </a:solidFill>
+              </a:rPr>
+              <a:t>• </a:t>
+            </a:r>
+            <a:r>
+              <a:rPr sz="1800" b="0" dirty="0">
+                <a:solidFill>
+                  <a:srgbClr val="2A2A2A"/>
+                </a:solidFill>
+              </a:rPr>
+              <a:t>Deployment-ready checkpoint: </a:t>
+            </a:r>
+            <a:r>
+              <a:rPr sz="1600" b="1" dirty="0">
+                <a:solidFill>
+                  <a:srgbClr val="1F2E55"/>
+                </a:solidFill>
+              </a:rPr>
+              <a:t>with_human_labels.human_argmax_top1.pt</a:t>
+            </a:r>
+            <a:r>
+              <a:rPr sz="1800" b="0" dirty="0">
+                <a:solidFill>
+                  <a:srgbClr val="2A2A2A"/>
+                </a:solidFill>
+              </a:rPr>
+              <a:t> (best across all 4 save criteria).</a:t>
+            </a:r>
+          </a:p>
+        </p:txBody>
+      </p:sp>
+      <p:sp>
+        <p:nvSpPr>
+          <p:cNvPr id="9" name="TextBox 8"/>
+          <p:cNvSpPr txBox="1"/>
+          <p:nvPr/>
+        </p:nvSpPr>
+        <p:spPr>
+          <a:xfrm>
+            <a:off x="365760" y="6446520"/>
+            <a:ext cx="7315200" cy="320040"/>
+          </a:xfrm>
+          <a:prstGeom prst="rect">
+            <a:avLst/>
+          </a:prstGeom>
+          <a:noFill/>
+        </p:spPr>
+        <p:txBody>
+          <a:bodyPr wrap="square" anchor="t">
+            <a:spAutoFit/>
+          </a:bodyPr>
+          <a:lstStyle/>
+          <a:p>
+            <a:pPr algn="l"/>
+            <a:r>
+              <a:rPr sz="1000" b="0">
+                <a:solidFill>
+                  <a:srgbClr val="888888"/>
+                </a:solidFill>
+              </a:rPr>
+              <a:t>HRI Final · Human-in-the-Loop Congestion Classification for MAPF</a:t>
+            </a:r>
+          </a:p>
+        </p:txBody>
+      </p:sp>
+      <p:sp>
+        <p:nvSpPr>
+          <p:cNvPr id="10" name="TextBox 9"/>
+          <p:cNvSpPr txBox="1"/>
+          <p:nvPr/>
+        </p:nvSpPr>
+        <p:spPr>
+          <a:xfrm>
+            <a:off x="10972800" y="6446520"/>
+            <a:ext cx="1097280" cy="320040"/>
+          </a:xfrm>
+          <a:prstGeom prst="rect">
+            <a:avLst/>
+          </a:prstGeom>
+          <a:noFill/>
+        </p:spPr>
+        <p:txBody>
+          <a:bodyPr wrap="square" anchor="t">
+            <a:spAutoFit/>
+          </a:bodyPr>
+          <a:lstStyle/>
+          <a:p>
+            <a:pPr algn="r"/>
+            <a:r>
+              <a:rPr sz="1000" b="0">
+                <a:solidFill>
+                  <a:srgbClr val="888888"/>
+                </a:solidFill>
+              </a:rPr>
+              <a:t>6 / 8</a:t>
+            </a:r>
+          </a:p>
+        </p:txBody>
+      </p:sp>
+    </p:spTree>
+  </p:cSld>
+  <p:clrMapOvr>
+    <a:masterClrMapping/>
+  </p:clrMapOvr>
+</p:sld>
+</file>
+
 <file path=ppt/slides/slide2.xml><?xml version="1.0" encoding="utf-8"?>
 <p:sld xmlns:a="http://schemas.openxmlformats.org/drawingml/2006/main" xmlns:r="http://schemas.openxmlformats.org/officeDocument/2006/relationships" xmlns:p="http://schemas.openxmlformats.org/presentationml/2006/main">
   <p:cSld>
@@ -4337,7 +5222,7 @@
                   <a:srgbClr val="2A2A2A"/>
                 </a:solidFill>
               </a:rPr>
-              <a:t>, a transformer policy imitation-trained on solver demos. Cheap at inference; brittle on the long tail.</a:t>
+              <a:t>, a transformer policy imitation-trained on solver demos.</a:t>
             </a:r>
           </a:p>
           <a:p>
@@ -4384,7 +5269,7 @@
                   <a:srgbClr val="2A2A2A"/>
                 </a:solidFill>
               </a:rPr>
-              <a:t>as</a:t>
+              <a:t>due to no global view as</a:t>
             </a:r>
             <a:r>
               <a:rPr sz="2000" b="0" dirty="0">
@@ -4643,7 +5528,7 @@
           <p:nvPr>
             <p:extLst>
               <p:ext uri="{D42A27DB-BD31-4B8C-83A1-F6EECF244321}">
-                <p14:modId xmlns:p14="http://schemas.microsoft.com/office/powerpoint/2010/main" val="2823050394"/>
+                <p14:modId xmlns:p14="http://schemas.microsoft.com/office/powerpoint/2010/main" val="1749880902"/>
               </p:ext>
             </p:extLst>
           </p:nvPr>
@@ -5105,7 +5990,7 @@
                     <a:p>
                       <a:pPr algn="l"/>
                       <a:r>
-                        <a:rPr sz="1200">
+                        <a:rPr sz="1200" dirty="0">
                           <a:solidFill>
                             <a:srgbClr val="2A2A2A"/>
                           </a:solidFill>
@@ -5127,7 +6012,7 @@
                     <a:p>
                       <a:pPr algn="l"/>
                       <a:r>
-                        <a:rPr sz="1200">
+                        <a:rPr sz="1200" dirty="0">
                           <a:solidFill>
                             <a:srgbClr val="2A2A2A"/>
                           </a:solidFill>
@@ -5176,16 +6061,13 @@
                             <a:srgbClr val="2A2A2A"/>
                           </a:solidFill>
                         </a:rPr>
-                        <a:t>(FILL</a:t>
+                        <a:t>Cost of human data generation/labeling; </a:t>
                       </a:r>
-                      <a:r>
-                        <a:rPr sz="1200" dirty="0">
-                          <a:solidFill>
-                            <a:srgbClr val="2A2A2A"/>
-                          </a:solidFill>
-                        </a:rPr>
-                        <a:t>)</a:t>
-                      </a:r>
+                      <a:endParaRPr sz="1200" dirty="0">
+                        <a:solidFill>
+                          <a:srgbClr val="2A2A2A"/>
+                        </a:solidFill>
+                      </a:endParaRPr>
                     </a:p>
                   </a:txBody>
                   <a:tcPr>
@@ -5327,7 +6209,23 @@
                   <a:srgbClr val="2A2A2A"/>
                 </a:solidFill>
               </a:rPr>
-              <a:t> trained with human pairwise verdicts.</a:t>
+              <a:t> trained with human pairwise </a:t>
+            </a:r>
+            <a:r>
+              <a:rPr lang="en-US" sz="1700" b="0" dirty="0">
+                <a:solidFill>
+                  <a:srgbClr val="2A2A2A"/>
+                </a:solidFill>
+              </a:rPr>
+              <a:t>labels</a:t>
+            </a:r>
+            <a:r>
+              <a:rPr sz="1700" b="0" dirty="0">
+                <a:solidFill>
+                  <a:srgbClr val="2A2A2A"/>
+                </a:solidFill>
+              </a:rPr>
+              <a:t>.</a:t>
             </a:r>
           </a:p>
           <a:p>
@@ -5382,15 +6280,15 @@
                   <a:srgbClr val="2A2A2A"/>
                 </a:solidFill>
               </a:rPr>
-              <a:t> un-</a:t>
-            </a:r>
-            <a:r>
-              <a:rPr sz="1700" b="0" dirty="0" err="1">
-                <a:solidFill>
-                  <a:srgbClr val="2A2A2A"/>
-                </a:solidFill>
-              </a:rPr>
-              <a:t>prioritised</a:t>
+              <a:t> </a:t>
+            </a:r>
+            <a:r>
+              <a:rPr lang="en-US" sz="1700" b="0" dirty="0">
+                <a:solidFill>
+                  <a:srgbClr val="2A2A2A"/>
+                </a:solidFill>
+              </a:rPr>
+              <a:t>random</a:t>
             </a:r>
             <a:r>
               <a:rPr sz="1700" b="0" dirty="0">
@@ -5398,7 +6296,7 @@
                   <a:srgbClr val="2A2A2A"/>
                 </a:solidFill>
               </a:rPr>
-              <a:t> hand-curation, warm-start AL, cold-start AL</a:t>
+              <a:t> </a:t>
             </a:r>
             <a:r>
               <a:rPr lang="en-US" sz="1700" b="0" dirty="0">
@@ -5406,7 +6304,7 @@
                   <a:srgbClr val="2A2A2A"/>
                 </a:solidFill>
               </a:rPr>
-              <a:t>,</a:t>
+              <a:t>human elicitation</a:t>
             </a:r>
             <a:r>
               <a:rPr sz="1700" b="0" dirty="0">
@@ -5414,6 +6312,54 @@
                   <a:srgbClr val="2A2A2A"/>
                 </a:solidFill>
               </a:rPr>
+              <a:t>, warm-start </a:t>
+            </a:r>
+            <a:r>
+              <a:rPr lang="en-US" sz="1700" b="0" dirty="0">
+                <a:solidFill>
+                  <a:srgbClr val="2A2A2A"/>
+                </a:solidFill>
+              </a:rPr>
+              <a:t>iterative </a:t>
+            </a:r>
+            <a:r>
+              <a:rPr sz="1700" b="0" dirty="0">
+                <a:solidFill>
+                  <a:srgbClr val="2A2A2A"/>
+                </a:solidFill>
+              </a:rPr>
+              <a:t>A</a:t>
+            </a:r>
+            <a:r>
+              <a:rPr lang="en-US" sz="1700" b="0" dirty="0">
+                <a:solidFill>
+                  <a:srgbClr val="2A2A2A"/>
+                </a:solidFill>
+              </a:rPr>
+              <a:t>ctive </a:t>
+            </a:r>
+            <a:r>
+              <a:rPr sz="1700" b="0" dirty="0">
+                <a:solidFill>
+                  <a:srgbClr val="2A2A2A"/>
+                </a:solidFill>
+              </a:rPr>
+              <a:t>L</a:t>
+            </a:r>
+            <a:r>
+              <a:rPr lang="en-US" sz="1700" b="0" dirty="0">
+                <a:solidFill>
+                  <a:srgbClr val="2A2A2A"/>
+                </a:solidFill>
+              </a:rPr>
+              <a:t>earning,</a:t>
+            </a:r>
+            <a:r>
+              <a:rPr sz="1700" b="0" dirty="0">
+                <a:solidFill>
+                  <a:srgbClr val="2A2A2A"/>
+                </a:solidFill>
+              </a:rPr>
               <a:t> to answer </a:t>
             </a:r>
             <a:r>
@@ -5421,8 +6367,33 @@
                 <a:solidFill>
                   <a:srgbClr val="2A2A2A"/>
                 </a:solidFill>
-              </a:rPr>
-              <a:t>does it matter how we collect the labels?</a:t>
+                <a:highlight>
+                  <a:srgbClr val="FF0000"/>
+                </a:highlight>
+              </a:rPr>
+              <a:t>does it matter how we collect </a:t>
+            </a:r>
+            <a:r>
+              <a:rPr lang="en-US" sz="1700" b="1" dirty="0">
+                <a:solidFill>
+                  <a:srgbClr val="2A2A2A"/>
+                </a:solidFill>
+                <a:highlight>
+                  <a:srgbClr val="FF0000"/>
+                </a:highlight>
+              </a:rPr>
+              <a:t>human input</a:t>
+            </a:r>
+            <a:r>
+              <a:rPr sz="1700" b="1" dirty="0">
+                <a:solidFill>
+                  <a:srgbClr val="2A2A2A"/>
+                </a:solidFill>
+                <a:highlight>
+                  <a:srgbClr val="FF0000"/>
+                </a:highlight>
+              </a:rPr>
+              <a:t>?</a:t>
             </a:r>
           </a:p>
         </p:txBody>
@@ -5522,7 +6493,55 @@
                   <a:srgbClr val="2A2A2A"/>
                 </a:solidFill>
               </a:rPr>
-              <a:t>Can a small set of human-curated pairwise rankings improve a learned MAPF classifier beyond DDG's threshold and does the strategy used to elicit those rankings matter?</a:t>
+              <a:t>Can a small set of human-curated pairwise rankings improve </a:t>
+            </a:r>
+            <a:r>
+              <a:rPr lang="en-US" sz="1500" dirty="0">
+                <a:solidFill>
+                  <a:srgbClr val="2A2A2A"/>
+                </a:solidFill>
+              </a:rPr>
+              <a:t>training performance of </a:t>
+            </a:r>
+            <a:r>
+              <a:rPr sz="1500" b="0" dirty="0">
+                <a:solidFill>
+                  <a:srgbClr val="2A2A2A"/>
+                </a:solidFill>
+              </a:rPr>
+              <a:t>a MAPF</a:t>
+            </a:r>
+            <a:r>
+              <a:rPr lang="en-US" sz="1500" dirty="0">
+                <a:solidFill>
+                  <a:srgbClr val="2A2A2A"/>
+                </a:solidFill>
+              </a:rPr>
+              <a:t>-GPT</a:t>
+            </a:r>
+            <a:r>
+              <a:rPr sz="1500" b="0" dirty="0">
+                <a:solidFill>
+                  <a:srgbClr val="2A2A2A"/>
+                </a:solidFill>
+              </a:rPr>
+              <a:t> classifier beyond DDG's threshold </a:t>
+            </a:r>
+            <a:r>
+              <a:rPr lang="en-US" sz="1500" b="0" dirty="0">
+                <a:solidFill>
+                  <a:srgbClr val="2A2A2A"/>
+                </a:solidFill>
+              </a:rPr>
+              <a:t>by selecting better states with fewer training epochs (than 30,000) </a:t>
+            </a:r>
+            <a:r>
+              <a:rPr sz="1500" b="0" dirty="0">
+                <a:solidFill>
+                  <a:srgbClr val="2A2A2A"/>
+                </a:solidFill>
+              </a:rPr>
+              <a:t>and does the strategy used to elicit those rankings matter?</a:t>
             </a:r>
           </a:p>
         </p:txBody>
@@ -5712,7 +6731,7 @@
           <a:p>
             <a:pPr algn="l"/>
             <a:r>
-              <a:rPr sz="2200" b="1">
+              <a:rPr sz="2200" b="1" dirty="0">
                 <a:solidFill>
                   <a:srgbClr val="2A2A2A"/>
                 </a:solidFill>
@@ -5750,8 +6769,19 @@
                 <a:solidFill>
                   <a:srgbClr val="555555"/>
                 </a:solidFill>
-              </a:rPr>
-              <a:t>23/52 (44%) of human-marked (worst, clean) pairs have diff(worst) ≤ diff(clean)</a:t>
+                <a:highlight>
+                  <a:srgbClr val="FF0000"/>
+                </a:highlight>
+              </a:rPr>
+              <a:t>23/52 (44%) </a:t>
+            </a:r>
+            <a:r>
+              <a:rPr sz="1700" b="0" dirty="0">
+                <a:solidFill>
+                  <a:srgbClr val="555555"/>
+                </a:solidFill>
+              </a:rPr>
+              <a:t>of human-marked (worst, clean) pairs have diff(worst) ≤ diff(clean)</a:t>
             </a:r>
             <a:r>
               <a:rPr lang="en-US" sz="1700" dirty="0">
@@ -5796,7 +6826,7 @@
           <a:p>
             <a:pPr algn="l"/>
             <a:r>
-              <a:rPr sz="3600" b="1">
+              <a:rPr sz="3600" b="1" dirty="0">
                 <a:solidFill>
                   <a:srgbClr val="C0392B"/>
                 </a:solidFill>
@@ -5815,7 +6845,7 @@
         <p:spPr>
           <a:xfrm>
             <a:off x="1280160" y="2926080"/>
-            <a:ext cx="10424160" cy="548640"/>
+            <a:ext cx="10424160" cy="430887"/>
           </a:xfrm>
           <a:prstGeom prst="rect">
             <a:avLst/>
@@ -5830,13 +6860,18 @@
           <a:p>
             <a:pPr algn="l"/>
             <a:r>
-              <a:rPr sz="2200" b="1">
-                <a:solidFill>
-                  <a:srgbClr val="2A2A2A"/>
-                </a:solidFill>
-              </a:rPr>
-              <a:t>Naive integration cancels the gradient.</a:t>
-            </a:r>
+              <a:rPr lang="en-US" sz="2200" b="1" dirty="0">
+                <a:solidFill>
+                  <a:srgbClr val="2A2A2A"/>
+                </a:solidFill>
+              </a:rPr>
+              <a:t>How do we elicit the hard cases.</a:t>
+            </a:r>
+            <a:endParaRPr sz="2200" b="1" dirty="0">
+              <a:solidFill>
+                <a:srgbClr val="2A2A2A"/>
+              </a:solidFill>
+            </a:endParaRPr>
           </a:p>
         </p:txBody>
       </p:sp>
@@ -5864,25 +6899,31 @@
           <a:p>
             <a:pPr algn="l"/>
             <a:r>
-              <a:rPr sz="1700" b="0" dirty="0">
+              <a:rPr lang="en-US" sz="1700" b="0" dirty="0">
                 <a:solidFill>
                   <a:srgbClr val="555555"/>
                 </a:solidFill>
               </a:rPr>
-              <a:t>Appending human pairs alongside the contradicting auto twins makes them point in opposite directions</a:t>
+              <a:t>Defining the features that can classify high versus low </a:t>
             </a:r>
             <a:r>
               <a:rPr lang="en-US" sz="1700" b="0" dirty="0">
                 <a:solidFill>
                   <a:srgbClr val="555555"/>
                 </a:solidFill>
-              </a:rPr>
-              <a:t>, nullifying.</a:t>
+                <a:highlight>
+                  <a:srgbClr val="FF0000"/>
+                </a:highlight>
+              </a:rPr>
+              <a:t>entropy [TODO]</a:t>
             </a:r>
             <a:endParaRPr sz="1700" b="0" dirty="0">
               <a:solidFill>
                 <a:srgbClr val="555555"/>
               </a:solidFill>
+              <a:highlight>
+                <a:srgbClr val="FF0000"/>
+              </a:highlight>
             </a:endParaRPr>
           </a:p>
         </p:txBody>
@@ -5911,7 +6952,7 @@
           <a:p>
             <a:pPr algn="l"/>
             <a:r>
-              <a:rPr sz="3600" b="1">
+              <a:rPr sz="3600" b="1" dirty="0">
                 <a:solidFill>
                   <a:srgbClr val="C0392B"/>
                 </a:solidFill>
@@ -5945,7 +6986,7 @@
           <a:p>
             <a:pPr algn="l"/>
             <a:r>
-              <a:rPr sz="2200" b="1">
+              <a:rPr sz="2200" b="1" dirty="0">
                 <a:solidFill>
                   <a:srgbClr val="2A2A2A"/>
                 </a:solidFill>
@@ -5964,7 +7005,7 @@
         <p:spPr>
           <a:xfrm>
             <a:off x="1280160" y="5074920"/>
-            <a:ext cx="10424160" cy="615553"/>
+            <a:ext cx="10424160" cy="353943"/>
           </a:xfrm>
           <a:prstGeom prst="rect">
             <a:avLst/>
@@ -5984,7 +7025,7 @@
                   <a:srgbClr val="555555"/>
                 </a:solidFill>
               </a:rPr>
-              <a:t>≈5 min/episode × 56 budget ≈ 5 hours of human attention. Every annotation </a:t>
+              <a:t>≈5 min/episode × 56 budget ≈ 5 hours of human attention. </a:t>
             </a:r>
             <a:r>
               <a:rPr lang="en-US" sz="1700" b="0" dirty="0">
@@ -5992,32 +7033,13 @@
                   <a:srgbClr val="555555"/>
                 </a:solidFill>
               </a:rPr>
-              <a:t>must</a:t>
-            </a:r>
-            <a:r>
-              <a:rPr sz="1700" b="0" dirty="0">
-                <a:solidFill>
-                  <a:srgbClr val="555555"/>
-                </a:solidFill>
-              </a:rPr>
-              <a:t> </a:t>
-            </a:r>
-            <a:r>
-              <a:rPr lang="en-US" sz="1700" b="0" dirty="0">
-                <a:solidFill>
-                  <a:srgbClr val="555555"/>
-                </a:solidFill>
-              </a:rPr>
-              <a:t>count, so</a:t>
-            </a:r>
-            <a:r>
-              <a:rPr sz="1700" b="0" dirty="0">
-                <a:solidFill>
-                  <a:srgbClr val="555555"/>
-                </a:solidFill>
-              </a:rPr>
-              <a:t> selection strategy itself is part of the problem.</a:t>
-            </a:r>
+              <a:t>What kind of question to ask?</a:t>
+            </a:r>
+            <a:endParaRPr sz="1700" b="0" dirty="0">
+              <a:solidFill>
+                <a:srgbClr val="555555"/>
+              </a:solidFill>
+            </a:endParaRPr>
           </a:p>
         </p:txBody>
       </p:sp>
@@ -6205,7 +7227,7 @@
                   <a:srgbClr val="1F2E55"/>
                 </a:solidFill>
               </a:rPr>
-              <a:t> except</a:t>
+              <a:t> not</a:t>
             </a:r>
             <a:r>
               <a:rPr sz="2000" b="1" dirty="0">
@@ -6228,24 +7250,32 @@
                   <a:srgbClr val="2A2A2A"/>
                 </a:solidFill>
               </a:rPr>
-              <a:t>For each annotated episode, replace the auto-pair list entirely with the single human pair at weight 1.0. 39 train pairs ≈ 0.15% of </a:t>
+              <a:t>For each annotated episode, replace the auto-pair list entirely with the single human pair at weight 1.0. </a:t>
             </a:r>
             <a:r>
               <a:rPr lang="en-US" sz="1500" dirty="0">
                 <a:solidFill>
                   <a:srgbClr val="2A2A2A"/>
                 </a:solidFill>
-              </a:rPr>
-              <a:t>gradient but</a:t>
-            </a:r>
-            <a:r>
-              <a:rPr sz="1500" dirty="0">
-                <a:solidFill>
-                  <a:srgbClr val="2A2A2A"/>
-                </a:solidFill>
-              </a:rPr>
-              <a:t> placed exactly on the cases auto fits wrong.</a:t>
-            </a:r>
+                <a:highlight>
+                  <a:srgbClr val="FF0000"/>
+                </a:highlight>
+              </a:rPr>
+              <a:t>39 train pairs ≈ 0.15% </a:t>
+            </a:r>
+            <a:r>
+              <a:rPr lang="en-US" sz="1500" dirty="0">
+                <a:solidFill>
+                  <a:srgbClr val="2A2A2A"/>
+                </a:solidFill>
+              </a:rPr>
+              <a:t>of gradient but placed exactly on the cases auto fits wrong.</a:t>
+            </a:r>
+            <a:endParaRPr sz="1500" dirty="0">
+              <a:solidFill>
+                <a:srgbClr val="2A2A2A"/>
+              </a:solidFill>
+            </a:endParaRPr>
           </a:p>
         </p:txBody>
       </p:sp>
@@ -6313,15 +7343,15 @@
                   <a:srgbClr val="2A2A2A"/>
                 </a:solidFill>
               </a:rPr>
-              <a:t>Compare un-</a:t>
-            </a:r>
-            <a:r>
-              <a:rPr sz="1500" dirty="0" err="1">
-                <a:solidFill>
-                  <a:srgbClr val="2A2A2A"/>
-                </a:solidFill>
-              </a:rPr>
-              <a:t>prioritised</a:t>
+              <a:t>Compare </a:t>
+            </a:r>
+            <a:r>
+              <a:rPr lang="en-US" sz="1500" dirty="0">
+                <a:solidFill>
+                  <a:srgbClr val="2A2A2A"/>
+                </a:solidFill>
+              </a:rPr>
+              <a:t>random elicitation </a:t>
             </a:r>
             <a:r>
               <a:rPr sz="1500" dirty="0">
@@ -6329,8 +7359,57 @@
                   <a:srgbClr val="2A2A2A"/>
                 </a:solidFill>
               </a:rPr>
-              <a:t> hand-curation vs uncertainty × diversity active learning vs pure-diversity AL at the same label budget.</a:t>
-            </a:r>
+              <a:t>vs</a:t>
+            </a:r>
+            <a:r>
+              <a:rPr lang="en-US" sz="1500" dirty="0">
+                <a:solidFill>
+                  <a:srgbClr val="2A2A2A"/>
+                </a:solidFill>
+              </a:rPr>
+              <a:t> </a:t>
+            </a:r>
+            <a:r>
+              <a:rPr sz="1500" dirty="0">
+                <a:solidFill>
+                  <a:srgbClr val="2A2A2A"/>
+                </a:solidFill>
+              </a:rPr>
+              <a:t>uncertainty × diversity active learning vs </a:t>
+            </a:r>
+            <a:r>
+              <a:rPr lang="en-US" sz="1500" dirty="0">
+                <a:solidFill>
+                  <a:srgbClr val="2A2A2A"/>
+                </a:solidFill>
+              </a:rPr>
+              <a:t>iterative active learning</a:t>
+            </a:r>
+            <a:r>
+              <a:rPr sz="1500" dirty="0">
+                <a:solidFill>
+                  <a:srgbClr val="2A2A2A"/>
+                </a:solidFill>
+              </a:rPr>
+              <a:t> at the same label budget.</a:t>
+            </a:r>
+            <a:endParaRPr lang="en-US" sz="1500" dirty="0">
+              <a:solidFill>
+                <a:srgbClr val="2A2A2A"/>
+              </a:solidFill>
+            </a:endParaRPr>
+          </a:p>
+          <a:p>
+            <a:pPr>
+              <a:lnSpc>
+                <a:spcPct val="130000"/>
+              </a:lnSpc>
+            </a:pPr>
+            <a:endParaRPr sz="1500" dirty="0">
+              <a:solidFill>
+                <a:srgbClr val="2A2A2A"/>
+              </a:solidFill>
+            </a:endParaRPr>
           </a:p>
         </p:txBody>
       </p:sp>
@@ -6377,7 +7456,7 @@
         <p:spPr>
           <a:xfrm>
             <a:off x="548640" y="4023360"/>
-            <a:ext cx="11064240" cy="2194560"/>
+            <a:ext cx="11064240" cy="1200329"/>
           </a:xfrm>
           <a:prstGeom prst="rect">
             <a:avLst/>
@@ -6392,15 +7471,223 @@
           <a:p>
             <a:pPr algn="l"/>
             <a:r>
-              <a:rPr sz="1800" b="0">
+              <a:rPr sz="1800" b="0" dirty="0">
                 <a:solidFill>
                   <a:srgbClr val="2A2A2A"/>
                 </a:solidFill>
               </a:rPr>
               <a:t>• Small 3D CNN over a 16-step (4-channel × T × H × W) spatial-temporal volume → scalar segment score.
-• RankNet pairwise loss on auto-pairs + Option-B human overrides.
-• Replay tool: humans scrub each episode end-to-end, mark worst / clean / optional borderline.
-• Pool-based active query with acquisition  H( σ(s_A − s_B) ) · ‖φ_A − φ_B‖  (uncertainty × diversity).</a:t>
+• </a:t>
+            </a:r>
+            <a:r>
+              <a:rPr sz="1800" b="0" dirty="0" err="1">
+                <a:solidFill>
+                  <a:srgbClr val="2A2A2A"/>
+                </a:solidFill>
+              </a:rPr>
+              <a:t>RankNet</a:t>
+            </a:r>
+            <a:r>
+              <a:rPr sz="1800" b="0" dirty="0">
+                <a:solidFill>
+                  <a:srgbClr val="2A2A2A"/>
+                </a:solidFill>
+              </a:rPr>
+              <a:t> pairwise loss on auto-pairs + </a:t>
+            </a:r>
+            <a:r>
+              <a:rPr lang="en-US" dirty="0">
+                <a:solidFill>
+                  <a:srgbClr val="2A2A2A"/>
+                </a:solidFill>
+              </a:rPr>
+              <a:t>replacing auto-pair with </a:t>
+            </a:r>
+            <a:r>
+              <a:rPr sz="1800" b="0" dirty="0">
+                <a:solidFill>
+                  <a:srgbClr val="2A2A2A"/>
+                </a:solidFill>
+              </a:rPr>
+              <a:t>human </a:t>
+            </a:r>
+            <a:r>
+              <a:rPr lang="en-US" dirty="0">
+                <a:solidFill>
+                  <a:srgbClr val="2A2A2A"/>
+                </a:solidFill>
+              </a:rPr>
+              <a:t>labels</a:t>
+            </a:r>
+            <a:r>
+              <a:rPr sz="1800" b="0" dirty="0">
+                <a:solidFill>
+                  <a:srgbClr val="2A2A2A"/>
+                </a:solidFill>
+              </a:rPr>
+              <a:t>.
+• Replay tool: </a:t>
+            </a:r>
+            <a:r>
+              <a:rPr lang="en-US" sz="1800" b="0" dirty="0">
+                <a:solidFill>
+                  <a:srgbClr val="2A2A2A"/>
+                </a:solidFill>
+              </a:rPr>
+              <a:t>display two animated segments side by side and ask human to mark the worse of the pair</a:t>
+            </a:r>
+            <a:r>
+              <a:rPr sz="1800" b="0" dirty="0">
+                <a:solidFill>
+                  <a:srgbClr val="2A2A2A"/>
+                </a:solidFill>
+              </a:rPr>
+              <a:t>.
+• </a:t>
+            </a:r>
+            <a:r>
+              <a:rPr lang="en-US" sz="1800" b="0" dirty="0">
+                <a:solidFill>
+                  <a:srgbClr val="2A2A2A"/>
+                </a:solidFill>
+              </a:rPr>
+              <a:t>A</a:t>
+            </a:r>
+            <a:r>
+              <a:rPr sz="1800" b="0" dirty="0">
+                <a:solidFill>
+                  <a:srgbClr val="2A2A2A"/>
+                </a:solidFill>
+              </a:rPr>
+              <a:t>ctive query with acquisition</a:t>
+            </a:r>
+            <a:r>
+              <a:rPr lang="en-US" sz="1800" b="0" dirty="0">
+                <a:solidFill>
+                  <a:srgbClr val="2A2A2A"/>
+                </a:solidFill>
+              </a:rPr>
+              <a:t> function:</a:t>
+            </a:r>
+            <a:r>
+              <a:rPr sz="1800" b="0" dirty="0">
+                <a:solidFill>
+                  <a:srgbClr val="2A2A2A"/>
+                </a:solidFill>
+              </a:rPr>
+              <a:t>  H( </a:t>
+            </a:r>
+            <a:r>
+              <a:rPr sz="1800" b="0" dirty="0" err="1">
+                <a:solidFill>
+                  <a:srgbClr val="2A2A2A"/>
+                </a:solidFill>
+              </a:rPr>
+              <a:t>σ</a:t>
+            </a:r>
+            <a:r>
+              <a:rPr sz="1800" b="0" dirty="0">
+                <a:solidFill>
+                  <a:srgbClr val="2A2A2A"/>
+                </a:solidFill>
+              </a:rPr>
+              <a:t>(</a:t>
+            </a:r>
+            <a:r>
+              <a:rPr sz="1800" b="0" dirty="0" err="1">
+                <a:solidFill>
+                  <a:srgbClr val="2A2A2A"/>
+                </a:solidFill>
+              </a:rPr>
+              <a:t>s</a:t>
+            </a:r>
+            <a:r>
+              <a:rPr sz="1800" b="0" baseline="-25000" dirty="0" err="1">
+                <a:solidFill>
+                  <a:srgbClr val="2A2A2A"/>
+                </a:solidFill>
+              </a:rPr>
+              <a:t>A</a:t>
+            </a:r>
+            <a:r>
+              <a:rPr sz="1800" b="0" dirty="0">
+                <a:solidFill>
+                  <a:srgbClr val="2A2A2A"/>
+                </a:solidFill>
+              </a:rPr>
+              <a:t> − </a:t>
+            </a:r>
+            <a:r>
+              <a:rPr sz="1800" b="0" dirty="0" err="1">
+                <a:solidFill>
+                  <a:srgbClr val="2A2A2A"/>
+                </a:solidFill>
+              </a:rPr>
+              <a:t>s</a:t>
+            </a:r>
+            <a:r>
+              <a:rPr sz="1800" b="0" baseline="-25000" dirty="0" err="1">
+                <a:solidFill>
+                  <a:srgbClr val="2A2A2A"/>
+                </a:solidFill>
+              </a:rPr>
+              <a:t>B</a:t>
+            </a:r>
+            <a:r>
+              <a:rPr sz="1800" b="0" dirty="0">
+                <a:solidFill>
+                  <a:srgbClr val="2A2A2A"/>
+                </a:solidFill>
+              </a:rPr>
+              <a:t>) ) · ‖</a:t>
+            </a:r>
+            <a:r>
+              <a:rPr sz="1800" b="0" dirty="0" err="1">
+                <a:solidFill>
+                  <a:srgbClr val="2A2A2A"/>
+                </a:solidFill>
+              </a:rPr>
+              <a:t>φ</a:t>
+            </a:r>
+            <a:r>
+              <a:rPr sz="1800" b="0" baseline="-25000" dirty="0" err="1">
+                <a:solidFill>
+                  <a:srgbClr val="2A2A2A"/>
+                </a:solidFill>
+              </a:rPr>
+              <a:t>A</a:t>
+            </a:r>
+            <a:r>
+              <a:rPr sz="1800" b="0" dirty="0">
+                <a:solidFill>
+                  <a:srgbClr val="2A2A2A"/>
+                </a:solidFill>
+              </a:rPr>
+              <a:t> − </a:t>
+            </a:r>
+            <a:r>
+              <a:rPr sz="1800" b="0" dirty="0" err="1">
+                <a:solidFill>
+                  <a:srgbClr val="2A2A2A"/>
+                </a:solidFill>
+              </a:rPr>
+              <a:t>φ</a:t>
+            </a:r>
+            <a:r>
+              <a:rPr sz="1800" b="0" baseline="-25000" dirty="0" err="1">
+                <a:solidFill>
+                  <a:srgbClr val="2A2A2A"/>
+                </a:solidFill>
+              </a:rPr>
+              <a:t>B</a:t>
+            </a:r>
+            <a:r>
+              <a:rPr sz="1800" b="0" dirty="0">
+                <a:solidFill>
+                  <a:srgbClr val="2A2A2A"/>
+                </a:solidFill>
+              </a:rPr>
+              <a:t>‖  (uncertainty × diversity).</a:t>
             </a:r>
           </a:p>
         </p:txBody>
@@ -6482,892 +7769,6 @@
 </file>
 
 <file path=ppt/slides/slide6.xml><?xml version="1.0" encoding="utf-8"?>
-<p:sld xmlns:a="http://schemas.openxmlformats.org/drawingml/2006/main" xmlns:r="http://schemas.openxmlformats.org/officeDocument/2006/relationships" xmlns:p="http://schemas.openxmlformats.org/presentationml/2006/main">
-  <p:cSld>
-    <p:spTree>
-      <p:nvGrpSpPr>
-        <p:cNvPr id="1" name=""/>
-        <p:cNvGrpSpPr/>
-        <p:nvPr/>
-      </p:nvGrpSpPr>
-      <p:grpSpPr>
-        <a:xfrm>
-          <a:off x="0" y="0"/>
-          <a:ext cx="0" cy="0"/>
-          <a:chOff x="0" y="0"/>
-          <a:chExt cx="0" cy="0"/>
-        </a:xfrm>
-      </p:grpSpPr>
-      <p:sp>
-        <p:nvSpPr>
-          <p:cNvPr id="2" name="TextBox 1"/>
-          <p:cNvSpPr txBox="1"/>
-          <p:nvPr/>
-        </p:nvSpPr>
-        <p:spPr>
-          <a:xfrm>
-            <a:off x="548640" y="365760"/>
-            <a:ext cx="10972800" cy="640080"/>
-          </a:xfrm>
-          <a:prstGeom prst="rect">
-            <a:avLst/>
-          </a:prstGeom>
-          <a:noFill/>
-        </p:spPr>
-        <p:txBody>
-          <a:bodyPr wrap="square" anchor="t">
-            <a:spAutoFit/>
-          </a:bodyPr>
-          <a:lstStyle/>
-          <a:p>
-            <a:pPr algn="l"/>
-            <a:r>
-              <a:rPr sz="3000" b="1" dirty="0">
-                <a:solidFill>
-                  <a:srgbClr val="1F2E55"/>
-                </a:solidFill>
-              </a:rPr>
-              <a:t>Results: hand-curation lifts every gold-label metric</a:t>
-            </a:r>
-          </a:p>
-        </p:txBody>
-      </p:sp>
-      <p:sp>
-        <p:nvSpPr>
-          <p:cNvPr id="3" name="TextBox 2"/>
-          <p:cNvSpPr txBox="1"/>
-          <p:nvPr/>
-        </p:nvSpPr>
-        <p:spPr>
-          <a:xfrm>
-            <a:off x="548640" y="1097280"/>
-            <a:ext cx="11064240" cy="365760"/>
-          </a:xfrm>
-          <a:prstGeom prst="rect">
-            <a:avLst/>
-          </a:prstGeom>
-          <a:noFill/>
-        </p:spPr>
-        <p:txBody>
-          <a:bodyPr wrap="square" anchor="t">
-            <a:spAutoFit/>
-          </a:bodyPr>
-          <a:lstStyle/>
-          <a:p>
-            <a:pPr algn="l"/>
-            <a:r>
-              <a:rPr sz="1500" b="1" dirty="0">
-                <a:solidFill>
-                  <a:srgbClr val="555555"/>
-                </a:solidFill>
-              </a:rPr>
-              <a:t>On the same 13 held-out human pairs · best checkpoint per stage</a:t>
-            </a:r>
-          </a:p>
-        </p:txBody>
-      </p:sp>
-      <p:graphicFrame>
-        <p:nvGraphicFramePr>
-          <p:cNvPr id="4" name="Table 3"/>
-          <p:cNvGraphicFramePr>
-            <a:graphicFrameLocks noGrp="1"/>
-          </p:cNvGraphicFramePr>
-          <p:nvPr/>
-        </p:nvGraphicFramePr>
-        <p:xfrm>
-          <a:off x="548640" y="1554480"/>
-          <a:ext cx="6858000" cy="2548128"/>
-        </p:xfrm>
-        <a:graphic>
-          <a:graphicData uri="http://schemas.openxmlformats.org/drawingml/2006/table">
-            <a:tbl>
-              <a:tblPr firstRow="1" bandRow="1">
-                <a:tableStyleId>{5C22544A-7EE6-4342-B048-85BDC9FD1C3A}</a:tableStyleId>
-              </a:tblPr>
-              <a:tblGrid>
-                <a:gridCol w="1714500">
-                  <a:extLst>
-                    <a:ext uri="{9D8B030D-6E8A-4147-A177-3AD203B41FA5}">
-                      <a16:colId xmlns:a16="http://schemas.microsoft.com/office/drawing/2014/main" val="20000"/>
-                    </a:ext>
-                  </a:extLst>
-                </a:gridCol>
-                <a:gridCol w="1714500">
-                  <a:extLst>
-                    <a:ext uri="{9D8B030D-6E8A-4147-A177-3AD203B41FA5}">
-                      <a16:colId xmlns:a16="http://schemas.microsoft.com/office/drawing/2014/main" val="20001"/>
-                    </a:ext>
-                  </a:extLst>
-                </a:gridCol>
-                <a:gridCol w="1714500">
-                  <a:extLst>
-                    <a:ext uri="{9D8B030D-6E8A-4147-A177-3AD203B41FA5}">
-                      <a16:colId xmlns:a16="http://schemas.microsoft.com/office/drawing/2014/main" val="20002"/>
-                    </a:ext>
-                  </a:extLst>
-                </a:gridCol>
-                <a:gridCol w="1714500">
-                  <a:extLst>
-                    <a:ext uri="{9D8B030D-6E8A-4147-A177-3AD203B41FA5}">
-                      <a16:colId xmlns:a16="http://schemas.microsoft.com/office/drawing/2014/main" val="20003"/>
-                    </a:ext>
-                  </a:extLst>
-                </a:gridCol>
-              </a:tblGrid>
-              <a:tr h="475488">
-                <a:tc>
-                  <a:txBody>
-                    <a:bodyPr/>
-                    <a:lstStyle/>
-                    <a:p>
-                      <a:pPr algn="l"/>
-                      <a:r>
-                        <a:rPr sz="1400" b="1">
-                          <a:solidFill>
-                            <a:srgbClr val="1F2E55"/>
-                          </a:solidFill>
-                        </a:rPr>
-                        <a:t>Metric</a:t>
-                      </a:r>
-                    </a:p>
-                  </a:txBody>
-                  <a:tcPr>
-                    <a:solidFill>
-                      <a:srgbClr val="E8EEF5"/>
-                    </a:solidFill>
-                  </a:tcPr>
-                </a:tc>
-                <a:tc>
-                  <a:txBody>
-                    <a:bodyPr/>
-                    <a:lstStyle/>
-                    <a:p>
-                      <a:pPr algn="l"/>
-                      <a:r>
-                        <a:rPr sz="1400" b="1">
-                          <a:solidFill>
-                            <a:srgbClr val="1F2E55"/>
-                          </a:solidFill>
-                        </a:rPr>
-                        <a:t>Stage 1 (auto only)</a:t>
-                      </a:r>
-                    </a:p>
-                  </a:txBody>
-                  <a:tcPr>
-                    <a:solidFill>
-                      <a:srgbClr val="E8EEF5"/>
-                    </a:solidFill>
-                  </a:tcPr>
-                </a:tc>
-                <a:tc>
-                  <a:txBody>
-                    <a:bodyPr/>
-                    <a:lstStyle/>
-                    <a:p>
-                      <a:pPr algn="l"/>
-                      <a:r>
-                        <a:rPr sz="1400" b="1">
-                          <a:solidFill>
-                            <a:srgbClr val="1F2E55"/>
-                          </a:solidFill>
-                        </a:rPr>
-                        <a:t>Stage 2 (+39 human)</a:t>
-                      </a:r>
-                    </a:p>
-                  </a:txBody>
-                  <a:tcPr>
-                    <a:solidFill>
-                      <a:srgbClr val="E8EEF5"/>
-                    </a:solidFill>
-                  </a:tcPr>
-                </a:tc>
-                <a:tc>
-                  <a:txBody>
-                    <a:bodyPr/>
-                    <a:lstStyle/>
-                    <a:p>
-                      <a:pPr algn="l"/>
-                      <a:r>
-                        <a:rPr sz="1400" b="1">
-                          <a:solidFill>
-                            <a:srgbClr val="1F2E55"/>
-                          </a:solidFill>
-                        </a:rPr>
-                        <a:t>Δ</a:t>
-                      </a:r>
-                    </a:p>
-                  </a:txBody>
-                  <a:tcPr>
-                    <a:solidFill>
-                      <a:srgbClr val="E8EEF5"/>
-                    </a:solidFill>
-                  </a:tcPr>
-                </a:tc>
-                <a:extLst>
-                  <a:ext uri="{0D108BD9-81ED-4DB2-BD59-A6C34878D82A}">
-                    <a16:rowId xmlns:a16="http://schemas.microsoft.com/office/drawing/2014/main" val="10000"/>
-                  </a:ext>
-                </a:extLst>
-              </a:tr>
-              <a:tr h="475488">
-                <a:tc>
-                  <a:txBody>
-                    <a:bodyPr/>
-                    <a:lstStyle/>
-                    <a:p>
-                      <a:pPr algn="l"/>
-                      <a:r>
-                        <a:rPr sz="1400">
-                          <a:solidFill>
-                            <a:srgbClr val="2A2A2A"/>
-                          </a:solidFill>
-                        </a:rPr>
-                        <a:t>Pairwise (hp_v on 13)</a:t>
-                      </a:r>
-                    </a:p>
-                  </a:txBody>
-                  <a:tcPr>
-                    <a:solidFill>
-                      <a:srgbClr val="FFFFFF"/>
-                    </a:solidFill>
-                  </a:tcPr>
-                </a:tc>
-                <a:tc>
-                  <a:txBody>
-                    <a:bodyPr/>
-                    <a:lstStyle/>
-                    <a:p>
-                      <a:pPr algn="l"/>
-                      <a:r>
-                        <a:rPr sz="1400">
-                          <a:solidFill>
-                            <a:srgbClr val="2A2A2A"/>
-                          </a:solidFill>
-                        </a:rPr>
-                        <a:t>0.615  (8/13)</a:t>
-                      </a:r>
-                    </a:p>
-                  </a:txBody>
-                  <a:tcPr>
-                    <a:solidFill>
-                      <a:srgbClr val="FFFFFF"/>
-                    </a:solidFill>
-                  </a:tcPr>
-                </a:tc>
-                <a:tc>
-                  <a:txBody>
-                    <a:bodyPr/>
-                    <a:lstStyle/>
-                    <a:p>
-                      <a:pPr algn="l"/>
-                      <a:r>
-                        <a:rPr sz="1400" b="1">
-                          <a:solidFill>
-                            <a:srgbClr val="C0392B"/>
-                          </a:solidFill>
-                        </a:rPr>
-                        <a:t>0.846  (11/13)</a:t>
-                      </a:r>
-                    </a:p>
-                  </a:txBody>
-                  <a:tcPr>
-                    <a:solidFill>
-                      <a:srgbClr val="FFFFFF"/>
-                    </a:solidFill>
-                  </a:tcPr>
-                </a:tc>
-                <a:tc>
-                  <a:txBody>
-                    <a:bodyPr/>
-                    <a:lstStyle/>
-                    <a:p>
-                      <a:pPr algn="l"/>
-                      <a:r>
-                        <a:rPr sz="1400" b="1">
-                          <a:solidFill>
-                            <a:srgbClr val="C0392B"/>
-                          </a:solidFill>
-                        </a:rPr>
-                        <a:t>+0.231</a:t>
-                      </a:r>
-                    </a:p>
-                  </a:txBody>
-                  <a:tcPr>
-                    <a:solidFill>
-                      <a:srgbClr val="FFFFFF"/>
-                    </a:solidFill>
-                  </a:tcPr>
-                </a:tc>
-                <a:extLst>
-                  <a:ext uri="{0D108BD9-81ED-4DB2-BD59-A6C34878D82A}">
-                    <a16:rowId xmlns:a16="http://schemas.microsoft.com/office/drawing/2014/main" val="10001"/>
-                  </a:ext>
-                </a:extLst>
-              </a:tr>
-              <a:tr h="475488">
-                <a:tc>
-                  <a:txBody>
-                    <a:bodyPr/>
-                    <a:lstStyle/>
-                    <a:p>
-                      <a:pPr algn="l"/>
-                      <a:r>
-                        <a:rPr sz="1400">
-                          <a:solidFill>
-                            <a:srgbClr val="2A2A2A"/>
-                          </a:solidFill>
-                        </a:rPr>
-                        <a:t>Exact-match (h-arg top-1)</a:t>
-                      </a:r>
-                    </a:p>
-                  </a:txBody>
-                  <a:tcPr>
-                    <a:solidFill>
-                      <a:srgbClr val="F6F8FB"/>
-                    </a:solidFill>
-                  </a:tcPr>
-                </a:tc>
-                <a:tc>
-                  <a:txBody>
-                    <a:bodyPr/>
-                    <a:lstStyle/>
-                    <a:p>
-                      <a:pPr algn="l"/>
-                      <a:r>
-                        <a:rPr sz="1400">
-                          <a:solidFill>
-                            <a:srgbClr val="2A2A2A"/>
-                          </a:solidFill>
-                        </a:rPr>
-                        <a:t>0.538  (7/13)</a:t>
-                      </a:r>
-                    </a:p>
-                  </a:txBody>
-                  <a:tcPr>
-                    <a:solidFill>
-                      <a:srgbClr val="F6F8FB"/>
-                    </a:solidFill>
-                  </a:tcPr>
-                </a:tc>
-                <a:tc>
-                  <a:txBody>
-                    <a:bodyPr/>
-                    <a:lstStyle/>
-                    <a:p>
-                      <a:pPr algn="l"/>
-                      <a:r>
-                        <a:rPr sz="1400" b="1">
-                          <a:solidFill>
-                            <a:srgbClr val="C0392B"/>
-                          </a:solidFill>
-                        </a:rPr>
-                        <a:t>0.615  (8/13)</a:t>
-                      </a:r>
-                    </a:p>
-                  </a:txBody>
-                  <a:tcPr>
-                    <a:solidFill>
-                      <a:srgbClr val="F6F8FB"/>
-                    </a:solidFill>
-                  </a:tcPr>
-                </a:tc>
-                <a:tc>
-                  <a:txBody>
-                    <a:bodyPr/>
-                    <a:lstStyle/>
-                    <a:p>
-                      <a:pPr algn="l"/>
-                      <a:r>
-                        <a:rPr sz="1400" b="1">
-                          <a:solidFill>
-                            <a:srgbClr val="C0392B"/>
-                          </a:solidFill>
-                        </a:rPr>
-                        <a:t>+0.077</a:t>
-                      </a:r>
-                    </a:p>
-                  </a:txBody>
-                  <a:tcPr>
-                    <a:solidFill>
-                      <a:srgbClr val="F6F8FB"/>
-                    </a:solidFill>
-                  </a:tcPr>
-                </a:tc>
-                <a:extLst>
-                  <a:ext uri="{0D108BD9-81ED-4DB2-BD59-A6C34878D82A}">
-                    <a16:rowId xmlns:a16="http://schemas.microsoft.com/office/drawing/2014/main" val="10002"/>
-                  </a:ext>
-                </a:extLst>
-              </a:tr>
-              <a:tr h="475488">
-                <a:tc>
-                  <a:txBody>
-                    <a:bodyPr/>
-                    <a:lstStyle/>
-                    <a:p>
-                      <a:pPr algn="l"/>
-                      <a:r>
-                        <a:rPr sz="1400">
-                          <a:solidFill>
-                            <a:srgbClr val="2A2A2A"/>
-                          </a:solidFill>
-                        </a:rPr>
-                        <a:t>DDG argmax_pm1 (auto val maps)</a:t>
-                      </a:r>
-                    </a:p>
-                  </a:txBody>
-                  <a:tcPr>
-                    <a:solidFill>
-                      <a:srgbClr val="FFFFFF"/>
-                    </a:solidFill>
-                  </a:tcPr>
-                </a:tc>
-                <a:tc>
-                  <a:txBody>
-                    <a:bodyPr/>
-                    <a:lstStyle/>
-                    <a:p>
-                      <a:pPr algn="l"/>
-                      <a:r>
-                        <a:rPr sz="1400">
-                          <a:solidFill>
-                            <a:srgbClr val="2A2A2A"/>
-                          </a:solidFill>
-                        </a:rPr>
-                        <a:t>0.550</a:t>
-                      </a:r>
-                    </a:p>
-                  </a:txBody>
-                  <a:tcPr>
-                    <a:solidFill>
-                      <a:srgbClr val="FFFFFF"/>
-                    </a:solidFill>
-                  </a:tcPr>
-                </a:tc>
-                <a:tc>
-                  <a:txBody>
-                    <a:bodyPr/>
-                    <a:lstStyle/>
-                    <a:p>
-                      <a:pPr algn="l"/>
-                      <a:r>
-                        <a:rPr sz="1400" b="1">
-                          <a:solidFill>
-                            <a:srgbClr val="C0392B"/>
-                          </a:solidFill>
-                        </a:rPr>
-                        <a:t>0.541</a:t>
-                      </a:r>
-                    </a:p>
-                  </a:txBody>
-                  <a:tcPr>
-                    <a:solidFill>
-                      <a:srgbClr val="FFFFFF"/>
-                    </a:solidFill>
-                  </a:tcPr>
-                </a:tc>
-                <a:tc>
-                  <a:txBody>
-                    <a:bodyPr/>
-                    <a:lstStyle/>
-                    <a:p>
-                      <a:pPr algn="l"/>
-                      <a:r>
-                        <a:rPr sz="1400" b="1">
-                          <a:solidFill>
-                            <a:srgbClr val="C0392B"/>
-                          </a:solidFill>
-                        </a:rPr>
-                        <a:t>−0.009</a:t>
-                      </a:r>
-                    </a:p>
-                  </a:txBody>
-                  <a:tcPr>
-                    <a:solidFill>
-                      <a:srgbClr val="FFFFFF"/>
-                    </a:solidFill>
-                  </a:tcPr>
-                </a:tc>
-                <a:extLst>
-                  <a:ext uri="{0D108BD9-81ED-4DB2-BD59-A6C34878D82A}">
-                    <a16:rowId xmlns:a16="http://schemas.microsoft.com/office/drawing/2014/main" val="10003"/>
-                  </a:ext>
-                </a:extLst>
-              </a:tr>
-              <a:tr h="475488">
-                <a:tc>
-                  <a:txBody>
-                    <a:bodyPr/>
-                    <a:lstStyle/>
-                    <a:p>
-                      <a:pPr algn="l"/>
-                      <a:r>
-                        <a:rPr sz="1400">
-                          <a:solidFill>
-                            <a:srgbClr val="2A2A2A"/>
-                          </a:solidFill>
-                        </a:rPr>
-                        <a:t>DDG top-3 (auto val maps)</a:t>
-                      </a:r>
-                    </a:p>
-                  </a:txBody>
-                  <a:tcPr>
-                    <a:solidFill>
-                      <a:srgbClr val="F6F8FB"/>
-                    </a:solidFill>
-                  </a:tcPr>
-                </a:tc>
-                <a:tc>
-                  <a:txBody>
-                    <a:bodyPr/>
-                    <a:lstStyle/>
-                    <a:p>
-                      <a:pPr algn="l"/>
-                      <a:r>
-                        <a:rPr sz="1400">
-                          <a:solidFill>
-                            <a:srgbClr val="2A2A2A"/>
-                          </a:solidFill>
-                        </a:rPr>
-                        <a:t>0.578</a:t>
-                      </a:r>
-                    </a:p>
-                  </a:txBody>
-                  <a:tcPr>
-                    <a:solidFill>
-                      <a:srgbClr val="F6F8FB"/>
-                    </a:solidFill>
-                  </a:tcPr>
-                </a:tc>
-                <a:tc>
-                  <a:txBody>
-                    <a:bodyPr/>
-                    <a:lstStyle/>
-                    <a:p>
-                      <a:pPr algn="l"/>
-                      <a:r>
-                        <a:rPr sz="1400" b="1">
-                          <a:solidFill>
-                            <a:srgbClr val="C0392B"/>
-                          </a:solidFill>
-                        </a:rPr>
-                        <a:t>0.559</a:t>
-                      </a:r>
-                    </a:p>
-                  </a:txBody>
-                  <a:tcPr>
-                    <a:solidFill>
-                      <a:srgbClr val="F6F8FB"/>
-                    </a:solidFill>
-                  </a:tcPr>
-                </a:tc>
-                <a:tc>
-                  <a:txBody>
-                    <a:bodyPr/>
-                    <a:lstStyle/>
-                    <a:p>
-                      <a:pPr algn="l"/>
-                      <a:r>
-                        <a:rPr sz="1400" b="1">
-                          <a:solidFill>
-                            <a:srgbClr val="C0392B"/>
-                          </a:solidFill>
-                        </a:rPr>
-                        <a:t>−0.019</a:t>
-                      </a:r>
-                    </a:p>
-                  </a:txBody>
-                  <a:tcPr>
-                    <a:solidFill>
-                      <a:srgbClr val="F6F8FB"/>
-                    </a:solidFill>
-                  </a:tcPr>
-                </a:tc>
-                <a:extLst>
-                  <a:ext uri="{0D108BD9-81ED-4DB2-BD59-A6C34878D82A}">
-                    <a16:rowId xmlns:a16="http://schemas.microsoft.com/office/drawing/2014/main" val="10004"/>
-                  </a:ext>
-                </a:extLst>
-              </a:tr>
-            </a:tbl>
-          </a:graphicData>
-        </a:graphic>
-      </p:graphicFrame>
-      <p:sp>
-        <p:nvSpPr>
-          <p:cNvPr id="6" name="TextBox 5"/>
-          <p:cNvSpPr txBox="1"/>
-          <p:nvPr/>
-        </p:nvSpPr>
-        <p:spPr>
-          <a:xfrm>
-            <a:off x="548640" y="4206240"/>
-            <a:ext cx="11064240" cy="457200"/>
-          </a:xfrm>
-          <a:prstGeom prst="rect">
-            <a:avLst/>
-          </a:prstGeom>
-          <a:noFill/>
-        </p:spPr>
-        <p:txBody>
-          <a:bodyPr wrap="square" anchor="t">
-            <a:spAutoFit/>
-          </a:bodyPr>
-          <a:lstStyle/>
-          <a:p>
-            <a:pPr algn="l"/>
-            <a:r>
-              <a:rPr sz="1500" b="1" dirty="0">
-                <a:solidFill>
-                  <a:srgbClr val="C0392B"/>
-                </a:solidFill>
-              </a:rPr>
-              <a:t>Walk-away</a:t>
-            </a:r>
-          </a:p>
-        </p:txBody>
-      </p:sp>
-      <p:sp>
-        <p:nvSpPr>
-          <p:cNvPr id="7" name="TextBox 6"/>
-          <p:cNvSpPr txBox="1"/>
-          <p:nvPr/>
-        </p:nvSpPr>
-        <p:spPr>
-          <a:xfrm>
-            <a:off x="548640" y="4572000"/>
-            <a:ext cx="11064240" cy="1105431"/>
-          </a:xfrm>
-          <a:prstGeom prst="rect">
-            <a:avLst/>
-          </a:prstGeom>
-          <a:noFill/>
-        </p:spPr>
-        <p:txBody>
-          <a:bodyPr wrap="square">
-            <a:spAutoFit/>
-          </a:bodyPr>
-          <a:lstStyle/>
-          <a:p>
-            <a:pPr>
-              <a:lnSpc>
-                <a:spcPct val="125000"/>
-              </a:lnSpc>
-            </a:pPr>
-            <a:r>
-              <a:rPr sz="1800" dirty="0">
-                <a:solidFill>
-                  <a:srgbClr val="2A2A2A"/>
-                </a:solidFill>
-              </a:rPr>
-              <a:t>• </a:t>
-            </a:r>
-            <a:r>
-              <a:rPr sz="1800" b="1" dirty="0">
-                <a:solidFill>
-                  <a:srgbClr val="C0392B"/>
-                </a:solidFill>
-              </a:rPr>
-              <a:t>+3 of 13 pairs</a:t>
-            </a:r>
-            <a:r>
-              <a:rPr sz="1800" b="0" dirty="0">
-                <a:solidFill>
-                  <a:srgbClr val="2A2A2A"/>
-                </a:solidFill>
-              </a:rPr>
-              <a:t> ranked correctly · </a:t>
-            </a:r>
-            <a:r>
-              <a:rPr sz="1800" b="1" dirty="0">
-                <a:solidFill>
-                  <a:srgbClr val="C0392B"/>
-                </a:solidFill>
-              </a:rPr>
-              <a:t>+1 of 13</a:t>
-            </a:r>
-            <a:r>
-              <a:rPr sz="1800" b="0" dirty="0">
-                <a:solidFill>
-                  <a:srgbClr val="2A2A2A"/>
-                </a:solidFill>
-              </a:rPr>
-              <a:t> worst-segments identified exactly.</a:t>
-            </a:r>
-          </a:p>
-          <a:p>
-            <a:pPr>
-              <a:lnSpc>
-                <a:spcPct val="125000"/>
-              </a:lnSpc>
-            </a:pPr>
-            <a:r>
-              <a:rPr sz="1800" dirty="0">
-                <a:solidFill>
-                  <a:srgbClr val="2A2A2A"/>
-                </a:solidFill>
-              </a:rPr>
-              <a:t>• </a:t>
-            </a:r>
-            <a:r>
-              <a:rPr sz="1800" b="1" dirty="0">
-                <a:solidFill>
-                  <a:srgbClr val="2A2A2A"/>
-                </a:solidFill>
-              </a:rPr>
-              <a:t>No measurable cost</a:t>
-            </a:r>
-            <a:r>
-              <a:rPr sz="1800" b="0" dirty="0">
-                <a:solidFill>
-                  <a:srgbClr val="2A2A2A"/>
-                </a:solidFill>
-              </a:rPr>
-              <a:t> on </a:t>
-            </a:r>
-            <a:r>
-              <a:rPr sz="1800" b="0">
-                <a:solidFill>
-                  <a:srgbClr val="2A2A2A"/>
-                </a:solidFill>
-              </a:rPr>
-              <a:t>auto-aligned ranking </a:t>
-            </a:r>
-            <a:r>
-              <a:rPr lang="en-US" sz="1800" b="0" dirty="0">
-                <a:solidFill>
-                  <a:srgbClr val="2A2A2A"/>
-                </a:solidFill>
-              </a:rPr>
-              <a:t>both DDG</a:t>
-            </a:r>
-            <a:r>
-              <a:rPr sz="1800" b="0" dirty="0">
-                <a:solidFill>
-                  <a:srgbClr val="2A2A2A"/>
-                </a:solidFill>
-              </a:rPr>
-              <a:t> metrics within 2 points.</a:t>
-            </a:r>
-          </a:p>
-          <a:p>
-            <a:pPr>
-              <a:lnSpc>
-                <a:spcPct val="125000"/>
-              </a:lnSpc>
-            </a:pPr>
-            <a:r>
-              <a:rPr sz="1800" dirty="0">
-                <a:solidFill>
-                  <a:srgbClr val="2A2A2A"/>
-                </a:solidFill>
-              </a:rPr>
-              <a:t>• </a:t>
-            </a:r>
-            <a:r>
-              <a:rPr sz="1800" b="0" dirty="0">
-                <a:solidFill>
-                  <a:srgbClr val="2A2A2A"/>
-                </a:solidFill>
-              </a:rPr>
-              <a:t>Deployment-ready checkpoint: </a:t>
-            </a:r>
-            <a:r>
-              <a:rPr sz="1600" b="1" dirty="0">
-                <a:solidFill>
-                  <a:srgbClr val="1F2E55"/>
-                </a:solidFill>
-              </a:rPr>
-              <a:t>with_human_labels.human_argmax_top1.pt</a:t>
-            </a:r>
-            <a:r>
-              <a:rPr sz="1800" b="0" dirty="0">
-                <a:solidFill>
-                  <a:srgbClr val="2A2A2A"/>
-                </a:solidFill>
-              </a:rPr>
-              <a:t> (best across all 4 save criteria).</a:t>
-            </a:r>
-          </a:p>
-        </p:txBody>
-      </p:sp>
-      <p:sp>
-        <p:nvSpPr>
-          <p:cNvPr id="9" name="TextBox 8"/>
-          <p:cNvSpPr txBox="1"/>
-          <p:nvPr/>
-        </p:nvSpPr>
-        <p:spPr>
-          <a:xfrm>
-            <a:off x="365760" y="6446520"/>
-            <a:ext cx="7315200" cy="320040"/>
-          </a:xfrm>
-          <a:prstGeom prst="rect">
-            <a:avLst/>
-          </a:prstGeom>
-          <a:noFill/>
-        </p:spPr>
-        <p:txBody>
-          <a:bodyPr wrap="square" anchor="t">
-            <a:spAutoFit/>
-          </a:bodyPr>
-          <a:lstStyle/>
-          <a:p>
-            <a:pPr algn="l"/>
-            <a:r>
-              <a:rPr sz="1000" b="0">
-                <a:solidFill>
-                  <a:srgbClr val="888888"/>
-                </a:solidFill>
-              </a:rPr>
-              <a:t>HRI Final · Human-in-the-Loop Congestion Classification for MAPF</a:t>
-            </a:r>
-          </a:p>
-        </p:txBody>
-      </p:sp>
-      <p:sp>
-        <p:nvSpPr>
-          <p:cNvPr id="10" name="TextBox 9"/>
-          <p:cNvSpPr txBox="1"/>
-          <p:nvPr/>
-        </p:nvSpPr>
-        <p:spPr>
-          <a:xfrm>
-            <a:off x="10972800" y="6446520"/>
-            <a:ext cx="1097280" cy="320040"/>
-          </a:xfrm>
-          <a:prstGeom prst="rect">
-            <a:avLst/>
-          </a:prstGeom>
-          <a:noFill/>
-        </p:spPr>
-        <p:txBody>
-          <a:bodyPr wrap="square" anchor="t">
-            <a:spAutoFit/>
-          </a:bodyPr>
-          <a:lstStyle/>
-          <a:p>
-            <a:pPr algn="r"/>
-            <a:r>
-              <a:rPr sz="1000" b="0">
-                <a:solidFill>
-                  <a:srgbClr val="888888"/>
-                </a:solidFill>
-              </a:rPr>
-              <a:t>6 / 8</a:t>
-            </a:r>
-          </a:p>
-        </p:txBody>
-      </p:sp>
-    </p:spTree>
-  </p:cSld>
-  <p:clrMapOvr>
-    <a:masterClrMapping/>
-  </p:clrMapOvr>
-</p:sld>
-</file>
-
-<file path=ppt/slides/slide7.xml><?xml version="1.0" encoding="utf-8"?>
 <p:sld xmlns:a="http://schemas.openxmlformats.org/drawingml/2006/main" xmlns:r="http://schemas.openxmlformats.org/officeDocument/2006/relationships" xmlns:p="http://schemas.openxmlformats.org/presentationml/2006/main">
   <p:cSld>
     <p:spTree>
@@ -7485,7 +7886,7 @@
                   <a:srgbClr val="1F2E55"/>
                 </a:solidFill>
               </a:rPr>
-              <a:t>Add SVGs</a:t>
+              <a:t>Demo</a:t>
             </a:r>
             <a:endParaRPr sz="3000" b="1" dirty="0">
               <a:solidFill>
@@ -7505,6 +7906,327 @@
   <p:clrMapOvr>
     <a:masterClrMapping/>
   </p:clrMapOvr>
+</p:sld>
+</file>
+
+<file path=ppt/slides/slide7.xml><?xml version="1.0" encoding="utf-8"?>
+<p:sld xmlns:a="http://schemas.openxmlformats.org/drawingml/2006/main" xmlns:r="http://schemas.openxmlformats.org/officeDocument/2006/relationships" xmlns:p="http://schemas.openxmlformats.org/presentationml/2006/main">
+  <p:cSld>
+    <p:spTree>
+      <p:nvGrpSpPr>
+        <p:cNvPr id="1" name="">
+          <a:extLst>
+            <a:ext uri="{FF2B5EF4-FFF2-40B4-BE49-F238E27FC236}">
+              <a16:creationId xmlns:a16="http://schemas.microsoft.com/office/drawing/2014/main" id="{ABCDE1E3-E251-5BB3-E692-27327D9D125B}"/>
+            </a:ext>
+          </a:extLst>
+        </p:cNvPr>
+        <p:cNvGrpSpPr/>
+        <p:nvPr/>
+      </p:nvGrpSpPr>
+      <p:grpSpPr>
+        <a:xfrm>
+          <a:off x="0" y="0"/>
+          <a:ext cx="0" cy="0"/>
+          <a:chOff x="0" y="0"/>
+          <a:chExt cx="0" cy="0"/>
+        </a:xfrm>
+      </p:grpSpPr>
+      <p:graphicFrame>
+        <p:nvGraphicFramePr>
+          <p:cNvPr id="3" name="think-cell data - do not delete" hidden="1">
+            <a:extLst>
+              <a:ext uri="{FF2B5EF4-FFF2-40B4-BE49-F238E27FC236}">
+                <a16:creationId xmlns:a16="http://schemas.microsoft.com/office/drawing/2014/main" id="{8DAED9F6-5FFC-F04D-CD30-333A746405E4}"/>
+              </a:ext>
+            </a:extLst>
+          </p:cNvPr>
+          <p:cNvGraphicFramePr>
+            <a:graphicFrameLocks/>
+          </p:cNvGraphicFramePr>
+          <p:nvPr>
+            <p:custDataLst>
+              <p:tags r:id="rId1"/>
+            </p:custDataLst>
+          </p:nvPr>
+        </p:nvGraphicFramePr>
+        <p:xfrm>
+          <a:off x="1588" y="1588"/>
+          <a:ext cx="1227" cy="1588"/>
+        </p:xfrm>
+        <a:graphic>
+          <a:graphicData uri="http://schemas.openxmlformats.org/presentationml/2006/ole">
+            <mc:AlternateContent xmlns:mc="http://schemas.openxmlformats.org/markup-compatibility/2006">
+              <mc:Choice xmlns:v="urn:schemas-microsoft-com:vml" Requires="v">
+                <p:oleObj name="think-cell Slide" r:id="rId5" imgW="7772400" imgH="10058400" progId="TCLayout.ActiveDocument.1">
+                  <p:embed/>
+                </p:oleObj>
+              </mc:Choice>
+              <mc:Fallback>
+                <p:oleObj name="think-cell Slide" r:id="rId5" imgW="7772400" imgH="10058400" progId="TCLayout.ActiveDocument.1">
+                  <p:embed/>
+                  <p:pic>
+                    <p:nvPicPr>
+                      <p:cNvPr id="3" name="think-cell data - do not delete" hidden="1">
+                        <a:extLst>
+                          <a:ext uri="{FF2B5EF4-FFF2-40B4-BE49-F238E27FC236}">
+                            <a16:creationId xmlns:a16="http://schemas.microsoft.com/office/drawing/2014/main" id="{143D7C21-76FB-1EFC-8346-D375F0D57F58}"/>
+                          </a:ext>
+                        </a:extLst>
+                      </p:cNvPr>
+                      <p:cNvPicPr/>
+                      <p:nvPr/>
+                    </p:nvPicPr>
+                    <p:blipFill>
+                      <a:blip r:embed="rId6"/>
+                      <a:stretch>
+                        <a:fillRect/>
+                      </a:stretch>
+                    </p:blipFill>
+                    <p:spPr>
+                      <a:xfrm>
+                        <a:off x="1588" y="1588"/>
+                        <a:ext cx="1227" cy="1588"/>
+                      </a:xfrm>
+                      <a:prstGeom prst="rect">
+                        <a:avLst/>
+                      </a:prstGeom>
+                    </p:spPr>
+                  </p:pic>
+                </p:oleObj>
+              </mc:Fallback>
+            </mc:AlternateContent>
+          </a:graphicData>
+        </a:graphic>
+      </p:graphicFrame>
+      <p:sp>
+        <p:nvSpPr>
+          <p:cNvPr id="10" name="TextBox 9">
+            <a:extLst>
+              <a:ext uri="{FF2B5EF4-FFF2-40B4-BE49-F238E27FC236}">
+                <a16:creationId xmlns:a16="http://schemas.microsoft.com/office/drawing/2014/main" id="{84FF2EE8-6C53-EFC5-972A-DD2205C79BE4}"/>
+              </a:ext>
+            </a:extLst>
+          </p:cNvPr>
+          <p:cNvSpPr txBox="1"/>
+          <p:nvPr/>
+        </p:nvSpPr>
+        <p:spPr>
+          <a:xfrm>
+            <a:off x="548640" y="365760"/>
+            <a:ext cx="10972800" cy="553998"/>
+          </a:xfrm>
+          <a:prstGeom prst="rect">
+            <a:avLst/>
+          </a:prstGeom>
+          <a:noFill/>
+        </p:spPr>
+        <p:txBody>
+          <a:bodyPr wrap="square" anchor="t">
+            <a:spAutoFit/>
+          </a:bodyPr>
+          <a:lstStyle/>
+          <a:p>
+            <a:pPr algn="l"/>
+            <a:r>
+              <a:rPr lang="en-US" sz="3000" b="1" dirty="0">
+                <a:solidFill>
+                  <a:srgbClr val="1F2E55"/>
+                </a:solidFill>
+              </a:rPr>
+              <a:t>Human labeling demo</a:t>
+            </a:r>
+            <a:endParaRPr sz="3000" b="1" dirty="0">
+              <a:solidFill>
+                <a:srgbClr val="1F2E55"/>
+              </a:solidFill>
+            </a:endParaRPr>
+          </a:p>
+        </p:txBody>
+      </p:sp>
+      <p:pic>
+        <p:nvPicPr>
+          <p:cNvPr id="2" name="stage 4 labeling">
+            <a:hlinkClick r:id="" action="ppaction://media"/>
+            <a:extLst>
+              <a:ext uri="{FF2B5EF4-FFF2-40B4-BE49-F238E27FC236}">
+                <a16:creationId xmlns:a16="http://schemas.microsoft.com/office/drawing/2014/main" id="{07EF718C-F715-5C19-C7A9-5B41C1359EAE}"/>
+              </a:ext>
+            </a:extLst>
+          </p:cNvPr>
+          <p:cNvPicPr>
+            <a:picLocks noChangeAspect="1"/>
+          </p:cNvPicPr>
+          <p:nvPr>
+            <a:videoFile r:link="rId3"/>
+            <p:extLst>
+              <p:ext uri="{DAA4B4D4-6D71-4841-9C94-3DE7FCFB9230}">
+                <p14:media xmlns:p14="http://schemas.microsoft.com/office/powerpoint/2010/main" r:embed="rId2"/>
+              </p:ext>
+            </p:extLst>
+          </p:nvPr>
+        </p:nvPicPr>
+        <p:blipFill>
+          <a:blip r:embed="rId7"/>
+          <a:stretch>
+            <a:fillRect/>
+          </a:stretch>
+        </p:blipFill>
+        <p:spPr>
+          <a:xfrm>
+            <a:off x="1911278" y="1218203"/>
+            <a:ext cx="8369444" cy="4421593"/>
+          </a:xfrm>
+          <a:prstGeom prst="rect">
+            <a:avLst/>
+          </a:prstGeom>
+        </p:spPr>
+      </p:pic>
+    </p:spTree>
+    <p:extLst>
+      <p:ext uri="{BB962C8B-B14F-4D97-AF65-F5344CB8AC3E}">
+        <p14:creationId xmlns:p14="http://schemas.microsoft.com/office/powerpoint/2010/main" val="2675514081"/>
+      </p:ext>
+    </p:extLst>
+  </p:cSld>
+  <p:clrMapOvr>
+    <a:masterClrMapping/>
+  </p:clrMapOvr>
+  <p:timing>
+    <p:tnLst>
+      <p:par>
+        <p:cTn id="1" dur="indefinite" restart="never" nodeType="tmRoot">
+          <p:childTnLst>
+            <p:seq concurrent="1" nextAc="seek">
+              <p:cTn id="2" dur="indefinite" nodeType="mainSeq">
+                <p:childTnLst>
+                  <p:par>
+                    <p:cTn id="3" fill="hold">
+                      <p:stCondLst>
+                        <p:cond delay="indefinite"/>
+                      </p:stCondLst>
+                      <p:childTnLst>
+                        <p:par>
+                          <p:cTn id="4" fill="hold">
+                            <p:stCondLst>
+                              <p:cond delay="0"/>
+                            </p:stCondLst>
+                            <p:childTnLst>
+                              <p:par>
+                                <p:cTn id="5" presetID="1" presetClass="mediacall" presetSubtype="0" fill="hold" nodeType="clickEffect">
+                                  <p:stCondLst>
+                                    <p:cond delay="0"/>
+                                  </p:stCondLst>
+                                  <p:childTnLst>
+                                    <p:cmd type="call" cmd="playFrom(0.0)">
+                                      <p:cBhvr>
+                                        <p:cTn id="6" dur="7325" fill="hold"/>
+                                        <p:tgtEl>
+                                          <p:spTgt spid="2"/>
+                                        </p:tgtEl>
+                                      </p:cBhvr>
+                                    </p:cmd>
+                                  </p:childTnLst>
+                                </p:cTn>
+                              </p:par>
+                            </p:childTnLst>
+                          </p:cTn>
+                        </p:par>
+                      </p:childTnLst>
+                    </p:cTn>
+                  </p:par>
+                </p:childTnLst>
+              </p:cTn>
+              <p:prevCondLst>
+                <p:cond evt="onPrev" delay="0">
+                  <p:tgtEl>
+                    <p:sldTgt/>
+                  </p:tgtEl>
+                </p:cond>
+              </p:prevCondLst>
+              <p:nextCondLst>
+                <p:cond evt="onNext" delay="0">
+                  <p:tgtEl>
+                    <p:sldTgt/>
+                  </p:tgtEl>
+                </p:cond>
+              </p:nextCondLst>
+            </p:seq>
+            <p:video>
+              <p:cMediaNode vol="80000">
+                <p:cTn id="7" fill="hold" display="0">
+                  <p:stCondLst>
+                    <p:cond delay="indefinite"/>
+                  </p:stCondLst>
+                </p:cTn>
+                <p:tgtEl>
+                  <p:spTgt spid="2"/>
+                </p:tgtEl>
+              </p:cMediaNode>
+            </p:video>
+            <p:seq concurrent="1" nextAc="seek">
+              <p:cTn id="8" restart="whenNotActive" fill="hold" evtFilter="cancelBubble" nodeType="interactiveSeq">
+                <p:stCondLst>
+                  <p:cond evt="onClick" delay="0">
+                    <p:tgtEl>
+                      <p:spTgt spid="2"/>
+                    </p:tgtEl>
+                  </p:cond>
+                </p:stCondLst>
+                <p:endSync evt="end" delay="0">
+                  <p:rtn val="all"/>
+                </p:endSync>
+                <p:childTnLst>
+                  <p:par>
+                    <p:cTn id="9" fill="hold">
+                      <p:stCondLst>
+                        <p:cond delay="0"/>
+                      </p:stCondLst>
+                      <p:childTnLst>
+                        <p:par>
+                          <p:cTn id="10" fill="hold">
+                            <p:stCondLst>
+                              <p:cond delay="0"/>
+                            </p:stCondLst>
+                            <p:childTnLst>
+                              <p:par>
+                                <p:cTn id="11" presetID="2" presetClass="mediacall" presetSubtype="0" fill="hold" nodeType="clickEffect">
+                                  <p:stCondLst>
+                                    <p:cond delay="0"/>
+                                  </p:stCondLst>
+                                  <p:childTnLst>
+                                    <p:cmd type="call" cmd="togglePause">
+                                      <p:cBhvr>
+                                        <p:cTn id="12" dur="1" fill="hold"/>
+                                        <p:tgtEl>
+                                          <p:spTgt spid="2"/>
+                                        </p:tgtEl>
+                                      </p:cBhvr>
+                                    </p:cmd>
+                                  </p:childTnLst>
+                                </p:cTn>
+                              </p:par>
+                            </p:childTnLst>
+                          </p:cTn>
+                        </p:par>
+                      </p:childTnLst>
+                    </p:cTn>
+                  </p:par>
+                </p:childTnLst>
+              </p:cTn>
+              <p:nextCondLst>
+                <p:cond evt="onClick" delay="0">
+                  <p:tgtEl>
+                    <p:spTgt spid="2"/>
+                  </p:tgtEl>
+                </p:cond>
+              </p:nextCondLst>
+            </p:seq>
+          </p:childTnLst>
+        </p:cTn>
+      </p:par>
+    </p:tnLst>
+  </p:timing>
 </p:sld>
 </file>
 
@@ -7628,7 +8350,13 @@
           <p:cNvGraphicFramePr>
             <a:graphicFrameLocks noGrp="1"/>
           </p:cNvGraphicFramePr>
-          <p:nvPr/>
+          <p:nvPr>
+            <p:extLst>
+              <p:ext uri="{D42A27DB-BD31-4B8C-83A1-F6EECF244321}">
+                <p14:modId xmlns:p14="http://schemas.microsoft.com/office/powerpoint/2010/main" val="2599357325"/>
+              </p:ext>
+            </p:extLst>
+          </p:nvPr>
         </p:nvGraphicFramePr>
         <p:xfrm>
           <a:off x="548640" y="1554480"/>
@@ -7641,14 +8369,14 @@
                 <a:tableStyleId>{5C22544A-7EE6-4342-B048-85BDC9FD1C3A}</a:tableStyleId>
               </a:tblPr>
               <a:tblGrid>
-                <a:gridCol w="2212848">
+                <a:gridCol w="2231136">
                   <a:extLst>
                     <a:ext uri="{9D8B030D-6E8A-4147-A177-3AD203B41FA5}">
                       <a16:colId xmlns:a16="http://schemas.microsoft.com/office/drawing/2014/main" val="20000"/>
                     </a:ext>
                   </a:extLst>
                 </a:gridCol>
-                <a:gridCol w="2212848">
+                <a:gridCol w="2194560">
                   <a:extLst>
                     <a:ext uri="{9D8B030D-6E8A-4147-A177-3AD203B41FA5}">
                       <a16:colId xmlns:a16="http://schemas.microsoft.com/office/drawing/2014/main" val="20001"/>
@@ -7746,7 +8474,7 @@
                     <a:p>
                       <a:pPr algn="l"/>
                       <a:r>
-                        <a:rPr sz="1200" b="1">
+                        <a:rPr sz="1200" b="1" dirty="0">
                           <a:solidFill>
                             <a:srgbClr val="1F2E55"/>
                           </a:solidFill>
@@ -7865,7 +8593,7 @@
                     <a:p>
                       <a:pPr algn="l"/>
                       <a:r>
-                        <a:rPr sz="1100" b="0">
+                        <a:rPr sz="1100" b="0" dirty="0">
                           <a:solidFill>
                             <a:srgbClr val="2A2A2A"/>
                           </a:solidFill>
@@ -7982,7 +8710,7 @@
                     <a:p>
                       <a:pPr algn="l"/>
                       <a:r>
-                        <a:rPr sz="1100" b="1">
+                        <a:rPr sz="1100" b="1" dirty="0">
                           <a:solidFill>
                             <a:srgbClr val="C0392B"/>
                           </a:solidFill>
@@ -8099,7 +8827,7 @@
                     <a:p>
                       <a:pPr algn="l"/>
                       <a:r>
-                        <a:rPr sz="1100" b="0">
+                        <a:rPr sz="1100" b="0" dirty="0">
                           <a:solidFill>
                             <a:srgbClr val="2A2A2A"/>
                           </a:solidFill>
@@ -8216,7 +8944,7 @@
                     <a:p>
                       <a:pPr algn="l"/>
                       <a:r>
-                        <a:rPr sz="1100" b="0">
+                        <a:rPr sz="1100" b="0" dirty="0">
                           <a:solidFill>
                             <a:srgbClr val="2A2A2A"/>
                           </a:solidFill>
@@ -8238,12 +8966,28 @@
                     <a:p>
                       <a:pPr algn="l"/>
                       <a:r>
-                        <a:rPr sz="1100" b="0">
+                        <a:rPr sz="1100" b="0" dirty="0">
                           <a:solidFill>
                             <a:srgbClr val="2A2A2A"/>
                           </a:solidFill>
                         </a:rPr>
-                        <a:t>round 3 (pm1=0.565, hp_val=0.583)</a:t>
+                        <a:t>round 3 (pm1=0.565, </a:t>
+                      </a:r>
+                      <a:r>
+                        <a:rPr sz="1100" b="0" dirty="0" err="1">
+                          <a:solidFill>
+                            <a:srgbClr val="2A2A2A"/>
+                          </a:solidFill>
+                        </a:rPr>
+                        <a:t>hp_val</a:t>
+                      </a:r>
+                      <a:r>
+                        <a:rPr sz="1100" b="0" dirty="0">
+                          <a:solidFill>
+                            <a:srgbClr val="2A2A2A"/>
+                          </a:solidFill>
+                        </a:rPr>
+                        <a:t>=0.583)</a:t>
                       </a:r>
                     </a:p>
                   </a:txBody>
@@ -8355,7 +9099,7 @@
                     <a:p>
                       <a:pPr algn="l"/>
                       <a:r>
-                        <a:rPr sz="1100" b="0">
+                        <a:rPr sz="1100" b="0" dirty="0">
                           <a:solidFill>
                             <a:srgbClr val="2A2A2A"/>
                           </a:solidFill>
@@ -8428,13 +9172,26 @@
                     <a:p>
                       <a:pPr algn="l"/>
                       <a:r>
-                        <a:rPr sz="1100" b="0">
+                        <a:rPr sz="1100" b="0" dirty="0">
                           <a:solidFill>
                             <a:srgbClr val="2A2A2A"/>
                           </a:solidFill>
                         </a:rPr>
-                        <a:t>≈3</a:t>
+                        <a:t>≈</a:t>
                       </a:r>
+                      <a:r>
+                        <a:rPr lang="en-US" sz="1100" b="0" dirty="0">
+                          <a:solidFill>
+                            <a:srgbClr val="2A2A2A"/>
+                          </a:solidFill>
+                        </a:rPr>
+                        <a:t>0.5</a:t>
+                      </a:r>
+                      <a:endParaRPr sz="1100" b="0" dirty="0">
+                        <a:solidFill>
+                          <a:srgbClr val="2A2A2A"/>
+                        </a:solidFill>
+                      </a:endParaRPr>
                     </a:p>
                   </a:txBody>
                   <a:tcPr>
@@ -8450,13 +9207,26 @@
                     <a:p>
                       <a:pPr algn="l"/>
                       <a:r>
-                        <a:rPr sz="1100" b="0">
+                        <a:rPr sz="1100" b="0" dirty="0">
                           <a:solidFill>
                             <a:srgbClr val="2A2A2A"/>
                           </a:solidFill>
                         </a:rPr>
-                        <a:t>≈3</a:t>
+                        <a:t>≈</a:t>
                       </a:r>
+                      <a:r>
+                        <a:rPr lang="en-US" sz="1100" b="0" dirty="0">
+                          <a:solidFill>
+                            <a:srgbClr val="2A2A2A"/>
+                          </a:solidFill>
+                        </a:rPr>
+                        <a:t>0.5</a:t>
+                      </a:r>
+                      <a:endParaRPr sz="1100" b="0" dirty="0">
+                        <a:solidFill>
+                          <a:srgbClr val="2A2A2A"/>
+                        </a:solidFill>
+                      </a:endParaRPr>
                     </a:p>
                   </a:txBody>
                   <a:tcPr>
@@ -8472,13 +9242,26 @@
                     <a:p>
                       <a:pPr algn="l"/>
                       <a:r>
-                        <a:rPr sz="1100" b="0">
+                        <a:rPr sz="1100" b="0" dirty="0">
                           <a:solidFill>
                             <a:srgbClr val="2A2A2A"/>
                           </a:solidFill>
                         </a:rPr>
-                        <a:t>≈3 (split across rounds)</a:t>
+                        <a:t>≈</a:t>
                       </a:r>
+                      <a:r>
+                        <a:rPr lang="en-US" sz="1100" b="0" dirty="0">
+                          <a:solidFill>
+                            <a:srgbClr val="2A2A2A"/>
+                          </a:solidFill>
+                        </a:rPr>
+                        <a:t>0.5</a:t>
+                      </a:r>
+                      <a:endParaRPr sz="1100" b="0" dirty="0">
+                        <a:solidFill>
+                          <a:srgbClr val="2A2A2A"/>
+                        </a:solidFill>
+                      </a:endParaRPr>
                     </a:p>
                   </a:txBody>
                   <a:tcPr>
@@ -8589,7 +9372,7 @@
                     <a:p>
                       <a:pPr algn="l"/>
                       <a:r>
-                        <a:rPr sz="1100" b="0">
+                        <a:rPr sz="1100" b="0" dirty="0">
                           <a:solidFill>
                             <a:srgbClr val="2A2A2A"/>
                           </a:solidFill>
@@ -8655,8 +9438,8 @@
         </p:nvSpPr>
         <p:spPr>
           <a:xfrm>
-            <a:off x="548640" y="4800600"/>
-            <a:ext cx="11064240" cy="2030556"/>
+            <a:off x="365760" y="4800600"/>
+            <a:ext cx="11460480" cy="1470403"/>
           </a:xfrm>
           <a:prstGeom prst="rect">
             <a:avLst/>
@@ -8720,7 +9503,7 @@
                   <a:srgbClr val="2A2A2A"/>
                 </a:solidFill>
               </a:rPr>
-              <a:t> (Stage 2 = Stage 1 = 0.417). Just adding human labels without selection priority is not enough.</a:t>
+              <a:t>. Just adding human labels without selection priority is not enough.</a:t>
             </a:r>
             <a:endParaRPr sz="1500" b="0" dirty="0">
               <a:solidFill>
@@ -8772,7 +9555,7 @@
                   <a:srgbClr val="2A2A2A"/>
                 </a:solidFill>
               </a:rPr>
-              <a:t> over random (5/12 → 7/12) at the same 56-label budget. Selection strategy matters more than label volume.</a:t>
+              <a:t> over random at the same 56-label budget. Selection strategy matters more than label volume.</a:t>
             </a:r>
           </a:p>
           <a:p>
@@ -8833,9 +9616,6 @@
                 <a:solidFill>
                   <a:srgbClr val="2A2A2A"/>
                 </a:solidFill>
-                <a:highlight>
-                  <a:srgbClr val="FFFBCC"/>
-                </a:highlight>
               </a:rPr>
               <a:t>preserved</a:t>
             </a:r>
@@ -9051,8 +9831,19 @@
                 <a:solidFill>
                   <a:srgbClr val="2A2A2A"/>
                 </a:solidFill>
-              </a:rPr>
-              <a:t>39 human pairs (≈0.15% of gradient) → </a:t>
+                <a:highlight>
+                  <a:srgbClr val="FF0000"/>
+                </a:highlight>
+              </a:rPr>
+              <a:t>39 human pairs (≈0.15% of gradient) </a:t>
+            </a:r>
+            <a:r>
+              <a:rPr sz="1900" b="0" dirty="0">
+                <a:solidFill>
+                  <a:srgbClr val="2A2A2A"/>
+                </a:solidFill>
+              </a:rPr>
+              <a:t>→ </a:t>
             </a:r>
             <a:r>
               <a:rPr sz="1900" b="1" dirty="0">
@@ -9162,8 +9953,21 @@
                   <a:srgbClr val="2A2A2A"/>
                 </a:solidFill>
               </a:rPr>
-              <a:t> (Stages 1–4 at fixed budget) is the contribution that adds depth.</a:t>
-            </a:r>
+              <a:t> (Stages 1–4 at fixed budget) </a:t>
+            </a:r>
+            <a:r>
+              <a:rPr lang="en-US" sz="1900" b="0" dirty="0">
+                <a:solidFill>
+                  <a:srgbClr val="2A2A2A"/>
+                </a:solidFill>
+              </a:rPr>
+              <a:t>matters.</a:t>
+            </a:r>
+            <a:endParaRPr sz="1900" b="0" dirty="0">
+              <a:solidFill>
+                <a:srgbClr val="2A2A2A"/>
+              </a:solidFill>
+            </a:endParaRPr>
           </a:p>
         </p:txBody>
       </p:sp>
@@ -9176,7 +9980,7 @@
         <p:spPr>
           <a:xfrm>
             <a:off x="548640" y="3931920"/>
-            <a:ext cx="11064240" cy="365760"/>
+            <a:ext cx="11064240" cy="323165"/>
           </a:xfrm>
           <a:prstGeom prst="rect">
             <a:avLst/>
@@ -9191,13 +9995,34 @@
           <a:p>
             <a:pPr algn="l"/>
             <a:r>
-              <a:rPr sz="1500" b="1">
+              <a:rPr lang="en-US" sz="1500" b="1" dirty="0">
                 <a:solidFill>
                   <a:srgbClr val="C0392B"/>
                 </a:solidFill>
               </a:rPr>
-              <a:t>Honest limitations</a:t>
-            </a:r>
+              <a:t>L</a:t>
+            </a:r>
+            <a:r>
+              <a:rPr sz="1500" b="1" dirty="0">
+                <a:solidFill>
+                  <a:srgbClr val="C0392B"/>
+                </a:solidFill>
+              </a:rPr>
+              <a:t>imitations</a:t>
+            </a:r>
+            <a:r>
+              <a:rPr lang="en-US" sz="1500" b="1" dirty="0">
+                <a:solidFill>
+                  <a:srgbClr val="C0392B"/>
+                </a:solidFill>
+              </a:rPr>
+              <a:t> and Future Work</a:t>
+            </a:r>
+            <a:endParaRPr sz="1500" b="1" dirty="0">
+              <a:solidFill>
+                <a:srgbClr val="C0392B"/>
+              </a:solidFill>
+            </a:endParaRPr>
           </a:p>
         </p:txBody>
       </p:sp>
@@ -9210,7 +10035,7 @@
         <p:spPr>
           <a:xfrm>
             <a:off x="548640" y="4297680"/>
-            <a:ext cx="11064240" cy="1703223"/>
+            <a:ext cx="11064240" cy="722185"/>
           </a:xfrm>
           <a:prstGeom prst="rect">
             <a:avLst/>
@@ -9229,28 +10054,12 @@
               </a:lnSpc>
             </a:pPr>
             <a:r>
-              <a:rPr sz="1700" dirty="0">
+              <a:rPr lang="en-US" sz="1700" dirty="0">
                 <a:solidFill>
                   <a:srgbClr val="555555"/>
                 </a:solidFill>
               </a:rPr>
-              <a:t>• Run-to-run variance is large: </a:t>
-            </a:r>
-            <a:r>
-              <a:rPr sz="1700" dirty="0" err="1">
-                <a:solidFill>
-                  <a:srgbClr val="555555"/>
-                </a:solidFill>
-              </a:rPr>
-              <a:t>hp_val</a:t>
-            </a:r>
-            <a:r>
-              <a:rPr sz="1700" dirty="0">
-                <a:solidFill>
-                  <a:srgbClr val="555555"/>
-                </a:solidFill>
-              </a:rPr>
-              <a:t> swung 0.615 ↔ 0.846 across two reseeds. Multi-seed averaging is the obvious follow-up.</a:t>
+              <a:t>• Dataset size is still lean and we would like to add more data annotations to try for improvements over more epochs</a:t>
             </a:r>
           </a:p>
           <a:p>
@@ -9265,22 +10074,23 @@
                   <a:srgbClr val="555555"/>
                 </a:solidFill>
               </a:rPr>
-              <a:t>• Stages 3 &amp; 4 single-seed at submission time.</a:t>
-            </a:r>
-          </a:p>
-          <a:p>
-            <a:pPr>
-              <a:lnSpc>
-                <a:spcPct val="125000"/>
-              </a:lnSpc>
-            </a:pPr>
+              <a:t>• No downstream MAPF-GPT impact study yet</a:t>
+            </a:r>
+            <a:r>
+              <a:rPr lang="en-US" sz="1700" dirty="0">
+                <a:solidFill>
+                  <a:srgbClr val="555555"/>
+                </a:solidFill>
+              </a:rPr>
+              <a:t>:</a:t>
+            </a:r>
             <a:r>
               <a:rPr sz="1700" dirty="0">
                 <a:solidFill>
                   <a:srgbClr val="555555"/>
                 </a:solidFill>
               </a:rPr>
-              <a:t>• No downstream MAPF-GPT impact study yet</a:t>
+              <a:t> does using this classifier in DDG </a:t>
             </a:r>
             <a:r>
               <a:rPr lang="en-US" sz="1700" dirty="0">
@@ -9288,7 +10098,7 @@
                   <a:srgbClr val="555555"/>
                 </a:solidFill>
               </a:rPr>
-              <a:t>:</a:t>
+              <a:t>train</a:t>
             </a:r>
             <a:r>
               <a:rPr sz="1700" dirty="0">
@@ -9296,23 +10106,7 @@
                   <a:srgbClr val="555555"/>
                 </a:solidFill>
               </a:rPr>
-              <a:t> does using this classifier in DDG </a:t>
-            </a:r>
-            <a:r>
-              <a:rPr lang="en-US" sz="1700" dirty="0">
-                <a:solidFill>
-                  <a:srgbClr val="555555"/>
-                </a:solidFill>
-              </a:rPr>
-              <a:t>train</a:t>
-            </a:r>
-            <a:r>
-              <a:rPr sz="1700" dirty="0">
-                <a:solidFill>
-                  <a:srgbClr val="555555"/>
-                </a:solidFill>
-              </a:rPr>
-              <a:t> a better policy on POGEMA? The most consequential open question.</a:t>
+              <a:t> a better policy on POGEMA?</a:t>
             </a:r>
           </a:p>
         </p:txBody>
@@ -9400,6 +10194,12 @@
 </file>
 
 <file path=ppt/tags/tag2.xml><?xml version="1.0" encoding="utf-8"?>
+<p:tagLst xmlns:a="http://schemas.openxmlformats.org/drawingml/2006/main" xmlns:r="http://schemas.openxmlformats.org/officeDocument/2006/relationships" xmlns:p="http://schemas.openxmlformats.org/presentationml/2006/main">
+  <p:tag name="THINKCELLSHAPEDONOTDELETE" val="thinkcellActiveDocDoNotDelete"/>
+</p:tagLst>
+</file>
+
+<file path=ppt/tags/tag3.xml><?xml version="1.0" encoding="utf-8"?>
 <p:tagLst xmlns:a="http://schemas.openxmlformats.org/drawingml/2006/main" xmlns:r="http://schemas.openxmlformats.org/officeDocument/2006/relationships" xmlns:p="http://schemas.openxmlformats.org/presentationml/2006/main">
   <p:tag name="THINKCELLSHAPEDONOTDELETE" val="thinkcellActiveDocDoNotDelete"/>
 </p:tagLst>
